--- a/사주교육_1회차.pptx
+++ b/사주교육_1회차.pptx
@@ -4,6 +4,9 @@
   <p:sldMasterIdLst>
     <p:sldMasterId id="2147483648" r:id="rId1"/>
   </p:sldMasterIdLst>
+  <p:notesMasterIdLst>
+    <p:notesMasterId r:id="rId34"/>
+  </p:notesMasterIdLst>
   <p:sldIdLst>
     <p:sldId id="256" r:id="rId2"/>
     <p:sldId id="257" r:id="rId3"/>
@@ -38,11 +41,8 @@
     <p:sldId id="286" r:id="rId32"/>
     <p:sldId id="287" r:id="rId33"/>
   </p:sldIdLst>
-  <p:notesMasterIdLst>
-    <p:notesMasterId r:id="rId34"/>
-  </p:notesMasterIdLst>
-  <p:sldSz cx="12191695" cy="6858000"/>
-  <p:notesSz cx="6858000" cy="12191695"/>
+  <p:sldSz cx="12192000" cy="6858000"/>
+  <p:notesSz cx="6858000" cy="12192000"/>
   <p:defaultTextStyle>
     <a:lvl1pPr marL="0" algn="l" defTabSz="914400" rtl="0" eaLnBrk="1" latinLnBrk="0" hangingPunct="1">
       <a:defRPr sz="1800" kern="1200">
@@ -135,6 +135,11 @@
       </a:defRPr>
     </a:lvl9pPr>
   </p:defaultTextStyle>
+  <p:extLst>
+    <p:ext uri="{EFAFB233-063F-42B5-8137-9DF3F51BA10A}">
+      <p15:sldGuideLst xmlns:p15="http://schemas.microsoft.com/office/powerpoint/2012/main"/>
+    </p:ext>
+  </p:extLst>
 </p:presentation>
 </file>
 
@@ -160,240 +165,16 @@
           <a:chExt cx="0" cy="0"/>
         </a:xfrm>
       </p:grpSpPr>
-      <p:sp>
-        <p:nvSpPr>
-          <p:cNvPr id="2" name="Header Placeholder 1"/>
-          <p:cNvSpPr>
-            <a:spLocks noGrp="1"/>
-          </p:cNvSpPr>
-          <p:nvPr>
-            <p:ph type="hdr" sz="quarter"/>
-          </p:nvPr>
-        </p:nvSpPr>
-        <p:spPr>
-          <a:xfrm>
-            <a:off x="0" y="0"/>
-            <a:ext cx="2971800" cy="458788"/>
-          </a:xfrm>
-          <a:prstGeom prst="rect">
-            <a:avLst/>
-          </a:prstGeom>
-        </p:spPr>
-        <p:txBody>
-          <a:bodyPr vert="horz" lIns="91440" tIns="45720" rIns="91440" bIns="45720" rtlCol="0"/>
-          <a:lstStyle>
-            <a:lvl1pPr algn="l">
-              <a:defRPr sz="1200"/>
-            </a:lvl1pPr>
-          </a:lstStyle>
-          <a:p>
-            <a:endParaRPr lang="en-US"/>
-          </a:p>
-        </p:txBody>
-      </p:sp>
-      <p:sp>
-        <p:nvSpPr>
-          <p:cNvPr id="3" name="Date Placeholder 2"/>
-          <p:cNvSpPr>
-            <a:spLocks noGrp="1"/>
-          </p:cNvSpPr>
-          <p:nvPr>
-            <p:ph type="dt" idx="1"/>
-          </p:nvPr>
-        </p:nvSpPr>
-        <p:spPr>
-          <a:xfrm>
-            <a:off x="3884613" y="0"/>
-            <a:ext cx="2971800" cy="458788"/>
-          </a:xfrm>
-          <a:prstGeom prst="rect">
-            <a:avLst/>
-          </a:prstGeom>
-        </p:spPr>
-        <p:txBody>
-          <a:bodyPr vert="horz" lIns="91440" tIns="45720" rIns="91440" bIns="45720" rtlCol="0"/>
-          <a:lstStyle>
-            <a:lvl1pPr algn="r">
-              <a:defRPr sz="1200"/>
-            </a:lvl1pPr>
-          </a:lstStyle>
-          <a:p>
-            <a:fld id="{5282F153-3F37-0F45-9E97-73ACFA13230C}" type="datetimeFigureOut">
-              <a:rPr lang="en-US"/>
-              <a:t>7/23/19</a:t>
-            </a:fld>
-            <a:endParaRPr lang="en-US"/>
-          </a:p>
-        </p:txBody>
-      </p:sp>
-      <p:sp>
-        <p:nvSpPr>
-          <p:cNvPr id="4" name="Slide Image Placeholder 3"/>
-          <p:cNvSpPr>
-            <a:spLocks noGrp="1" noRot="1" noChangeAspect="1"/>
-          </p:cNvSpPr>
-          <p:nvPr>
-            <p:ph type="sldImg" idx="2"/>
-          </p:nvPr>
-        </p:nvSpPr>
-        <p:spPr>
-          <a:xfrm>
-            <a:off x="685800" y="1143000"/>
-            <a:ext cx="5486400" cy="3086100"/>
-          </a:xfrm>
-          <a:prstGeom prst="rect">
-            <a:avLst/>
-          </a:prstGeom>
-          <a:noFill/>
-          <a:ln w="12700">
-            <a:solidFill>
-              <a:prstClr val="black"/>
-            </a:solidFill>
-          </a:ln>
-        </p:spPr>
-        <p:txBody>
-          <a:bodyPr vert="horz" lIns="91440" tIns="45720" rIns="91440" bIns="45720" rtlCol="0" anchor="ctr"/>
-          <a:lstStyle/>
-          <a:p>
-            <a:endParaRPr lang="en-US"/>
-          </a:p>
-        </p:txBody>
-      </p:sp>
-      <p:sp>
-        <p:nvSpPr>
-          <p:cNvPr id="5" name="Notes Placeholder 4"/>
-          <p:cNvSpPr>
-            <a:spLocks noGrp="1"/>
-          </p:cNvSpPr>
-          <p:nvPr>
-            <p:ph type="body" sz="quarter" idx="3"/>
-          </p:nvPr>
-        </p:nvSpPr>
-        <p:spPr>
-          <a:xfrm>
-            <a:off x="685800" y="4400550"/>
-            <a:ext cx="5486400" cy="3600450"/>
-          </a:xfrm>
-          <a:prstGeom prst="rect">
-            <a:avLst/>
-          </a:prstGeom>
-        </p:spPr>
-        <p:txBody>
-          <a:bodyPr vert="horz" lIns="91440" tIns="45720" rIns="91440" bIns="45720" rtlCol="0"/>
-          <a:lstStyle/>
-          <a:p>
-            <a:pPr lvl="0"/>
-            <a:r>
-              <a:rPr lang="en-US"/>
-              <a:t>Click to edit Master text styles</a:t>
-            </a:r>
-          </a:p>
-          <a:p>
-            <a:pPr lvl="1"/>
-            <a:r>
-              <a:rPr lang="en-US"/>
-              <a:t>Second level</a:t>
-            </a:r>
-          </a:p>
-          <a:p>
-            <a:pPr lvl="2"/>
-            <a:r>
-              <a:rPr lang="en-US"/>
-              <a:t>Third level</a:t>
-            </a:r>
-          </a:p>
-          <a:p>
-            <a:pPr lvl="3"/>
-            <a:r>
-              <a:rPr lang="en-US"/>
-              <a:t>Fourth level</a:t>
-            </a:r>
-          </a:p>
-          <a:p>
-            <a:pPr lvl="4"/>
-            <a:r>
-              <a:rPr lang="en-US"/>
-              <a:t>Fifth level</a:t>
-            </a:r>
-          </a:p>
-        </p:txBody>
-      </p:sp>
-      <p:sp>
-        <p:nvSpPr>
-          <p:cNvPr id="6" name="Footer Placeholder 5"/>
-          <p:cNvSpPr>
-            <a:spLocks noGrp="1"/>
-          </p:cNvSpPr>
-          <p:nvPr>
-            <p:ph type="ftr" sz="quarter" idx="4"/>
-          </p:nvPr>
-        </p:nvSpPr>
-        <p:spPr>
-          <a:xfrm>
-            <a:off x="0" y="8685213"/>
-            <a:ext cx="2971800" cy="458787"/>
-          </a:xfrm>
-          <a:prstGeom prst="rect">
-            <a:avLst/>
-          </a:prstGeom>
-        </p:spPr>
-        <p:txBody>
-          <a:bodyPr vert="horz" lIns="91440" tIns="45720" rIns="91440" bIns="45720" rtlCol="0" anchor="b"/>
-          <a:lstStyle>
-            <a:lvl1pPr algn="l">
-              <a:defRPr sz="1200"/>
-            </a:lvl1pPr>
-          </a:lstStyle>
-          <a:p>
-            <a:endParaRPr lang="en-US"/>
-          </a:p>
-        </p:txBody>
-      </p:sp>
-      <p:sp>
-        <p:nvSpPr>
-          <p:cNvPr id="7" name="Slide Number Placeholder 6"/>
-          <p:cNvSpPr>
-            <a:spLocks noGrp="1"/>
-          </p:cNvSpPr>
-          <p:nvPr>
-            <p:ph type="sldNum" sz="quarter" idx="5"/>
-          </p:nvPr>
-        </p:nvSpPr>
-        <p:spPr>
-          <a:xfrm>
-            <a:off x="3884613" y="8685213"/>
-            <a:ext cx="2971800" cy="458787"/>
-          </a:xfrm>
-          <a:prstGeom prst="rect">
-            <a:avLst/>
-          </a:prstGeom>
-        </p:spPr>
-        <p:txBody>
-          <a:bodyPr vert="horz" lIns="91440" tIns="45720" rIns="91440" bIns="45720" rtlCol="0" anchor="b"/>
-          <a:lstStyle>
-            <a:lvl1pPr algn="r">
-              <a:defRPr sz="1200"/>
-            </a:lvl1pPr>
-          </a:lstStyle>
-          <a:p>
-            <a:fld id="{CE5E9CC1-C706-0F49-92D6-E571CC5EEA8F}" type="slidenum">
-              <a:rPr lang="en-US"/>
-              <a:t>‹#›</a:t>
-            </a:fld>
-            <a:endParaRPr lang="en-US"/>
-          </a:p>
-        </p:txBody>
-      </p:sp>
     </p:spTree>
     <p:extLst>
       <p:ext uri="{BB962C8B-B14F-4D97-AF65-F5344CB8AC3E}">
-        <p14:creationId xmlns:p14="http://schemas.microsoft.com/office/powerpoint/2010/main" val="1024086991"/>
+        <p14:creationId xmlns:p14="http://schemas.microsoft.com/office/powerpoint/2010/main" val="1853826665"/>
       </p:ext>
     </p:extLst>
   </p:cSld>
   <p:clrMap bg1="lt1" tx1="dk1" bg2="lt2" tx2="dk2" accent1="accent1" accent2="accent2" accent3="accent3" accent4="accent4" accent5="accent5" accent6="accent6" hlink="hlink" folHlink="folHlink"/>
   <p:notesStyle>
-    <a:lvl1pPr marL="0" algn="l" defTabSz="914400" rtl="0" eaLnBrk="1" latinLnBrk="0" hangingPunct="1">
+    <a:lvl1pPr marL="0" algn="l" defTabSz="914400" rtl="0" eaLnBrk="1" latinLnBrk="1" hangingPunct="1">
       <a:defRPr sz="1200" kern="1200">
         <a:solidFill>
           <a:schemeClr val="tx1"/>
@@ -403,7 +184,7 @@
         <a:cs typeface="+mn-cs"/>
       </a:defRPr>
     </a:lvl1pPr>
-    <a:lvl2pPr marL="457200" algn="l" defTabSz="914400" rtl="0" eaLnBrk="1" latinLnBrk="0" hangingPunct="1">
+    <a:lvl2pPr marL="457200" algn="l" defTabSz="914400" rtl="0" eaLnBrk="1" latinLnBrk="1" hangingPunct="1">
       <a:defRPr sz="1200" kern="1200">
         <a:solidFill>
           <a:schemeClr val="tx1"/>
@@ -413,7 +194,7 @@
         <a:cs typeface="+mn-cs"/>
       </a:defRPr>
     </a:lvl2pPr>
-    <a:lvl3pPr marL="914400" algn="l" defTabSz="914400" rtl="0" eaLnBrk="1" latinLnBrk="0" hangingPunct="1">
+    <a:lvl3pPr marL="914400" algn="l" defTabSz="914400" rtl="0" eaLnBrk="1" latinLnBrk="1" hangingPunct="1">
       <a:defRPr sz="1200" kern="1200">
         <a:solidFill>
           <a:schemeClr val="tx1"/>
@@ -423,7 +204,7 @@
         <a:cs typeface="+mn-cs"/>
       </a:defRPr>
     </a:lvl3pPr>
-    <a:lvl4pPr marL="1371600" algn="l" defTabSz="914400" rtl="0" eaLnBrk="1" latinLnBrk="0" hangingPunct="1">
+    <a:lvl4pPr marL="1371600" algn="l" defTabSz="914400" rtl="0" eaLnBrk="1" latinLnBrk="1" hangingPunct="1">
       <a:defRPr sz="1200" kern="1200">
         <a:solidFill>
           <a:schemeClr val="tx1"/>
@@ -433,7 +214,7 @@
         <a:cs typeface="+mn-cs"/>
       </a:defRPr>
     </a:lvl4pPr>
-    <a:lvl5pPr marL="1828800" algn="l" defTabSz="914400" rtl="0" eaLnBrk="1" latinLnBrk="0" hangingPunct="1">
+    <a:lvl5pPr marL="1828800" algn="l" defTabSz="914400" rtl="0" eaLnBrk="1" latinLnBrk="1" hangingPunct="1">
       <a:defRPr sz="1200" kern="1200">
         <a:solidFill>
           <a:schemeClr val="tx1"/>
@@ -443,7 +224,7 @@
         <a:cs typeface="+mn-cs"/>
       </a:defRPr>
     </a:lvl5pPr>
-    <a:lvl6pPr marL="2286000" algn="l" defTabSz="914400" rtl="0" eaLnBrk="1" latinLnBrk="0" hangingPunct="1">
+    <a:lvl6pPr marL="2286000" algn="l" defTabSz="914400" rtl="0" eaLnBrk="1" latinLnBrk="1" hangingPunct="1">
       <a:defRPr sz="1200" kern="1200">
         <a:solidFill>
           <a:schemeClr val="tx1"/>
@@ -453,7 +234,7 @@
         <a:cs typeface="+mn-cs"/>
       </a:defRPr>
     </a:lvl6pPr>
-    <a:lvl7pPr marL="2743200" algn="l" defTabSz="914400" rtl="0" eaLnBrk="1" latinLnBrk="0" hangingPunct="1">
+    <a:lvl7pPr marL="2743200" algn="l" defTabSz="914400" rtl="0" eaLnBrk="1" latinLnBrk="1" hangingPunct="1">
       <a:defRPr sz="1200" kern="1200">
         <a:solidFill>
           <a:schemeClr val="tx1"/>
@@ -463,7 +244,7 @@
         <a:cs typeface="+mn-cs"/>
       </a:defRPr>
     </a:lvl7pPr>
-    <a:lvl8pPr marL="3200400" algn="l" defTabSz="914400" rtl="0" eaLnBrk="1" latinLnBrk="0" hangingPunct="1">
+    <a:lvl8pPr marL="3200400" algn="l" defTabSz="914400" rtl="0" eaLnBrk="1" latinLnBrk="1" hangingPunct="1">
       <a:defRPr sz="1200" kern="1200">
         <a:solidFill>
           <a:schemeClr val="tx1"/>
@@ -473,7 +254,7 @@
         <a:cs typeface="+mn-cs"/>
       </a:defRPr>
     </a:lvl8pPr>
-    <a:lvl9pPr marL="3657600" algn="l" defTabSz="914400" rtl="0" eaLnBrk="1" latinLnBrk="0" hangingPunct="1">
+    <a:lvl9pPr marL="3657600" algn="l" defTabSz="914400" rtl="0" eaLnBrk="1" latinLnBrk="1" hangingPunct="1">
       <a:defRPr sz="1200" kern="1200">
         <a:solidFill>
           <a:schemeClr val="tx1"/>
@@ -531,10 +312,6 @@
           <a:bodyPr/>
           <a:lstStyle/>
           <a:p>
-            <a:r>
-              <a:rPr lang="en-US" dirty="0"/>
-              <a:t/>
-            </a:r>
             <a:endParaRPr lang="en-US" dirty="0"/>
           </a:p>
         </p:txBody>
@@ -619,10 +396,6 @@
           <a:bodyPr/>
           <a:lstStyle/>
           <a:p>
-            <a:r>
-              <a:rPr lang="en-US" dirty="0"/>
-              <a:t/>
-            </a:r>
             <a:endParaRPr lang="en-US" dirty="0"/>
           </a:p>
         </p:txBody>
@@ -707,10 +480,6 @@
           <a:bodyPr/>
           <a:lstStyle/>
           <a:p>
-            <a:r>
-              <a:rPr lang="en-US" dirty="0"/>
-              <a:t/>
-            </a:r>
             <a:endParaRPr lang="en-US" dirty="0"/>
           </a:p>
         </p:txBody>
@@ -795,10 +564,6 @@
           <a:bodyPr/>
           <a:lstStyle/>
           <a:p>
-            <a:r>
-              <a:rPr lang="en-US" dirty="0"/>
-              <a:t/>
-            </a:r>
             <a:endParaRPr lang="en-US" dirty="0"/>
           </a:p>
         </p:txBody>
@@ -883,10 +648,6 @@
           <a:bodyPr/>
           <a:lstStyle/>
           <a:p>
-            <a:r>
-              <a:rPr lang="en-US" dirty="0"/>
-              <a:t/>
-            </a:r>
             <a:endParaRPr lang="en-US" dirty="0"/>
           </a:p>
         </p:txBody>
@@ -971,10 +732,6 @@
           <a:bodyPr/>
           <a:lstStyle/>
           <a:p>
-            <a:r>
-              <a:rPr lang="en-US" dirty="0"/>
-              <a:t/>
-            </a:r>
             <a:endParaRPr lang="en-US" dirty="0"/>
           </a:p>
         </p:txBody>
@@ -1059,10 +816,6 @@
           <a:bodyPr/>
           <a:lstStyle/>
           <a:p>
-            <a:r>
-              <a:rPr lang="en-US" dirty="0"/>
-              <a:t/>
-            </a:r>
             <a:endParaRPr lang="en-US" dirty="0"/>
           </a:p>
         </p:txBody>
@@ -1147,10 +900,6 @@
           <a:bodyPr/>
           <a:lstStyle/>
           <a:p>
-            <a:r>
-              <a:rPr lang="en-US" dirty="0"/>
-              <a:t/>
-            </a:r>
             <a:endParaRPr lang="en-US" dirty="0"/>
           </a:p>
         </p:txBody>
@@ -1235,10 +984,6 @@
           <a:bodyPr/>
           <a:lstStyle/>
           <a:p>
-            <a:r>
-              <a:rPr lang="en-US" dirty="0"/>
-              <a:t/>
-            </a:r>
             <a:endParaRPr lang="en-US" dirty="0"/>
           </a:p>
         </p:txBody>
@@ -1323,10 +1068,6 @@
           <a:bodyPr/>
           <a:lstStyle/>
           <a:p>
-            <a:r>
-              <a:rPr lang="en-US" dirty="0"/>
-              <a:t/>
-            </a:r>
             <a:endParaRPr lang="en-US" dirty="0"/>
           </a:p>
         </p:txBody>
@@ -1411,10 +1152,6 @@
           <a:bodyPr/>
           <a:lstStyle/>
           <a:p>
-            <a:r>
-              <a:rPr lang="en-US" dirty="0"/>
-              <a:t/>
-            </a:r>
             <a:endParaRPr lang="en-US" dirty="0"/>
           </a:p>
         </p:txBody>
@@ -1499,10 +1236,6 @@
           <a:bodyPr/>
           <a:lstStyle/>
           <a:p>
-            <a:r>
-              <a:rPr lang="en-US" dirty="0"/>
-              <a:t/>
-            </a:r>
             <a:endParaRPr lang="en-US" dirty="0"/>
           </a:p>
         </p:txBody>
@@ -1587,10 +1320,6 @@
           <a:bodyPr/>
           <a:lstStyle/>
           <a:p>
-            <a:r>
-              <a:rPr lang="en-US" dirty="0"/>
-              <a:t/>
-            </a:r>
             <a:endParaRPr lang="en-US" dirty="0"/>
           </a:p>
         </p:txBody>
@@ -1675,10 +1404,6 @@
           <a:bodyPr/>
           <a:lstStyle/>
           <a:p>
-            <a:r>
-              <a:rPr lang="en-US" dirty="0"/>
-              <a:t/>
-            </a:r>
             <a:endParaRPr lang="en-US" dirty="0"/>
           </a:p>
         </p:txBody>
@@ -1763,10 +1488,6 @@
           <a:bodyPr/>
           <a:lstStyle/>
           <a:p>
-            <a:r>
-              <a:rPr lang="en-US" dirty="0"/>
-              <a:t/>
-            </a:r>
             <a:endParaRPr lang="en-US" dirty="0"/>
           </a:p>
         </p:txBody>
@@ -1851,10 +1572,6 @@
           <a:bodyPr/>
           <a:lstStyle/>
           <a:p>
-            <a:r>
-              <a:rPr lang="en-US" dirty="0"/>
-              <a:t/>
-            </a:r>
             <a:endParaRPr lang="en-US" dirty="0"/>
           </a:p>
         </p:txBody>
@@ -1939,10 +1656,6 @@
           <a:bodyPr/>
           <a:lstStyle/>
           <a:p>
-            <a:r>
-              <a:rPr lang="en-US" dirty="0"/>
-              <a:t/>
-            </a:r>
             <a:endParaRPr lang="en-US" dirty="0"/>
           </a:p>
         </p:txBody>
@@ -2027,10 +1740,6 @@
           <a:bodyPr/>
           <a:lstStyle/>
           <a:p>
-            <a:r>
-              <a:rPr lang="en-US" dirty="0"/>
-              <a:t/>
-            </a:r>
             <a:endParaRPr lang="en-US" dirty="0"/>
           </a:p>
         </p:txBody>
@@ -2115,10 +1824,6 @@
           <a:bodyPr/>
           <a:lstStyle/>
           <a:p>
-            <a:r>
-              <a:rPr lang="en-US" dirty="0"/>
-              <a:t/>
-            </a:r>
             <a:endParaRPr lang="en-US" dirty="0"/>
           </a:p>
         </p:txBody>
@@ -2203,10 +1908,6 @@
           <a:bodyPr/>
           <a:lstStyle/>
           <a:p>
-            <a:r>
-              <a:rPr lang="en-US" dirty="0"/>
-              <a:t/>
-            </a:r>
             <a:endParaRPr lang="en-US" dirty="0"/>
           </a:p>
         </p:txBody>
@@ -2291,10 +1992,6 @@
           <a:bodyPr/>
           <a:lstStyle/>
           <a:p>
-            <a:r>
-              <a:rPr lang="en-US" dirty="0"/>
-              <a:t/>
-            </a:r>
             <a:endParaRPr lang="en-US" dirty="0"/>
           </a:p>
         </p:txBody>
@@ -2379,10 +2076,6 @@
           <a:bodyPr/>
           <a:lstStyle/>
           <a:p>
-            <a:r>
-              <a:rPr lang="en-US" dirty="0"/>
-              <a:t/>
-            </a:r>
             <a:endParaRPr lang="en-US" dirty="0"/>
           </a:p>
         </p:txBody>
@@ -2467,10 +2160,6 @@
           <a:bodyPr/>
           <a:lstStyle/>
           <a:p>
-            <a:r>
-              <a:rPr lang="en-US" dirty="0"/>
-              <a:t/>
-            </a:r>
             <a:endParaRPr lang="en-US" dirty="0"/>
           </a:p>
         </p:txBody>
@@ -2555,10 +2244,6 @@
           <a:bodyPr/>
           <a:lstStyle/>
           <a:p>
-            <a:r>
-              <a:rPr lang="en-US" dirty="0"/>
-              <a:t/>
-            </a:r>
             <a:endParaRPr lang="en-US" dirty="0"/>
           </a:p>
         </p:txBody>
@@ -2643,10 +2328,6 @@
           <a:bodyPr/>
           <a:lstStyle/>
           <a:p>
-            <a:r>
-              <a:rPr lang="en-US" dirty="0"/>
-              <a:t/>
-            </a:r>
             <a:endParaRPr lang="en-US" dirty="0"/>
           </a:p>
         </p:txBody>
@@ -2731,10 +2412,6 @@
           <a:bodyPr/>
           <a:lstStyle/>
           <a:p>
-            <a:r>
-              <a:rPr lang="en-US" dirty="0"/>
-              <a:t/>
-            </a:r>
             <a:endParaRPr lang="en-US" dirty="0"/>
           </a:p>
         </p:txBody>
@@ -2819,10 +2496,6 @@
           <a:bodyPr/>
           <a:lstStyle/>
           <a:p>
-            <a:r>
-              <a:rPr lang="en-US" dirty="0"/>
-              <a:t/>
-            </a:r>
             <a:endParaRPr lang="en-US" dirty="0"/>
           </a:p>
         </p:txBody>
@@ -2907,10 +2580,6 @@
           <a:bodyPr/>
           <a:lstStyle/>
           <a:p>
-            <a:r>
-              <a:rPr lang="en-US" dirty="0"/>
-              <a:t/>
-            </a:r>
             <a:endParaRPr lang="en-US" dirty="0"/>
           </a:p>
         </p:txBody>
@@ -2995,10 +2664,6 @@
           <a:bodyPr/>
           <a:lstStyle/>
           <a:p>
-            <a:r>
-              <a:rPr lang="en-US" dirty="0"/>
-              <a:t/>
-            </a:r>
             <a:endParaRPr lang="en-US" dirty="0"/>
           </a:p>
         </p:txBody>
@@ -3083,10 +2748,6 @@
           <a:bodyPr/>
           <a:lstStyle/>
           <a:p>
-            <a:r>
-              <a:rPr lang="en-US" dirty="0"/>
-              <a:t/>
-            </a:r>
             <a:endParaRPr lang="en-US" dirty="0"/>
           </a:p>
         </p:txBody>
@@ -3171,10 +2832,6 @@
           <a:bodyPr/>
           <a:lstStyle/>
           <a:p>
-            <a:r>
-              <a:rPr lang="en-US" dirty="0"/>
-              <a:t/>
-            </a:r>
             <a:endParaRPr lang="en-US" dirty="0"/>
           </a:p>
         </p:txBody>
@@ -3259,10 +2916,6 @@
           <a:bodyPr/>
           <a:lstStyle/>
           <a:p>
-            <a:r>
-              <a:rPr lang="en-US" dirty="0"/>
-              <a:t/>
-            </a:r>
             <a:endParaRPr lang="en-US" dirty="0"/>
           </a:p>
         </p:txBody>
@@ -3336,6 +2989,11 @@
 <file path=ppt/slideMasters/slideMaster1.xml><?xml version="1.0" encoding="utf-8"?>
 <p:sldMaster xmlns:a="http://schemas.openxmlformats.org/drawingml/2006/main" xmlns:r="http://schemas.openxmlformats.org/officeDocument/2006/relationships" xmlns:p="http://schemas.openxmlformats.org/presentationml/2006/main">
   <p:cSld>
+    <p:bg>
+      <p:bgRef idx="1001">
+        <a:schemeClr val="bg1"/>
+      </p:bgRef>
+    </p:bg>
     <p:spTree>
       <p:nvGrpSpPr>
         <p:cNvPr id="1" name=""/>
@@ -3618,6 +3276,7 @@
         <a:solidFill>
           <a:srgbClr val="0C0A09"/>
         </a:solidFill>
+        <a:effectLst/>
       </p:bgPr>
     </p:bg>
     <p:spTree>
@@ -3721,7 +3380,7 @@
           <a:bodyPr wrap="square" rtlCol="0" anchor="ctr"/>
           <a:lstStyle/>
           <a:p>
-            <a:pPr algn="l" indent="0" marL="0">
+            <a:pPr marL="0" indent="0" algn="l">
               <a:buNone/>
             </a:pPr>
             <a:r>
@@ -3760,11 +3419,11 @@
           <a:bodyPr wrap="square" rtlCol="0" anchor="ctr"/>
           <a:lstStyle/>
           <a:p>
-            <a:pPr algn="l" indent="0" marL="0">
-              <a:buNone/>
-            </a:pPr>
-            <a:r>
-              <a:rPr lang="en-US" sz="1100" b="1" spc="400" kern="0" dirty="0">
+            <a:pPr marL="0" indent="0" algn="l">
+              <a:buNone/>
+            </a:pPr>
+            <a:r>
+              <a:rPr lang="en-US" sz="1100" b="1" kern="0" spc="400" dirty="0">
                 <a:solidFill>
                   <a:srgbClr val="A7E5D3"/>
                 </a:solidFill>
@@ -3799,14 +3458,14 @@
           <a:bodyPr wrap="square" rtlCol="0" anchor="t"/>
           <a:lstStyle/>
           <a:p>
-            <a:pPr algn="l" indent="0" marL="0">
+            <a:pPr marL="0" indent="0" algn="l">
               <a:lnSpc>
                 <a:spcPct val="105000"/>
               </a:lnSpc>
               <a:buNone/>
             </a:pPr>
             <a:r>
-              <a:rPr lang="en-US" sz="5400" spc="-100" kern="0" dirty="0">
+              <a:rPr lang="en-US" sz="5400" kern="0" spc="-100" dirty="0">
                 <a:solidFill>
                   <a:srgbClr val="FFFFFF"/>
                 </a:solidFill>
@@ -3819,14 +3478,14 @@
             <a:endParaRPr lang="en-US" sz="5400" dirty="0"/>
           </a:p>
           <a:p>
-            <a:pPr algn="l" indent="0" marL="0">
+            <a:pPr marL="0" indent="0" algn="l">
               <a:lnSpc>
                 <a:spcPct val="105000"/>
               </a:lnSpc>
               <a:buNone/>
             </a:pPr>
             <a:r>
-              <a:rPr lang="en-US" sz="5400" spc="-100" kern="0" dirty="0">
+              <a:rPr lang="en-US" sz="5400" kern="0" spc="-100" dirty="0">
                 <a:solidFill>
                   <a:srgbClr val="FFFFFF"/>
                 </a:solidFill>
@@ -3861,7 +3520,7 @@
           <a:bodyPr wrap="square" rtlCol="0" anchor="ctr"/>
           <a:lstStyle/>
           <a:p>
-            <a:pPr algn="l" indent="0" marL="0">
+            <a:pPr marL="0" indent="0" algn="l">
               <a:buNone/>
             </a:pPr>
             <a:r>
@@ -3922,11 +3581,11 @@
           <a:bodyPr wrap="square" rtlCol="0" anchor="ctr"/>
           <a:lstStyle/>
           <a:p>
-            <a:pPr algn="ctr" indent="0" marL="0">
-              <a:buNone/>
-            </a:pPr>
-            <a:r>
-              <a:rPr lang="en-US" sz="1050" b="1" spc="50" kern="0" dirty="0">
+            <a:pPr marL="0" indent="0" algn="ctr">
+              <a:buNone/>
+            </a:pPr>
+            <a:r>
+              <a:rPr lang="en-US" sz="1050" b="1" kern="0" spc="50" dirty="0">
                 <a:solidFill>
                   <a:srgbClr val="FFFFFF"/>
                 </a:solidFill>
@@ -3984,7 +3643,7 @@
           <a:bodyPr wrap="square" rtlCol="0" anchor="ctr"/>
           <a:lstStyle/>
           <a:p>
-            <a:pPr algn="l" indent="0" marL="0">
+            <a:pPr marL="0" indent="0" algn="l">
               <a:buNone/>
             </a:pPr>
             <a:r>
@@ -4023,7 +3682,7 @@
           <a:bodyPr wrap="square" rtlCol="0" anchor="ctr"/>
           <a:lstStyle/>
           <a:p>
-            <a:pPr algn="r" indent="0" marL="0">
+            <a:pPr marL="0" indent="0" algn="r">
               <a:buNone/>
             </a:pPr>
             <a:r>
@@ -4057,6 +3716,7 @@
         <a:solidFill>
           <a:srgbClr val="F5F5F5"/>
         </a:solidFill>
+        <a:effectLst/>
       </p:bgPr>
     </p:bg>
     <p:spTree>
@@ -4116,7 +3776,7 @@
           <a:bodyPr wrap="square" rtlCol="0" anchor="ctr"/>
           <a:lstStyle/>
           <a:p>
-            <a:pPr algn="l" indent="0" marL="0">
+            <a:pPr marL="0" indent="0" algn="l">
               <a:buNone/>
             </a:pPr>
             <a:r>
@@ -4155,11 +3815,11 @@
           <a:bodyPr wrap="square" rtlCol="0" anchor="ctr"/>
           <a:lstStyle/>
           <a:p>
-            <a:pPr algn="r" indent="0" marL="0">
-              <a:buNone/>
-            </a:pPr>
-            <a:r>
-              <a:rPr lang="en-US" sz="900" b="1" spc="200" kern="0" dirty="0">
+            <a:pPr marL="0" indent="0" algn="r">
+              <a:buNone/>
+            </a:pPr>
+            <a:r>
+              <a:rPr lang="en-US" sz="900" b="1" kern="0" spc="200" dirty="0">
                 <a:solidFill>
                   <a:srgbClr val="777169"/>
                 </a:solidFill>
@@ -4194,11 +3854,11 @@
           <a:bodyPr wrap="square" rtlCol="0" anchor="ctr"/>
           <a:lstStyle/>
           <a:p>
-            <a:pPr algn="l" indent="0" marL="0">
-              <a:buNone/>
-            </a:pPr>
-            <a:r>
-              <a:rPr lang="en-US" sz="900" b="1" spc="300" kern="0" dirty="0">
+            <a:pPr marL="0" indent="0" algn="l">
+              <a:buNone/>
+            </a:pPr>
+            <a:r>
+              <a:rPr lang="en-US" sz="900" b="1" kern="0" spc="300" dirty="0">
                 <a:solidFill>
                   <a:srgbClr val="777169"/>
                 </a:solidFill>
@@ -4233,11 +3893,11 @@
           <a:bodyPr wrap="square" rtlCol="0" anchor="t"/>
           <a:lstStyle/>
           <a:p>
-            <a:pPr algn="l" indent="0" marL="0">
-              <a:buNone/>
-            </a:pPr>
-            <a:r>
-              <a:rPr lang="en-US" sz="2700" spc="-40" kern="0" dirty="0">
+            <a:pPr marL="0" indent="0" algn="l">
+              <a:buNone/>
+            </a:pPr>
+            <a:r>
+              <a:rPr lang="en-US" sz="2700" kern="0" spc="-40" dirty="0">
                 <a:solidFill>
                   <a:srgbClr val="0C0A09"/>
                 </a:solidFill>
@@ -4272,7 +3932,7 @@
           <a:bodyPr wrap="square" rtlCol="0" anchor="ctr"/>
           <a:lstStyle/>
           <a:p>
-            <a:pPr algn="l" indent="0" marL="0">
+            <a:pPr marL="0" indent="0" algn="l">
               <a:buNone/>
             </a:pPr>
             <a:r>
@@ -4334,7 +3994,7 @@
           <a:bodyPr wrap="square" rtlCol="0" anchor="ctr"/>
           <a:lstStyle/>
           <a:p>
-            <a:pPr algn="l" indent="0" marL="0">
+            <a:pPr marL="0" indent="0" algn="l">
               <a:buNone/>
             </a:pPr>
             <a:r>
@@ -4373,7 +4033,7 @@
           <a:bodyPr wrap="square" rtlCol="0" anchor="ctr"/>
           <a:lstStyle/>
           <a:p>
-            <a:pPr algn="r" indent="0" marL="0">
+            <a:pPr marL="0" indent="0" algn="r">
               <a:buNone/>
             </a:pPr>
             <a:r>
@@ -4417,7 +4077,7 @@
             <a:prstDash val="solid"/>
           </a:ln>
           <a:effectLst>
-            <a:outerShdw sx="100000" sy="100000" kx="0" ky="0" algn="bl" rotWithShape="0" blurRad="152400" dist="38100" dir="5400000">
+            <a:outerShdw blurRad="152400" dist="38100" dir="5400000" algn="bl" rotWithShape="0">
               <a:srgbClr val="000000">
                 <a:alpha val="6000"/>
               </a:srgbClr>
@@ -4468,7 +4128,7 @@
           <a:bodyPr wrap="square" rtlCol="0" anchor="ctr"/>
           <a:lstStyle/>
           <a:p>
-            <a:pPr algn="ctr" indent="0" marL="0">
+            <a:pPr marL="0" indent="0" algn="ctr">
               <a:buNone/>
             </a:pPr>
             <a:r>
@@ -4507,7 +4167,7 @@
           <a:bodyPr wrap="square" rtlCol="0" anchor="ctr"/>
           <a:lstStyle/>
           <a:p>
-            <a:pPr indent="0" marL="0">
+            <a:pPr marL="0" indent="0">
               <a:buNone/>
             </a:pPr>
             <a:r>
@@ -4546,7 +4206,7 @@
           <a:bodyPr wrap="square" rtlCol="0" anchor="ctr"/>
           <a:lstStyle/>
           <a:p>
-            <a:pPr indent="0" marL="0">
+            <a:pPr marL="0" indent="0">
               <a:buNone/>
             </a:pPr>
             <a:r>
@@ -4590,7 +4250,7 @@
             <a:prstDash val="solid"/>
           </a:ln>
           <a:effectLst>
-            <a:outerShdw sx="100000" sy="100000" kx="0" ky="0" algn="bl" rotWithShape="0" blurRad="152400" dist="38100" dir="5400000">
+            <a:outerShdw blurRad="152400" dist="38100" dir="5400000" algn="bl" rotWithShape="0">
               <a:srgbClr val="000000">
                 <a:alpha val="6000"/>
               </a:srgbClr>
@@ -4641,7 +4301,7 @@
           <a:bodyPr wrap="square" rtlCol="0" anchor="ctr"/>
           <a:lstStyle/>
           <a:p>
-            <a:pPr algn="ctr" indent="0" marL="0">
+            <a:pPr marL="0" indent="0" algn="ctr">
               <a:buNone/>
             </a:pPr>
             <a:r>
@@ -4680,7 +4340,7 @@
           <a:bodyPr wrap="square" rtlCol="0" anchor="ctr"/>
           <a:lstStyle/>
           <a:p>
-            <a:pPr indent="0" marL="0">
+            <a:pPr marL="0" indent="0">
               <a:buNone/>
             </a:pPr>
             <a:r>
@@ -4719,7 +4379,7 @@
           <a:bodyPr wrap="square" rtlCol="0" anchor="ctr"/>
           <a:lstStyle/>
           <a:p>
-            <a:pPr indent="0" marL="0">
+            <a:pPr marL="0" indent="0">
               <a:buNone/>
             </a:pPr>
             <a:r>
@@ -4763,7 +4423,7 @@
             <a:prstDash val="solid"/>
           </a:ln>
           <a:effectLst>
-            <a:outerShdw sx="100000" sy="100000" kx="0" ky="0" algn="bl" rotWithShape="0" blurRad="152400" dist="38100" dir="5400000">
+            <a:outerShdw blurRad="152400" dist="38100" dir="5400000" algn="bl" rotWithShape="0">
               <a:srgbClr val="000000">
                 <a:alpha val="6000"/>
               </a:srgbClr>
@@ -4814,7 +4474,7 @@
           <a:bodyPr wrap="square" rtlCol="0" anchor="ctr"/>
           <a:lstStyle/>
           <a:p>
-            <a:pPr algn="ctr" indent="0" marL="0">
+            <a:pPr marL="0" indent="0" algn="ctr">
               <a:buNone/>
             </a:pPr>
             <a:r>
@@ -4853,7 +4513,7 @@
           <a:bodyPr wrap="square" rtlCol="0" anchor="ctr"/>
           <a:lstStyle/>
           <a:p>
-            <a:pPr indent="0" marL="0">
+            <a:pPr marL="0" indent="0">
               <a:buNone/>
             </a:pPr>
             <a:r>
@@ -4892,7 +4552,7 @@
           <a:bodyPr wrap="square" rtlCol="0" anchor="ctr"/>
           <a:lstStyle/>
           <a:p>
-            <a:pPr indent="0" marL="0">
+            <a:pPr marL="0" indent="0">
               <a:buNone/>
             </a:pPr>
             <a:r>
@@ -4936,7 +4596,7 @@
             <a:prstDash val="solid"/>
           </a:ln>
           <a:effectLst>
-            <a:outerShdw sx="100000" sy="100000" kx="0" ky="0" algn="bl" rotWithShape="0" blurRad="152400" dist="38100" dir="5400000">
+            <a:outerShdw blurRad="152400" dist="38100" dir="5400000" algn="bl" rotWithShape="0">
               <a:srgbClr val="000000">
                 <a:alpha val="6000"/>
               </a:srgbClr>
@@ -4987,7 +4647,7 @@
           <a:bodyPr wrap="square" rtlCol="0" anchor="ctr"/>
           <a:lstStyle/>
           <a:p>
-            <a:pPr algn="ctr" indent="0" marL="0">
+            <a:pPr marL="0" indent="0" algn="ctr">
               <a:buNone/>
             </a:pPr>
             <a:r>
@@ -5026,7 +4686,7 @@
           <a:bodyPr wrap="square" rtlCol="0" anchor="ctr"/>
           <a:lstStyle/>
           <a:p>
-            <a:pPr indent="0" marL="0">
+            <a:pPr marL="0" indent="0">
               <a:buNone/>
             </a:pPr>
             <a:r>
@@ -5065,7 +4725,7 @@
           <a:bodyPr wrap="square" rtlCol="0" anchor="ctr"/>
           <a:lstStyle/>
           <a:p>
-            <a:pPr indent="0" marL="0">
+            <a:pPr marL="0" indent="0">
               <a:buNone/>
             </a:pPr>
             <a:r>
@@ -5109,7 +4769,7 @@
             <a:prstDash val="solid"/>
           </a:ln>
           <a:effectLst>
-            <a:outerShdw sx="100000" sy="100000" kx="0" ky="0" algn="bl" rotWithShape="0" blurRad="152400" dist="38100" dir="5400000">
+            <a:outerShdw blurRad="152400" dist="38100" dir="5400000" algn="bl" rotWithShape="0">
               <a:srgbClr val="000000">
                 <a:alpha val="6000"/>
               </a:srgbClr>
@@ -5160,7 +4820,7 @@
           <a:bodyPr wrap="square" rtlCol="0" anchor="ctr"/>
           <a:lstStyle/>
           <a:p>
-            <a:pPr algn="ctr" indent="0" marL="0">
+            <a:pPr marL="0" indent="0" algn="ctr">
               <a:buNone/>
             </a:pPr>
             <a:r>
@@ -5199,7 +4859,7 @@
           <a:bodyPr wrap="square" rtlCol="0" anchor="ctr"/>
           <a:lstStyle/>
           <a:p>
-            <a:pPr indent="0" marL="0">
+            <a:pPr marL="0" indent="0">
               <a:buNone/>
             </a:pPr>
             <a:r>
@@ -5238,7 +4898,7 @@
           <a:bodyPr wrap="square" rtlCol="0" anchor="ctr"/>
           <a:lstStyle/>
           <a:p>
-            <a:pPr indent="0" marL="0">
+            <a:pPr marL="0" indent="0">
               <a:buNone/>
             </a:pPr>
             <a:r>
@@ -5282,7 +4942,7 @@
             <a:prstDash val="solid"/>
           </a:ln>
           <a:effectLst>
-            <a:outerShdw sx="100000" sy="100000" kx="0" ky="0" algn="bl" rotWithShape="0" blurRad="152400" dist="38100" dir="5400000">
+            <a:outerShdw blurRad="152400" dist="38100" dir="5400000" algn="bl" rotWithShape="0">
               <a:srgbClr val="000000">
                 <a:alpha val="6000"/>
               </a:srgbClr>
@@ -5333,7 +4993,7 @@
           <a:bodyPr wrap="square" rtlCol="0" anchor="ctr"/>
           <a:lstStyle/>
           <a:p>
-            <a:pPr algn="ctr" indent="0" marL="0">
+            <a:pPr marL="0" indent="0" algn="ctr">
               <a:buNone/>
             </a:pPr>
             <a:r>
@@ -5372,7 +5032,7 @@
           <a:bodyPr wrap="square" rtlCol="0" anchor="ctr"/>
           <a:lstStyle/>
           <a:p>
-            <a:pPr indent="0" marL="0">
+            <a:pPr marL="0" indent="0">
               <a:buNone/>
             </a:pPr>
             <a:r>
@@ -5411,7 +5071,7 @@
           <a:bodyPr wrap="square" rtlCol="0" anchor="ctr"/>
           <a:lstStyle/>
           <a:p>
-            <a:pPr indent="0" marL="0">
+            <a:pPr marL="0" indent="0">
               <a:buNone/>
             </a:pPr>
             <a:r>
@@ -5455,7 +5115,7 @@
             <a:prstDash val="solid"/>
           </a:ln>
           <a:effectLst>
-            <a:outerShdw sx="100000" sy="100000" kx="0" ky="0" algn="bl" rotWithShape="0" blurRad="152400" dist="38100" dir="5400000">
+            <a:outerShdw blurRad="152400" dist="38100" dir="5400000" algn="bl" rotWithShape="0">
               <a:srgbClr val="000000">
                 <a:alpha val="6000"/>
               </a:srgbClr>
@@ -5506,7 +5166,7 @@
           <a:bodyPr wrap="square" rtlCol="0" anchor="ctr"/>
           <a:lstStyle/>
           <a:p>
-            <a:pPr algn="ctr" indent="0" marL="0">
+            <a:pPr marL="0" indent="0" algn="ctr">
               <a:buNone/>
             </a:pPr>
             <a:r>
@@ -5545,7 +5205,7 @@
           <a:bodyPr wrap="square" rtlCol="0" anchor="ctr"/>
           <a:lstStyle/>
           <a:p>
-            <a:pPr indent="0" marL="0">
+            <a:pPr marL="0" indent="0">
               <a:buNone/>
             </a:pPr>
             <a:r>
@@ -5584,7 +5244,7 @@
           <a:bodyPr wrap="square" rtlCol="0" anchor="ctr"/>
           <a:lstStyle/>
           <a:p>
-            <a:pPr indent="0" marL="0">
+            <a:pPr marL="0" indent="0">
               <a:buNone/>
             </a:pPr>
             <a:r>
@@ -5628,7 +5288,7 @@
             <a:prstDash val="solid"/>
           </a:ln>
           <a:effectLst>
-            <a:outerShdw sx="100000" sy="100000" kx="0" ky="0" algn="bl" rotWithShape="0" blurRad="152400" dist="38100" dir="5400000">
+            <a:outerShdw blurRad="152400" dist="38100" dir="5400000" algn="bl" rotWithShape="0">
               <a:srgbClr val="000000">
                 <a:alpha val="6000"/>
               </a:srgbClr>
@@ -5679,7 +5339,7 @@
           <a:bodyPr wrap="square" rtlCol="0" anchor="ctr"/>
           <a:lstStyle/>
           <a:p>
-            <a:pPr algn="ctr" indent="0" marL="0">
+            <a:pPr marL="0" indent="0" algn="ctr">
               <a:buNone/>
             </a:pPr>
             <a:r>
@@ -5718,7 +5378,7 @@
           <a:bodyPr wrap="square" rtlCol="0" anchor="ctr"/>
           <a:lstStyle/>
           <a:p>
-            <a:pPr indent="0" marL="0">
+            <a:pPr marL="0" indent="0">
               <a:buNone/>
             </a:pPr>
             <a:r>
@@ -5757,7 +5417,7 @@
           <a:bodyPr wrap="square" rtlCol="0" anchor="ctr"/>
           <a:lstStyle/>
           <a:p>
-            <a:pPr indent="0" marL="0">
+            <a:pPr marL="0" indent="0">
               <a:buNone/>
             </a:pPr>
             <a:r>
@@ -5801,7 +5461,7 @@
             <a:prstDash val="solid"/>
           </a:ln>
           <a:effectLst>
-            <a:outerShdw sx="100000" sy="100000" kx="0" ky="0" algn="bl" rotWithShape="0" blurRad="152400" dist="38100" dir="5400000">
+            <a:outerShdw blurRad="152400" dist="38100" dir="5400000" algn="bl" rotWithShape="0">
               <a:srgbClr val="000000">
                 <a:alpha val="6000"/>
               </a:srgbClr>
@@ -5852,7 +5512,7 @@
           <a:bodyPr wrap="square" rtlCol="0" anchor="ctr"/>
           <a:lstStyle/>
           <a:p>
-            <a:pPr algn="ctr" indent="0" marL="0">
+            <a:pPr marL="0" indent="0" algn="ctr">
               <a:buNone/>
             </a:pPr>
             <a:r>
@@ -5891,7 +5551,7 @@
           <a:bodyPr wrap="square" rtlCol="0" anchor="ctr"/>
           <a:lstStyle/>
           <a:p>
-            <a:pPr indent="0" marL="0">
+            <a:pPr marL="0" indent="0">
               <a:buNone/>
             </a:pPr>
             <a:r>
@@ -5930,7 +5590,7 @@
           <a:bodyPr wrap="square" rtlCol="0" anchor="ctr"/>
           <a:lstStyle/>
           <a:p>
-            <a:pPr indent="0" marL="0">
+            <a:pPr marL="0" indent="0">
               <a:buNone/>
             </a:pPr>
             <a:r>
@@ -5974,7 +5634,7 @@
             <a:prstDash val="solid"/>
           </a:ln>
           <a:effectLst>
-            <a:outerShdw sx="100000" sy="100000" kx="0" ky="0" algn="bl" rotWithShape="0" blurRad="152400" dist="38100" dir="5400000">
+            <a:outerShdw blurRad="152400" dist="38100" dir="5400000" algn="bl" rotWithShape="0">
               <a:srgbClr val="000000">
                 <a:alpha val="6000"/>
               </a:srgbClr>
@@ -6025,7 +5685,7 @@
           <a:bodyPr wrap="square" rtlCol="0" anchor="ctr"/>
           <a:lstStyle/>
           <a:p>
-            <a:pPr algn="ctr" indent="0" marL="0">
+            <a:pPr marL="0" indent="0" algn="ctr">
               <a:buNone/>
             </a:pPr>
             <a:r>
@@ -6064,7 +5724,7 @@
           <a:bodyPr wrap="square" rtlCol="0" anchor="ctr"/>
           <a:lstStyle/>
           <a:p>
-            <a:pPr indent="0" marL="0">
+            <a:pPr marL="0" indent="0">
               <a:buNone/>
             </a:pPr>
             <a:r>
@@ -6103,7 +5763,7 @@
           <a:bodyPr wrap="square" rtlCol="0" anchor="ctr"/>
           <a:lstStyle/>
           <a:p>
-            <a:pPr indent="0" marL="0">
+            <a:pPr marL="0" indent="0">
               <a:buNone/>
             </a:pPr>
             <a:r>
@@ -6137,6 +5797,7 @@
         <a:solidFill>
           <a:srgbClr val="F5F5F5"/>
         </a:solidFill>
+        <a:effectLst/>
       </p:bgPr>
     </p:bg>
     <p:spTree>
@@ -6196,7 +5857,7 @@
           <a:bodyPr wrap="square" rtlCol="0" anchor="ctr"/>
           <a:lstStyle/>
           <a:p>
-            <a:pPr algn="l" indent="0" marL="0">
+            <a:pPr marL="0" indent="0" algn="l">
               <a:buNone/>
             </a:pPr>
             <a:r>
@@ -6235,11 +5896,11 @@
           <a:bodyPr wrap="square" rtlCol="0" anchor="ctr"/>
           <a:lstStyle/>
           <a:p>
-            <a:pPr algn="r" indent="0" marL="0">
-              <a:buNone/>
-            </a:pPr>
-            <a:r>
-              <a:rPr lang="en-US" sz="900" b="1" spc="200" kern="0" dirty="0">
+            <a:pPr marL="0" indent="0" algn="r">
+              <a:buNone/>
+            </a:pPr>
+            <a:r>
+              <a:rPr lang="en-US" sz="900" b="1" kern="0" spc="200" dirty="0">
                 <a:solidFill>
                   <a:srgbClr val="777169"/>
                 </a:solidFill>
@@ -6274,11 +5935,11 @@
           <a:bodyPr wrap="square" rtlCol="0" anchor="ctr"/>
           <a:lstStyle/>
           <a:p>
-            <a:pPr algn="l" indent="0" marL="0">
-              <a:buNone/>
-            </a:pPr>
-            <a:r>
-              <a:rPr lang="en-US" sz="900" b="1" spc="300" kern="0" dirty="0">
+            <a:pPr marL="0" indent="0" algn="l">
+              <a:buNone/>
+            </a:pPr>
+            <a:r>
+              <a:rPr lang="en-US" sz="900" b="1" kern="0" spc="300" dirty="0">
                 <a:solidFill>
                   <a:srgbClr val="777169"/>
                 </a:solidFill>
@@ -6313,11 +5974,11 @@
           <a:bodyPr wrap="square" rtlCol="0" anchor="t"/>
           <a:lstStyle/>
           <a:p>
-            <a:pPr algn="l" indent="0" marL="0">
-              <a:buNone/>
-            </a:pPr>
-            <a:r>
-              <a:rPr lang="en-US" sz="2700" spc="-40" kern="0" dirty="0">
+            <a:pPr marL="0" indent="0" algn="l">
+              <a:buNone/>
+            </a:pPr>
+            <a:r>
+              <a:rPr lang="en-US" sz="2700" kern="0" spc="-40" dirty="0">
                 <a:solidFill>
                   <a:srgbClr val="0C0A09"/>
                 </a:solidFill>
@@ -6352,7 +6013,7 @@
           <a:bodyPr wrap="square" rtlCol="0" anchor="ctr"/>
           <a:lstStyle/>
           <a:p>
-            <a:pPr algn="l" indent="0" marL="0">
+            <a:pPr marL="0" indent="0" algn="l">
               <a:buNone/>
             </a:pPr>
             <a:r>
@@ -6414,7 +6075,7 @@
           <a:bodyPr wrap="square" rtlCol="0" anchor="ctr"/>
           <a:lstStyle/>
           <a:p>
-            <a:pPr algn="l" indent="0" marL="0">
+            <a:pPr marL="0" indent="0" algn="l">
               <a:buNone/>
             </a:pPr>
             <a:r>
@@ -6453,7 +6114,7 @@
           <a:bodyPr wrap="square" rtlCol="0" anchor="ctr"/>
           <a:lstStyle/>
           <a:p>
-            <a:pPr algn="r" indent="0" marL="0">
+            <a:pPr marL="0" indent="0" algn="r">
               <a:buNone/>
             </a:pPr>
             <a:r>
@@ -6497,7 +6158,7 @@
             <a:prstDash val="solid"/>
           </a:ln>
           <a:effectLst>
-            <a:outerShdw sx="100000" sy="100000" kx="0" ky="0" algn="bl" rotWithShape="0" blurRad="152400" dist="38100" dir="5400000">
+            <a:outerShdw blurRad="152400" dist="38100" dir="5400000" algn="bl" rotWithShape="0">
               <a:srgbClr val="000000">
                 <a:alpha val="6000"/>
               </a:srgbClr>
@@ -6572,7 +6233,7 @@
           <a:bodyPr wrap="square" rtlCol="0" anchor="ctr"/>
           <a:lstStyle/>
           <a:p>
-            <a:pPr algn="ctr" indent="0" marL="0">
+            <a:pPr marL="0" indent="0" algn="ctr">
               <a:buNone/>
             </a:pPr>
             <a:r>
@@ -6611,7 +6272,7 @@
           <a:bodyPr wrap="square" rtlCol="0" anchor="ctr"/>
           <a:lstStyle/>
           <a:p>
-            <a:pPr algn="ctr" indent="0" marL="0">
+            <a:pPr marL="0" indent="0" algn="ctr">
               <a:buNone/>
             </a:pPr>
             <a:r>
@@ -6650,7 +6311,7 @@
           <a:bodyPr wrap="square" rtlCol="0" anchor="ctr"/>
           <a:lstStyle/>
           <a:p>
-            <a:pPr algn="ctr" indent="0" marL="0">
+            <a:pPr marL="0" indent="0" algn="ctr">
               <a:buNone/>
             </a:pPr>
             <a:r>
@@ -6689,7 +6350,7 @@
           <a:bodyPr wrap="square" rtlCol="0" anchor="ctr"/>
           <a:lstStyle/>
           <a:p>
-            <a:pPr algn="ctr" indent="0" marL="0">
+            <a:pPr marL="0" indent="0" algn="ctr">
               <a:buNone/>
             </a:pPr>
             <a:r>
@@ -6733,7 +6394,7 @@
             <a:prstDash val="solid"/>
           </a:ln>
           <a:effectLst>
-            <a:outerShdw sx="100000" sy="100000" kx="0" ky="0" algn="bl" rotWithShape="0" blurRad="152400" dist="38100" dir="5400000">
+            <a:outerShdw blurRad="152400" dist="38100" dir="5400000" algn="bl" rotWithShape="0">
               <a:srgbClr val="000000">
                 <a:alpha val="6000"/>
               </a:srgbClr>
@@ -6808,7 +6469,7 @@
           <a:bodyPr wrap="square" rtlCol="0" anchor="ctr"/>
           <a:lstStyle/>
           <a:p>
-            <a:pPr algn="ctr" indent="0" marL="0">
+            <a:pPr marL="0" indent="0" algn="ctr">
               <a:buNone/>
             </a:pPr>
             <a:r>
@@ -6847,7 +6508,7 @@
           <a:bodyPr wrap="square" rtlCol="0" anchor="ctr"/>
           <a:lstStyle/>
           <a:p>
-            <a:pPr algn="ctr" indent="0" marL="0">
+            <a:pPr marL="0" indent="0" algn="ctr">
               <a:buNone/>
             </a:pPr>
             <a:r>
@@ -6886,7 +6547,7 @@
           <a:bodyPr wrap="square" rtlCol="0" anchor="ctr"/>
           <a:lstStyle/>
           <a:p>
-            <a:pPr algn="ctr" indent="0" marL="0">
+            <a:pPr marL="0" indent="0" algn="ctr">
               <a:buNone/>
             </a:pPr>
             <a:r>
@@ -6925,7 +6586,7 @@
           <a:bodyPr wrap="square" rtlCol="0" anchor="ctr"/>
           <a:lstStyle/>
           <a:p>
-            <a:pPr algn="ctr" indent="0" marL="0">
+            <a:pPr marL="0" indent="0" algn="ctr">
               <a:buNone/>
             </a:pPr>
             <a:r>
@@ -6969,7 +6630,7 @@
             <a:prstDash val="solid"/>
           </a:ln>
           <a:effectLst>
-            <a:outerShdw sx="100000" sy="100000" kx="0" ky="0" algn="bl" rotWithShape="0" blurRad="152400" dist="38100" dir="5400000">
+            <a:outerShdw blurRad="152400" dist="38100" dir="5400000" algn="bl" rotWithShape="0">
               <a:srgbClr val="000000">
                 <a:alpha val="6000"/>
               </a:srgbClr>
@@ -7044,7 +6705,7 @@
           <a:bodyPr wrap="square" rtlCol="0" anchor="ctr"/>
           <a:lstStyle/>
           <a:p>
-            <a:pPr algn="ctr" indent="0" marL="0">
+            <a:pPr marL="0" indent="0" algn="ctr">
               <a:buNone/>
             </a:pPr>
             <a:r>
@@ -7083,7 +6744,7 @@
           <a:bodyPr wrap="square" rtlCol="0" anchor="ctr"/>
           <a:lstStyle/>
           <a:p>
-            <a:pPr algn="ctr" indent="0" marL="0">
+            <a:pPr marL="0" indent="0" algn="ctr">
               <a:buNone/>
             </a:pPr>
             <a:r>
@@ -7122,7 +6783,7 @@
           <a:bodyPr wrap="square" rtlCol="0" anchor="ctr"/>
           <a:lstStyle/>
           <a:p>
-            <a:pPr algn="ctr" indent="0" marL="0">
+            <a:pPr marL="0" indent="0" algn="ctr">
               <a:buNone/>
             </a:pPr>
             <a:r>
@@ -7161,7 +6822,7 @@
           <a:bodyPr wrap="square" rtlCol="0" anchor="ctr"/>
           <a:lstStyle/>
           <a:p>
-            <a:pPr algn="ctr" indent="0" marL="0">
+            <a:pPr marL="0" indent="0" algn="ctr">
               <a:buNone/>
             </a:pPr>
             <a:r>
@@ -7205,7 +6866,7 @@
             <a:prstDash val="solid"/>
           </a:ln>
           <a:effectLst>
-            <a:outerShdw sx="100000" sy="100000" kx="0" ky="0" algn="bl" rotWithShape="0" blurRad="152400" dist="38100" dir="5400000">
+            <a:outerShdw blurRad="152400" dist="38100" dir="5400000" algn="bl" rotWithShape="0">
               <a:srgbClr val="000000">
                 <a:alpha val="6000"/>
               </a:srgbClr>
@@ -7280,7 +6941,7 @@
           <a:bodyPr wrap="square" rtlCol="0" anchor="ctr"/>
           <a:lstStyle/>
           <a:p>
-            <a:pPr algn="ctr" indent="0" marL="0">
+            <a:pPr marL="0" indent="0" algn="ctr">
               <a:buNone/>
             </a:pPr>
             <a:r>
@@ -7319,7 +6980,7 @@
           <a:bodyPr wrap="square" rtlCol="0" anchor="ctr"/>
           <a:lstStyle/>
           <a:p>
-            <a:pPr algn="ctr" indent="0" marL="0">
+            <a:pPr marL="0" indent="0" algn="ctr">
               <a:buNone/>
             </a:pPr>
             <a:r>
@@ -7358,7 +7019,7 @@
           <a:bodyPr wrap="square" rtlCol="0" anchor="ctr"/>
           <a:lstStyle/>
           <a:p>
-            <a:pPr algn="ctr" indent="0" marL="0">
+            <a:pPr marL="0" indent="0" algn="ctr">
               <a:buNone/>
             </a:pPr>
             <a:r>
@@ -7397,7 +7058,7 @@
           <a:bodyPr wrap="square" rtlCol="0" anchor="ctr"/>
           <a:lstStyle/>
           <a:p>
-            <a:pPr algn="ctr" indent="0" marL="0">
+            <a:pPr marL="0" indent="0" algn="ctr">
               <a:buNone/>
             </a:pPr>
             <a:r>
@@ -7441,7 +7102,7 @@
             <a:prstDash val="solid"/>
           </a:ln>
           <a:effectLst>
-            <a:outerShdw sx="100000" sy="100000" kx="0" ky="0" algn="bl" rotWithShape="0" blurRad="152400" dist="38100" dir="5400000">
+            <a:outerShdw blurRad="152400" dist="38100" dir="5400000" algn="bl" rotWithShape="0">
               <a:srgbClr val="000000">
                 <a:alpha val="6000"/>
               </a:srgbClr>
@@ -7516,7 +7177,7 @@
           <a:bodyPr wrap="square" rtlCol="0" anchor="ctr"/>
           <a:lstStyle/>
           <a:p>
-            <a:pPr algn="ctr" indent="0" marL="0">
+            <a:pPr marL="0" indent="0" algn="ctr">
               <a:buNone/>
             </a:pPr>
             <a:r>
@@ -7555,7 +7216,7 @@
           <a:bodyPr wrap="square" rtlCol="0" anchor="ctr"/>
           <a:lstStyle/>
           <a:p>
-            <a:pPr algn="ctr" indent="0" marL="0">
+            <a:pPr marL="0" indent="0" algn="ctr">
               <a:buNone/>
             </a:pPr>
             <a:r>
@@ -7594,7 +7255,7 @@
           <a:bodyPr wrap="square" rtlCol="0" anchor="ctr"/>
           <a:lstStyle/>
           <a:p>
-            <a:pPr algn="ctr" indent="0" marL="0">
+            <a:pPr marL="0" indent="0" algn="ctr">
               <a:buNone/>
             </a:pPr>
             <a:r>
@@ -7633,7 +7294,7 @@
           <a:bodyPr wrap="square" rtlCol="0" anchor="ctr"/>
           <a:lstStyle/>
           <a:p>
-            <a:pPr algn="ctr" indent="0" marL="0">
+            <a:pPr marL="0" indent="0" algn="ctr">
               <a:buNone/>
             </a:pPr>
             <a:r>
@@ -7677,7 +7338,7 @@
             <a:prstDash val="solid"/>
           </a:ln>
           <a:effectLst>
-            <a:outerShdw sx="100000" sy="100000" kx="0" ky="0" algn="bl" rotWithShape="0" blurRad="152400" dist="38100" dir="5400000">
+            <a:outerShdw blurRad="152400" dist="38100" dir="5400000" algn="bl" rotWithShape="0">
               <a:srgbClr val="000000">
                 <a:alpha val="6000"/>
               </a:srgbClr>
@@ -7752,7 +7413,7 @@
           <a:bodyPr wrap="square" rtlCol="0" anchor="ctr"/>
           <a:lstStyle/>
           <a:p>
-            <a:pPr algn="ctr" indent="0" marL="0">
+            <a:pPr marL="0" indent="0" algn="ctr">
               <a:buNone/>
             </a:pPr>
             <a:r>
@@ -7791,7 +7452,7 @@
           <a:bodyPr wrap="square" rtlCol="0" anchor="ctr"/>
           <a:lstStyle/>
           <a:p>
-            <a:pPr algn="ctr" indent="0" marL="0">
+            <a:pPr marL="0" indent="0" algn="ctr">
               <a:buNone/>
             </a:pPr>
             <a:r>
@@ -7830,7 +7491,7 @@
           <a:bodyPr wrap="square" rtlCol="0" anchor="ctr"/>
           <a:lstStyle/>
           <a:p>
-            <a:pPr algn="ctr" indent="0" marL="0">
+            <a:pPr marL="0" indent="0" algn="ctr">
               <a:buNone/>
             </a:pPr>
             <a:r>
@@ -7869,7 +7530,7 @@
           <a:bodyPr wrap="square" rtlCol="0" anchor="ctr"/>
           <a:lstStyle/>
           <a:p>
-            <a:pPr algn="ctr" indent="0" marL="0">
+            <a:pPr marL="0" indent="0" algn="ctr">
               <a:buNone/>
             </a:pPr>
             <a:r>
@@ -7913,7 +7574,7 @@
             <a:prstDash val="solid"/>
           </a:ln>
           <a:effectLst>
-            <a:outerShdw sx="100000" sy="100000" kx="0" ky="0" algn="bl" rotWithShape="0" blurRad="152400" dist="38100" dir="5400000">
+            <a:outerShdw blurRad="152400" dist="38100" dir="5400000" algn="bl" rotWithShape="0">
               <a:srgbClr val="000000">
                 <a:alpha val="6000"/>
               </a:srgbClr>
@@ -7988,7 +7649,7 @@
           <a:bodyPr wrap="square" rtlCol="0" anchor="ctr"/>
           <a:lstStyle/>
           <a:p>
-            <a:pPr algn="ctr" indent="0" marL="0">
+            <a:pPr marL="0" indent="0" algn="ctr">
               <a:buNone/>
             </a:pPr>
             <a:r>
@@ -8027,7 +7688,7 @@
           <a:bodyPr wrap="square" rtlCol="0" anchor="ctr"/>
           <a:lstStyle/>
           <a:p>
-            <a:pPr algn="ctr" indent="0" marL="0">
+            <a:pPr marL="0" indent="0" algn="ctr">
               <a:buNone/>
             </a:pPr>
             <a:r>
@@ -8066,7 +7727,7 @@
           <a:bodyPr wrap="square" rtlCol="0" anchor="ctr"/>
           <a:lstStyle/>
           <a:p>
-            <a:pPr algn="ctr" indent="0" marL="0">
+            <a:pPr marL="0" indent="0" algn="ctr">
               <a:buNone/>
             </a:pPr>
             <a:r>
@@ -8105,7 +7766,7 @@
           <a:bodyPr wrap="square" rtlCol="0" anchor="ctr"/>
           <a:lstStyle/>
           <a:p>
-            <a:pPr algn="ctr" indent="0" marL="0">
+            <a:pPr marL="0" indent="0" algn="ctr">
               <a:buNone/>
             </a:pPr>
             <a:r>
@@ -8149,7 +7810,7 @@
             <a:prstDash val="solid"/>
           </a:ln>
           <a:effectLst>
-            <a:outerShdw sx="100000" sy="100000" kx="0" ky="0" algn="bl" rotWithShape="0" blurRad="152400" dist="38100" dir="5400000">
+            <a:outerShdw blurRad="152400" dist="38100" dir="5400000" algn="bl" rotWithShape="0">
               <a:srgbClr val="000000">
                 <a:alpha val="6000"/>
               </a:srgbClr>
@@ -8224,7 +7885,7 @@
           <a:bodyPr wrap="square" rtlCol="0" anchor="ctr"/>
           <a:lstStyle/>
           <a:p>
-            <a:pPr algn="ctr" indent="0" marL="0">
+            <a:pPr marL="0" indent="0" algn="ctr">
               <a:buNone/>
             </a:pPr>
             <a:r>
@@ -8263,7 +7924,7 @@
           <a:bodyPr wrap="square" rtlCol="0" anchor="ctr"/>
           <a:lstStyle/>
           <a:p>
-            <a:pPr algn="ctr" indent="0" marL="0">
+            <a:pPr marL="0" indent="0" algn="ctr">
               <a:buNone/>
             </a:pPr>
             <a:r>
@@ -8302,7 +7963,7 @@
           <a:bodyPr wrap="square" rtlCol="0" anchor="ctr"/>
           <a:lstStyle/>
           <a:p>
-            <a:pPr algn="ctr" indent="0" marL="0">
+            <a:pPr marL="0" indent="0" algn="ctr">
               <a:buNone/>
             </a:pPr>
             <a:r>
@@ -8341,7 +8002,7 @@
           <a:bodyPr wrap="square" rtlCol="0" anchor="ctr"/>
           <a:lstStyle/>
           <a:p>
-            <a:pPr algn="ctr" indent="0" marL="0">
+            <a:pPr marL="0" indent="0" algn="ctr">
               <a:buNone/>
             </a:pPr>
             <a:r>
@@ -8385,7 +8046,7 @@
             <a:prstDash val="solid"/>
           </a:ln>
           <a:effectLst>
-            <a:outerShdw sx="100000" sy="100000" kx="0" ky="0" algn="bl" rotWithShape="0" blurRad="152400" dist="38100" dir="5400000">
+            <a:outerShdw blurRad="152400" dist="38100" dir="5400000" algn="bl" rotWithShape="0">
               <a:srgbClr val="000000">
                 <a:alpha val="6000"/>
               </a:srgbClr>
@@ -8460,7 +8121,7 @@
           <a:bodyPr wrap="square" rtlCol="0" anchor="ctr"/>
           <a:lstStyle/>
           <a:p>
-            <a:pPr algn="ctr" indent="0" marL="0">
+            <a:pPr marL="0" indent="0" algn="ctr">
               <a:buNone/>
             </a:pPr>
             <a:r>
@@ -8499,7 +8160,7 @@
           <a:bodyPr wrap="square" rtlCol="0" anchor="ctr"/>
           <a:lstStyle/>
           <a:p>
-            <a:pPr algn="ctr" indent="0" marL="0">
+            <a:pPr marL="0" indent="0" algn="ctr">
               <a:buNone/>
             </a:pPr>
             <a:r>
@@ -8538,7 +8199,7 @@
           <a:bodyPr wrap="square" rtlCol="0" anchor="ctr"/>
           <a:lstStyle/>
           <a:p>
-            <a:pPr algn="ctr" indent="0" marL="0">
+            <a:pPr marL="0" indent="0" algn="ctr">
               <a:buNone/>
             </a:pPr>
             <a:r>
@@ -8577,7 +8238,7 @@
           <a:bodyPr wrap="square" rtlCol="0" anchor="ctr"/>
           <a:lstStyle/>
           <a:p>
-            <a:pPr algn="ctr" indent="0" marL="0">
+            <a:pPr marL="0" indent="0" algn="ctr">
               <a:buNone/>
             </a:pPr>
             <a:r>
@@ -8621,7 +8282,7 @@
             <a:prstDash val="solid"/>
           </a:ln>
           <a:effectLst>
-            <a:outerShdw sx="100000" sy="100000" kx="0" ky="0" algn="bl" rotWithShape="0" blurRad="152400" dist="38100" dir="5400000">
+            <a:outerShdw blurRad="152400" dist="38100" dir="5400000" algn="bl" rotWithShape="0">
               <a:srgbClr val="000000">
                 <a:alpha val="6000"/>
               </a:srgbClr>
@@ -8696,7 +8357,7 @@
           <a:bodyPr wrap="square" rtlCol="0" anchor="ctr"/>
           <a:lstStyle/>
           <a:p>
-            <a:pPr algn="ctr" indent="0" marL="0">
+            <a:pPr marL="0" indent="0" algn="ctr">
               <a:buNone/>
             </a:pPr>
             <a:r>
@@ -8735,7 +8396,7 @@
           <a:bodyPr wrap="square" rtlCol="0" anchor="ctr"/>
           <a:lstStyle/>
           <a:p>
-            <a:pPr algn="ctr" indent="0" marL="0">
+            <a:pPr marL="0" indent="0" algn="ctr">
               <a:buNone/>
             </a:pPr>
             <a:r>
@@ -8774,7 +8435,7 @@
           <a:bodyPr wrap="square" rtlCol="0" anchor="ctr"/>
           <a:lstStyle/>
           <a:p>
-            <a:pPr algn="ctr" indent="0" marL="0">
+            <a:pPr marL="0" indent="0" algn="ctr">
               <a:buNone/>
             </a:pPr>
             <a:r>
@@ -8813,7 +8474,7 @@
           <a:bodyPr wrap="square" rtlCol="0" anchor="ctr"/>
           <a:lstStyle/>
           <a:p>
-            <a:pPr algn="ctr" indent="0" marL="0">
+            <a:pPr marL="0" indent="0" algn="ctr">
               <a:buNone/>
             </a:pPr>
             <a:r>
@@ -8857,7 +8518,7 @@
             <a:prstDash val="solid"/>
           </a:ln>
           <a:effectLst>
-            <a:outerShdw sx="100000" sy="100000" kx="0" ky="0" algn="bl" rotWithShape="0" blurRad="152400" dist="38100" dir="5400000">
+            <a:outerShdw blurRad="152400" dist="38100" dir="5400000" algn="bl" rotWithShape="0">
               <a:srgbClr val="000000">
                 <a:alpha val="6000"/>
               </a:srgbClr>
@@ -8932,7 +8593,7 @@
           <a:bodyPr wrap="square" rtlCol="0" anchor="ctr"/>
           <a:lstStyle/>
           <a:p>
-            <a:pPr algn="ctr" indent="0" marL="0">
+            <a:pPr marL="0" indent="0" algn="ctr">
               <a:buNone/>
             </a:pPr>
             <a:r>
@@ -8971,7 +8632,7 @@
           <a:bodyPr wrap="square" rtlCol="0" anchor="ctr"/>
           <a:lstStyle/>
           <a:p>
-            <a:pPr algn="ctr" indent="0" marL="0">
+            <a:pPr marL="0" indent="0" algn="ctr">
               <a:buNone/>
             </a:pPr>
             <a:r>
@@ -9010,7 +8671,7 @@
           <a:bodyPr wrap="square" rtlCol="0" anchor="ctr"/>
           <a:lstStyle/>
           <a:p>
-            <a:pPr algn="ctr" indent="0" marL="0">
+            <a:pPr marL="0" indent="0" algn="ctr">
               <a:buNone/>
             </a:pPr>
             <a:r>
@@ -9049,7 +8710,7 @@
           <a:bodyPr wrap="square" rtlCol="0" anchor="ctr"/>
           <a:lstStyle/>
           <a:p>
-            <a:pPr algn="ctr" indent="0" marL="0">
+            <a:pPr marL="0" indent="0" algn="ctr">
               <a:buNone/>
             </a:pPr>
             <a:r>
@@ -9093,7 +8754,7 @@
             <a:prstDash val="solid"/>
           </a:ln>
           <a:effectLst>
-            <a:outerShdw sx="100000" sy="100000" kx="0" ky="0" algn="bl" rotWithShape="0" blurRad="152400" dist="38100" dir="5400000">
+            <a:outerShdw blurRad="152400" dist="38100" dir="5400000" algn="bl" rotWithShape="0">
               <a:srgbClr val="000000">
                 <a:alpha val="6000"/>
               </a:srgbClr>
@@ -9168,7 +8829,7 @@
           <a:bodyPr wrap="square" rtlCol="0" anchor="ctr"/>
           <a:lstStyle/>
           <a:p>
-            <a:pPr algn="ctr" indent="0" marL="0">
+            <a:pPr marL="0" indent="0" algn="ctr">
               <a:buNone/>
             </a:pPr>
             <a:r>
@@ -9207,7 +8868,7 @@
           <a:bodyPr wrap="square" rtlCol="0" anchor="ctr"/>
           <a:lstStyle/>
           <a:p>
-            <a:pPr algn="ctr" indent="0" marL="0">
+            <a:pPr marL="0" indent="0" algn="ctr">
               <a:buNone/>
             </a:pPr>
             <a:r>
@@ -9246,7 +8907,7 @@
           <a:bodyPr wrap="square" rtlCol="0" anchor="ctr"/>
           <a:lstStyle/>
           <a:p>
-            <a:pPr algn="ctr" indent="0" marL="0">
+            <a:pPr marL="0" indent="0" algn="ctr">
               <a:buNone/>
             </a:pPr>
             <a:r>
@@ -9285,7 +8946,7 @@
           <a:bodyPr wrap="square" rtlCol="0" anchor="ctr"/>
           <a:lstStyle/>
           <a:p>
-            <a:pPr algn="ctr" indent="0" marL="0">
+            <a:pPr marL="0" indent="0" algn="ctr">
               <a:buNone/>
             </a:pPr>
             <a:r>
@@ -9319,6 +8980,7 @@
         <a:solidFill>
           <a:srgbClr val="F5F5F5"/>
         </a:solidFill>
+        <a:effectLst/>
       </p:bgPr>
     </p:bg>
     <p:spTree>
@@ -9400,7 +9062,7 @@
           <a:bodyPr wrap="square" rtlCol="0" anchor="ctr"/>
           <a:lstStyle/>
           <a:p>
-            <a:pPr algn="l" indent="0" marL="0">
+            <a:pPr marL="0" indent="0" algn="l">
               <a:buNone/>
             </a:pPr>
             <a:r>
@@ -9439,11 +9101,11 @@
           <a:bodyPr wrap="square" rtlCol="0" anchor="ctr"/>
           <a:lstStyle/>
           <a:p>
-            <a:pPr algn="r" indent="0" marL="0">
-              <a:buNone/>
-            </a:pPr>
-            <a:r>
-              <a:rPr lang="en-US" sz="900" b="1" spc="200" kern="0" dirty="0">
+            <a:pPr marL="0" indent="0" algn="r">
+              <a:buNone/>
+            </a:pPr>
+            <a:r>
+              <a:rPr lang="en-US" sz="900" b="1" kern="0" spc="200" dirty="0">
                 <a:solidFill>
                   <a:srgbClr val="777169"/>
                 </a:solidFill>
@@ -9478,11 +9140,11 @@
           <a:bodyPr wrap="square" rtlCol="0" anchor="ctr"/>
           <a:lstStyle/>
           <a:p>
-            <a:pPr algn="l" indent="0" marL="0">
-              <a:buNone/>
-            </a:pPr>
-            <a:r>
-              <a:rPr lang="en-US" sz="1200" b="1" spc="500" kern="0" dirty="0">
+            <a:pPr marL="0" indent="0" algn="l">
+              <a:buNone/>
+            </a:pPr>
+            <a:r>
+              <a:rPr lang="en-US" sz="1200" b="1" kern="0" spc="500" dirty="0">
                 <a:solidFill>
                   <a:srgbClr val="777169"/>
                 </a:solidFill>
@@ -9517,11 +9179,11 @@
           <a:bodyPr wrap="square" rtlCol="0" anchor="t"/>
           <a:lstStyle/>
           <a:p>
-            <a:pPr algn="l" indent="0" marL="0">
-              <a:buNone/>
-            </a:pPr>
-            <a:r>
-              <a:rPr lang="en-US" sz="4800" spc="-100" kern="0" dirty="0">
+            <a:pPr marL="0" indent="0" algn="l">
+              <a:buNone/>
+            </a:pPr>
+            <a:r>
+              <a:rPr lang="en-US" sz="4800" kern="0" spc="-100" dirty="0">
                 <a:solidFill>
                   <a:srgbClr val="0C0A09"/>
                 </a:solidFill>
@@ -9556,11 +9218,11 @@
           <a:bodyPr wrap="square" rtlCol="0" anchor="ctr"/>
           <a:lstStyle/>
           <a:p>
-            <a:pPr algn="l" indent="0" marL="0">
-              <a:buNone/>
-            </a:pPr>
-            <a:r>
-              <a:rPr lang="en-US" sz="1400" b="1" spc="200" kern="0" dirty="0">
+            <a:pPr marL="0" indent="0" algn="l">
+              <a:buNone/>
+            </a:pPr>
+            <a:r>
+              <a:rPr lang="en-US" sz="1400" b="1" kern="0" spc="200" dirty="0">
                 <a:solidFill>
                   <a:srgbClr val="A8A29E"/>
                 </a:solidFill>
@@ -9595,7 +9257,7 @@
           <a:bodyPr wrap="square" rtlCol="0" anchor="t"/>
           <a:lstStyle/>
           <a:p>
-            <a:pPr algn="l" indent="0" marL="0">
+            <a:pPr marL="0" indent="0" algn="l">
               <a:lnSpc>
                 <a:spcPct val="145000"/>
               </a:lnSpc>
@@ -9660,7 +9322,7 @@
           <a:bodyPr wrap="square" rtlCol="0" anchor="ctr"/>
           <a:lstStyle/>
           <a:p>
-            <a:pPr algn="l" indent="0" marL="0">
+            <a:pPr marL="0" indent="0" algn="l">
               <a:buNone/>
             </a:pPr>
             <a:r>
@@ -9699,7 +9361,7 @@
           <a:bodyPr wrap="square" rtlCol="0" anchor="ctr"/>
           <a:lstStyle/>
           <a:p>
-            <a:pPr algn="r" indent="0" marL="0">
+            <a:pPr marL="0" indent="0" algn="r">
               <a:buNone/>
             </a:pPr>
             <a:r>
@@ -9733,6 +9395,7 @@
         <a:solidFill>
           <a:srgbClr val="F5F5F5"/>
         </a:solidFill>
+        <a:effectLst/>
       </p:bgPr>
     </p:bg>
     <p:spTree>
@@ -9792,7 +9455,7 @@
           <a:bodyPr wrap="square" rtlCol="0" anchor="ctr"/>
           <a:lstStyle/>
           <a:p>
-            <a:pPr algn="l" indent="0" marL="0">
+            <a:pPr marL="0" indent="0" algn="l">
               <a:buNone/>
             </a:pPr>
             <a:r>
@@ -9831,11 +9494,11 @@
           <a:bodyPr wrap="square" rtlCol="0" anchor="ctr"/>
           <a:lstStyle/>
           <a:p>
-            <a:pPr algn="r" indent="0" marL="0">
-              <a:buNone/>
-            </a:pPr>
-            <a:r>
-              <a:rPr lang="en-US" sz="900" b="1" spc="200" kern="0" dirty="0">
+            <a:pPr marL="0" indent="0" algn="r">
+              <a:buNone/>
+            </a:pPr>
+            <a:r>
+              <a:rPr lang="en-US" sz="900" b="1" kern="0" spc="200" dirty="0">
                 <a:solidFill>
                   <a:srgbClr val="777169"/>
                 </a:solidFill>
@@ -9870,11 +9533,11 @@
           <a:bodyPr wrap="square" rtlCol="0" anchor="ctr"/>
           <a:lstStyle/>
           <a:p>
-            <a:pPr algn="l" indent="0" marL="0">
-              <a:buNone/>
-            </a:pPr>
-            <a:r>
-              <a:rPr lang="en-US" sz="900" b="1" spc="300" kern="0" dirty="0">
+            <a:pPr marL="0" indent="0" algn="l">
+              <a:buNone/>
+            </a:pPr>
+            <a:r>
+              <a:rPr lang="en-US" sz="900" b="1" kern="0" spc="300" dirty="0">
                 <a:solidFill>
                   <a:srgbClr val="777169"/>
                 </a:solidFill>
@@ -9909,11 +9572,11 @@
           <a:bodyPr wrap="square" rtlCol="0" anchor="t"/>
           <a:lstStyle/>
           <a:p>
-            <a:pPr algn="l" indent="0" marL="0">
-              <a:buNone/>
-            </a:pPr>
-            <a:r>
-              <a:rPr lang="en-US" sz="2700" spc="-40" kern="0" dirty="0">
+            <a:pPr marL="0" indent="0" algn="l">
+              <a:buNone/>
+            </a:pPr>
+            <a:r>
+              <a:rPr lang="en-US" sz="2700" kern="0" spc="-40" dirty="0">
                 <a:solidFill>
                   <a:srgbClr val="0C0A09"/>
                 </a:solidFill>
@@ -9948,7 +9611,7 @@
           <a:bodyPr wrap="square" rtlCol="0" anchor="ctr"/>
           <a:lstStyle/>
           <a:p>
-            <a:pPr algn="l" indent="0" marL="0">
+            <a:pPr marL="0" indent="0" algn="l">
               <a:buNone/>
             </a:pPr>
             <a:r>
@@ -10010,7 +9673,7 @@
           <a:bodyPr wrap="square" rtlCol="0" anchor="ctr"/>
           <a:lstStyle/>
           <a:p>
-            <a:pPr algn="l" indent="0" marL="0">
+            <a:pPr marL="0" indent="0" algn="l">
               <a:buNone/>
             </a:pPr>
             <a:r>
@@ -10049,7 +9712,7 @@
           <a:bodyPr wrap="square" rtlCol="0" anchor="ctr"/>
           <a:lstStyle/>
           <a:p>
-            <a:pPr algn="r" indent="0" marL="0">
+            <a:pPr marL="0" indent="0" algn="r">
               <a:buNone/>
             </a:pPr>
             <a:r>
@@ -10093,7 +9756,7 @@
             <a:prstDash val="solid"/>
           </a:ln>
           <a:effectLst>
-            <a:outerShdw sx="100000" sy="100000" kx="0" ky="0" algn="bl" rotWithShape="0" blurRad="152400" dist="38100" dir="5400000">
+            <a:outerShdw blurRad="152400" dist="38100" dir="5400000" algn="bl" rotWithShape="0">
               <a:srgbClr val="000000">
                 <a:alpha val="6000"/>
               </a:srgbClr>
@@ -10144,7 +9807,7 @@
           <a:bodyPr wrap="square" rtlCol="0" anchor="ctr"/>
           <a:lstStyle/>
           <a:p>
-            <a:pPr algn="ctr" indent="0" marL="0">
+            <a:pPr marL="0" indent="0" algn="ctr">
               <a:buNone/>
             </a:pPr>
             <a:r>
@@ -10183,7 +9846,7 @@
           <a:bodyPr wrap="square" rtlCol="0" anchor="ctr"/>
           <a:lstStyle/>
           <a:p>
-            <a:pPr algn="ctr" indent="0" marL="0">
+            <a:pPr marL="0" indent="0" algn="ctr">
               <a:buNone/>
             </a:pPr>
             <a:r>
@@ -10222,7 +9885,7 @@
           <a:bodyPr wrap="square" rtlCol="0" anchor="ctr"/>
           <a:lstStyle/>
           <a:p>
-            <a:pPr algn="ctr" indent="0" marL="0">
+            <a:pPr marL="0" indent="0" algn="ctr">
               <a:buNone/>
             </a:pPr>
             <a:r>
@@ -10261,7 +9924,7 @@
           <a:bodyPr wrap="square" rtlCol="0" anchor="ctr"/>
           <a:lstStyle/>
           <a:p>
-            <a:pPr algn="ctr" indent="0" marL="0">
+            <a:pPr marL="0" indent="0" algn="ctr">
               <a:buNone/>
             </a:pPr>
             <a:r>
@@ -10300,7 +9963,7 @@
           <a:bodyPr wrap="square" rtlCol="0" anchor="ctr"/>
           <a:lstStyle/>
           <a:p>
-            <a:pPr algn="ctr" indent="0" marL="0">
+            <a:pPr marL="0" indent="0" algn="ctr">
               <a:buNone/>
             </a:pPr>
             <a:r>
@@ -10344,7 +10007,7 @@
             <a:prstDash val="solid"/>
           </a:ln>
           <a:effectLst>
-            <a:outerShdw sx="100000" sy="100000" kx="0" ky="0" algn="bl" rotWithShape="0" blurRad="152400" dist="38100" dir="5400000">
+            <a:outerShdw blurRad="152400" dist="38100" dir="5400000" algn="bl" rotWithShape="0">
               <a:srgbClr val="000000">
                 <a:alpha val="6000"/>
               </a:srgbClr>
@@ -10395,7 +10058,7 @@
           <a:bodyPr wrap="square" rtlCol="0" anchor="ctr"/>
           <a:lstStyle/>
           <a:p>
-            <a:pPr algn="ctr" indent="0" marL="0">
+            <a:pPr marL="0" indent="0" algn="ctr">
               <a:buNone/>
             </a:pPr>
             <a:r>
@@ -10434,7 +10097,7 @@
           <a:bodyPr wrap="square" rtlCol="0" anchor="ctr"/>
           <a:lstStyle/>
           <a:p>
-            <a:pPr algn="ctr" indent="0" marL="0">
+            <a:pPr marL="0" indent="0" algn="ctr">
               <a:buNone/>
             </a:pPr>
             <a:r>
@@ -10473,7 +10136,7 @@
           <a:bodyPr wrap="square" rtlCol="0" anchor="ctr"/>
           <a:lstStyle/>
           <a:p>
-            <a:pPr algn="ctr" indent="0" marL="0">
+            <a:pPr marL="0" indent="0" algn="ctr">
               <a:buNone/>
             </a:pPr>
             <a:r>
@@ -10512,7 +10175,7 @@
           <a:bodyPr wrap="square" rtlCol="0" anchor="ctr"/>
           <a:lstStyle/>
           <a:p>
-            <a:pPr algn="ctr" indent="0" marL="0">
+            <a:pPr marL="0" indent="0" algn="ctr">
               <a:buNone/>
             </a:pPr>
             <a:r>
@@ -10551,7 +10214,7 @@
           <a:bodyPr wrap="square" rtlCol="0" anchor="ctr"/>
           <a:lstStyle/>
           <a:p>
-            <a:pPr algn="ctr" indent="0" marL="0">
+            <a:pPr marL="0" indent="0" algn="ctr">
               <a:buNone/>
             </a:pPr>
             <a:r>
@@ -10595,7 +10258,7 @@
             <a:prstDash val="solid"/>
           </a:ln>
           <a:effectLst>
-            <a:outerShdw sx="100000" sy="100000" kx="0" ky="0" algn="bl" rotWithShape="0" blurRad="152400" dist="38100" dir="5400000">
+            <a:outerShdw blurRad="152400" dist="38100" dir="5400000" algn="bl" rotWithShape="0">
               <a:srgbClr val="000000">
                 <a:alpha val="6000"/>
               </a:srgbClr>
@@ -10646,7 +10309,7 @@
           <a:bodyPr wrap="square" rtlCol="0" anchor="ctr"/>
           <a:lstStyle/>
           <a:p>
-            <a:pPr algn="ctr" indent="0" marL="0">
+            <a:pPr marL="0" indent="0" algn="ctr">
               <a:buNone/>
             </a:pPr>
             <a:r>
@@ -10685,7 +10348,7 @@
           <a:bodyPr wrap="square" rtlCol="0" anchor="ctr"/>
           <a:lstStyle/>
           <a:p>
-            <a:pPr algn="ctr" indent="0" marL="0">
+            <a:pPr marL="0" indent="0" algn="ctr">
               <a:buNone/>
             </a:pPr>
             <a:r>
@@ -10724,7 +10387,7 @@
           <a:bodyPr wrap="square" rtlCol="0" anchor="ctr"/>
           <a:lstStyle/>
           <a:p>
-            <a:pPr algn="ctr" indent="0" marL="0">
+            <a:pPr marL="0" indent="0" algn="ctr">
               <a:buNone/>
             </a:pPr>
             <a:r>
@@ -10763,7 +10426,7 @@
           <a:bodyPr wrap="square" rtlCol="0" anchor="ctr"/>
           <a:lstStyle/>
           <a:p>
-            <a:pPr algn="ctr" indent="0" marL="0">
+            <a:pPr marL="0" indent="0" algn="ctr">
               <a:buNone/>
             </a:pPr>
             <a:r>
@@ -10802,7 +10465,7 @@
           <a:bodyPr wrap="square" rtlCol="0" anchor="ctr"/>
           <a:lstStyle/>
           <a:p>
-            <a:pPr algn="ctr" indent="0" marL="0">
+            <a:pPr marL="0" indent="0" algn="ctr">
               <a:buNone/>
             </a:pPr>
             <a:r>
@@ -10846,7 +10509,7 @@
             <a:prstDash val="solid"/>
           </a:ln>
           <a:effectLst>
-            <a:outerShdw sx="100000" sy="100000" kx="0" ky="0" algn="bl" rotWithShape="0" blurRad="152400" dist="38100" dir="5400000">
+            <a:outerShdw blurRad="152400" dist="38100" dir="5400000" algn="bl" rotWithShape="0">
               <a:srgbClr val="000000">
                 <a:alpha val="6000"/>
               </a:srgbClr>
@@ -10897,7 +10560,7 @@
           <a:bodyPr wrap="square" rtlCol="0" anchor="ctr"/>
           <a:lstStyle/>
           <a:p>
-            <a:pPr algn="ctr" indent="0" marL="0">
+            <a:pPr marL="0" indent="0" algn="ctr">
               <a:buNone/>
             </a:pPr>
             <a:r>
@@ -10936,7 +10599,7 @@
           <a:bodyPr wrap="square" rtlCol="0" anchor="ctr"/>
           <a:lstStyle/>
           <a:p>
-            <a:pPr algn="ctr" indent="0" marL="0">
+            <a:pPr marL="0" indent="0" algn="ctr">
               <a:buNone/>
             </a:pPr>
             <a:r>
@@ -10975,7 +10638,7 @@
           <a:bodyPr wrap="square" rtlCol="0" anchor="ctr"/>
           <a:lstStyle/>
           <a:p>
-            <a:pPr algn="ctr" indent="0" marL="0">
+            <a:pPr marL="0" indent="0" algn="ctr">
               <a:buNone/>
             </a:pPr>
             <a:r>
@@ -11014,7 +10677,7 @@
           <a:bodyPr wrap="square" rtlCol="0" anchor="ctr"/>
           <a:lstStyle/>
           <a:p>
-            <a:pPr algn="ctr" indent="0" marL="0">
+            <a:pPr marL="0" indent="0" algn="ctr">
               <a:buNone/>
             </a:pPr>
             <a:r>
@@ -11053,7 +10716,7 @@
           <a:bodyPr wrap="square" rtlCol="0" anchor="ctr"/>
           <a:lstStyle/>
           <a:p>
-            <a:pPr algn="ctr" indent="0" marL="0">
+            <a:pPr marL="0" indent="0" algn="ctr">
               <a:buNone/>
             </a:pPr>
             <a:r>
@@ -11097,7 +10760,7 @@
             <a:prstDash val="solid"/>
           </a:ln>
           <a:effectLst>
-            <a:outerShdw sx="100000" sy="100000" kx="0" ky="0" algn="bl" rotWithShape="0" blurRad="152400" dist="38100" dir="5400000">
+            <a:outerShdw blurRad="152400" dist="38100" dir="5400000" algn="bl" rotWithShape="0">
               <a:srgbClr val="000000">
                 <a:alpha val="6000"/>
               </a:srgbClr>
@@ -11148,7 +10811,7 @@
           <a:bodyPr wrap="square" rtlCol="0" anchor="ctr"/>
           <a:lstStyle/>
           <a:p>
-            <a:pPr algn="ctr" indent="0" marL="0">
+            <a:pPr marL="0" indent="0" algn="ctr">
               <a:buNone/>
             </a:pPr>
             <a:r>
@@ -11187,7 +10850,7 @@
           <a:bodyPr wrap="square" rtlCol="0" anchor="ctr"/>
           <a:lstStyle/>
           <a:p>
-            <a:pPr algn="ctr" indent="0" marL="0">
+            <a:pPr marL="0" indent="0" algn="ctr">
               <a:buNone/>
             </a:pPr>
             <a:r>
@@ -11226,7 +10889,7 @@
           <a:bodyPr wrap="square" rtlCol="0" anchor="ctr"/>
           <a:lstStyle/>
           <a:p>
-            <a:pPr algn="ctr" indent="0" marL="0">
+            <a:pPr marL="0" indent="0" algn="ctr">
               <a:buNone/>
             </a:pPr>
             <a:r>
@@ -11265,7 +10928,7 @@
           <a:bodyPr wrap="square" rtlCol="0" anchor="ctr"/>
           <a:lstStyle/>
           <a:p>
-            <a:pPr algn="ctr" indent="0" marL="0">
+            <a:pPr marL="0" indent="0" algn="ctr">
               <a:buNone/>
             </a:pPr>
             <a:r>
@@ -11309,7 +10972,7 @@
             <a:prstDash val="solid"/>
           </a:ln>
           <a:effectLst>
-            <a:outerShdw sx="100000" sy="100000" kx="0" ky="0" algn="bl" rotWithShape="0" blurRad="152400" dist="38100" dir="5400000">
+            <a:outerShdw blurRad="152400" dist="38100" dir="5400000" algn="bl" rotWithShape="0">
               <a:srgbClr val="000000">
                 <a:alpha val="6000"/>
               </a:srgbClr>
@@ -11338,7 +11001,7 @@
           <a:bodyPr wrap="square" rtlCol="0" anchor="ctr"/>
           <a:lstStyle/>
           <a:p>
-            <a:pPr indent="0" marL="0">
+            <a:pPr marL="0" indent="0">
               <a:buNone/>
             </a:pPr>
             <a:r>
@@ -11377,7 +11040,7 @@
           <a:bodyPr wrap="square" rtlCol="0" anchor="ctr"/>
           <a:lstStyle/>
           <a:p>
-            <a:pPr indent="0" marL="0">
+            <a:pPr marL="0" indent="0">
               <a:lnSpc>
                 <a:spcPct val="140000"/>
               </a:lnSpc>
@@ -11414,6 +11077,7 @@
         <a:solidFill>
           <a:srgbClr val="F5F5F5"/>
         </a:solidFill>
+        <a:effectLst/>
       </p:bgPr>
     </p:bg>
     <p:spTree>
@@ -11473,7 +11137,7 @@
           <a:bodyPr wrap="square" rtlCol="0" anchor="ctr"/>
           <a:lstStyle/>
           <a:p>
-            <a:pPr algn="l" indent="0" marL="0">
+            <a:pPr marL="0" indent="0" algn="l">
               <a:buNone/>
             </a:pPr>
             <a:r>
@@ -11512,11 +11176,11 @@
           <a:bodyPr wrap="square" rtlCol="0" anchor="ctr"/>
           <a:lstStyle/>
           <a:p>
-            <a:pPr algn="r" indent="0" marL="0">
-              <a:buNone/>
-            </a:pPr>
-            <a:r>
-              <a:rPr lang="en-US" sz="900" b="1" spc="200" kern="0" dirty="0">
+            <a:pPr marL="0" indent="0" algn="r">
+              <a:buNone/>
+            </a:pPr>
+            <a:r>
+              <a:rPr lang="en-US" sz="900" b="1" kern="0" spc="200" dirty="0">
                 <a:solidFill>
                   <a:srgbClr val="777169"/>
                 </a:solidFill>
@@ -11551,11 +11215,11 @@
           <a:bodyPr wrap="square" rtlCol="0" anchor="ctr"/>
           <a:lstStyle/>
           <a:p>
-            <a:pPr algn="l" indent="0" marL="0">
-              <a:buNone/>
-            </a:pPr>
-            <a:r>
-              <a:rPr lang="en-US" sz="900" b="1" spc="300" kern="0" dirty="0">
+            <a:pPr marL="0" indent="0" algn="l">
+              <a:buNone/>
+            </a:pPr>
+            <a:r>
+              <a:rPr lang="en-US" sz="900" b="1" kern="0" spc="300" dirty="0">
                 <a:solidFill>
                   <a:srgbClr val="777169"/>
                 </a:solidFill>
@@ -11590,11 +11254,11 @@
           <a:bodyPr wrap="square" rtlCol="0" anchor="t"/>
           <a:lstStyle/>
           <a:p>
-            <a:pPr algn="l" indent="0" marL="0">
-              <a:buNone/>
-            </a:pPr>
-            <a:r>
-              <a:rPr lang="en-US" sz="2700" spc="-40" kern="0" dirty="0">
+            <a:pPr marL="0" indent="0" algn="l">
+              <a:buNone/>
+            </a:pPr>
+            <a:r>
+              <a:rPr lang="en-US" sz="2700" kern="0" spc="-40" dirty="0">
                 <a:solidFill>
                   <a:srgbClr val="0C0A09"/>
                 </a:solidFill>
@@ -11629,7 +11293,7 @@
           <a:bodyPr wrap="square" rtlCol="0" anchor="ctr"/>
           <a:lstStyle/>
           <a:p>
-            <a:pPr algn="l" indent="0" marL="0">
+            <a:pPr marL="0" indent="0" algn="l">
               <a:buNone/>
             </a:pPr>
             <a:r>
@@ -11691,7 +11355,7 @@
           <a:bodyPr wrap="square" rtlCol="0" anchor="ctr"/>
           <a:lstStyle/>
           <a:p>
-            <a:pPr algn="l" indent="0" marL="0">
+            <a:pPr marL="0" indent="0" algn="l">
               <a:buNone/>
             </a:pPr>
             <a:r>
@@ -11730,7 +11394,7 @@
           <a:bodyPr wrap="square" rtlCol="0" anchor="ctr"/>
           <a:lstStyle/>
           <a:p>
-            <a:pPr algn="r" indent="0" marL="0">
+            <a:pPr marL="0" indent="0" algn="r">
               <a:buNone/>
             </a:pPr>
             <a:r>
@@ -11774,7 +11438,7 @@
             <a:prstDash val="solid"/>
           </a:ln>
           <a:effectLst>
-            <a:outerShdw sx="100000" sy="100000" kx="0" ky="0" algn="bl" rotWithShape="0" blurRad="152400" dist="38100" dir="5400000">
+            <a:outerShdw blurRad="152400" dist="38100" dir="5400000" algn="bl" rotWithShape="0">
               <a:srgbClr val="000000">
                 <a:alpha val="6000"/>
               </a:srgbClr>
@@ -11825,7 +11489,7 @@
           <a:bodyPr wrap="square" rtlCol="0" anchor="ctr"/>
           <a:lstStyle/>
           <a:p>
-            <a:pPr algn="ctr" indent="0" marL="0">
+            <a:pPr marL="0" indent="0" algn="ctr">
               <a:buNone/>
             </a:pPr>
             <a:r>
@@ -11864,7 +11528,7 @@
           <a:bodyPr wrap="square" rtlCol="0" anchor="ctr"/>
           <a:lstStyle/>
           <a:p>
-            <a:pPr algn="ctr" indent="0" marL="0">
+            <a:pPr marL="0" indent="0" algn="ctr">
               <a:buNone/>
             </a:pPr>
             <a:r>
@@ -11908,7 +11572,7 @@
             <a:prstDash val="solid"/>
           </a:ln>
           <a:effectLst>
-            <a:outerShdw sx="100000" sy="100000" kx="0" ky="0" algn="bl" rotWithShape="0" blurRad="152400" dist="38100" dir="5400000">
+            <a:outerShdw blurRad="152400" dist="38100" dir="5400000" algn="bl" rotWithShape="0">
               <a:srgbClr val="000000">
                 <a:alpha val="6000"/>
               </a:srgbClr>
@@ -11937,11 +11601,11 @@
           <a:bodyPr wrap="square" rtlCol="0" anchor="ctr"/>
           <a:lstStyle/>
           <a:p>
-            <a:pPr indent="0" marL="0">
-              <a:buNone/>
-            </a:pPr>
-            <a:r>
-              <a:rPr lang="en-US" sz="1100" b="1" spc="100" kern="0" dirty="0">
+            <a:pPr marL="0" indent="0">
+              <a:buNone/>
+            </a:pPr>
+            <a:r>
+              <a:rPr lang="en-US" sz="1100" b="1" kern="0" spc="100" dirty="0">
                 <a:solidFill>
                   <a:srgbClr val="777169"/>
                 </a:solidFill>
@@ -11976,7 +11640,7 @@
           <a:bodyPr wrap="square" rtlCol="0" anchor="ctr"/>
           <a:lstStyle/>
           <a:p>
-            <a:pPr indent="0" marL="0">
+            <a:pPr marL="0" indent="0">
               <a:buNone/>
             </a:pPr>
             <a:r>
@@ -12015,7 +11679,7 @@
           <a:bodyPr wrap="square" rtlCol="0" anchor="t"/>
           <a:lstStyle/>
           <a:p>
-            <a:pPr indent="0" marL="0">
+            <a:pPr marL="0" indent="0">
               <a:lnSpc>
                 <a:spcPct val="140000"/>
               </a:lnSpc>
@@ -12062,7 +11726,7 @@
             <a:prstDash val="solid"/>
           </a:ln>
           <a:effectLst>
-            <a:outerShdw sx="100000" sy="100000" kx="0" ky="0" algn="bl" rotWithShape="0" blurRad="152400" dist="38100" dir="5400000">
+            <a:outerShdw blurRad="152400" dist="38100" dir="5400000" algn="bl" rotWithShape="0">
               <a:srgbClr val="000000">
                 <a:alpha val="6000"/>
               </a:srgbClr>
@@ -12113,7 +11777,7 @@
           <a:bodyPr wrap="square" rtlCol="0" anchor="ctr"/>
           <a:lstStyle/>
           <a:p>
-            <a:pPr algn="ctr" indent="0" marL="0">
+            <a:pPr marL="0" indent="0" algn="ctr">
               <a:buNone/>
             </a:pPr>
             <a:r>
@@ -12152,7 +11816,7 @@
           <a:bodyPr wrap="square" rtlCol="0" anchor="t"/>
           <a:lstStyle/>
           <a:p>
-            <a:pPr indent="0" marL="0">
+            <a:pPr marL="0" indent="0">
               <a:lnSpc>
                 <a:spcPct val="135000"/>
               </a:lnSpc>
@@ -12199,7 +11863,7 @@
             <a:prstDash val="solid"/>
           </a:ln>
           <a:effectLst>
-            <a:outerShdw sx="100000" sy="100000" kx="0" ky="0" algn="bl" rotWithShape="0" blurRad="152400" dist="38100" dir="5400000">
+            <a:outerShdw blurRad="152400" dist="38100" dir="5400000" algn="bl" rotWithShape="0">
               <a:srgbClr val="000000">
                 <a:alpha val="6000"/>
               </a:srgbClr>
@@ -12250,7 +11914,7 @@
           <a:bodyPr wrap="square" rtlCol="0" anchor="ctr"/>
           <a:lstStyle/>
           <a:p>
-            <a:pPr algn="ctr" indent="0" marL="0">
+            <a:pPr marL="0" indent="0" algn="ctr">
               <a:buNone/>
             </a:pPr>
             <a:r>
@@ -12289,7 +11953,7 @@
           <a:bodyPr wrap="square" rtlCol="0" anchor="t"/>
           <a:lstStyle/>
           <a:p>
-            <a:pPr indent="0" marL="0">
+            <a:pPr marL="0" indent="0">
               <a:lnSpc>
                 <a:spcPct val="135000"/>
               </a:lnSpc>
@@ -12336,7 +12000,7 @@
             <a:prstDash val="solid"/>
           </a:ln>
           <a:effectLst>
-            <a:outerShdw sx="100000" sy="100000" kx="0" ky="0" algn="bl" rotWithShape="0" blurRad="152400" dist="38100" dir="5400000">
+            <a:outerShdw blurRad="152400" dist="38100" dir="5400000" algn="bl" rotWithShape="0">
               <a:srgbClr val="000000">
                 <a:alpha val="6000"/>
               </a:srgbClr>
@@ -12387,7 +12051,7 @@
           <a:bodyPr wrap="square" rtlCol="0" anchor="ctr"/>
           <a:lstStyle/>
           <a:p>
-            <a:pPr algn="ctr" indent="0" marL="0">
+            <a:pPr marL="0" indent="0" algn="ctr">
               <a:buNone/>
             </a:pPr>
             <a:r>
@@ -12426,7 +12090,7 @@
           <a:bodyPr wrap="square" rtlCol="0" anchor="t"/>
           <a:lstStyle/>
           <a:p>
-            <a:pPr indent="0" marL="0">
+            <a:pPr marL="0" indent="0">
               <a:lnSpc>
                 <a:spcPct val="135000"/>
               </a:lnSpc>
@@ -12463,6 +12127,7 @@
         <a:solidFill>
           <a:srgbClr val="F5F5F5"/>
         </a:solidFill>
+        <a:effectLst/>
       </p:bgPr>
     </p:bg>
     <p:spTree>
@@ -12522,7 +12187,7 @@
           <a:bodyPr wrap="square" rtlCol="0" anchor="ctr"/>
           <a:lstStyle/>
           <a:p>
-            <a:pPr algn="l" indent="0" marL="0">
+            <a:pPr marL="0" indent="0" algn="l">
               <a:buNone/>
             </a:pPr>
             <a:r>
@@ -12561,11 +12226,11 @@
           <a:bodyPr wrap="square" rtlCol="0" anchor="ctr"/>
           <a:lstStyle/>
           <a:p>
-            <a:pPr algn="r" indent="0" marL="0">
-              <a:buNone/>
-            </a:pPr>
-            <a:r>
-              <a:rPr lang="en-US" sz="900" b="1" spc="200" kern="0" dirty="0">
+            <a:pPr marL="0" indent="0" algn="r">
+              <a:buNone/>
+            </a:pPr>
+            <a:r>
+              <a:rPr lang="en-US" sz="900" b="1" kern="0" spc="200" dirty="0">
                 <a:solidFill>
                   <a:srgbClr val="777169"/>
                 </a:solidFill>
@@ -12600,11 +12265,11 @@
           <a:bodyPr wrap="square" rtlCol="0" anchor="ctr"/>
           <a:lstStyle/>
           <a:p>
-            <a:pPr algn="l" indent="0" marL="0">
-              <a:buNone/>
-            </a:pPr>
-            <a:r>
-              <a:rPr lang="en-US" sz="900" b="1" spc="300" kern="0" dirty="0">
+            <a:pPr marL="0" indent="0" algn="l">
+              <a:buNone/>
+            </a:pPr>
+            <a:r>
+              <a:rPr lang="en-US" sz="900" b="1" kern="0" spc="300" dirty="0">
                 <a:solidFill>
                   <a:srgbClr val="777169"/>
                 </a:solidFill>
@@ -12639,11 +12304,11 @@
           <a:bodyPr wrap="square" rtlCol="0" anchor="t"/>
           <a:lstStyle/>
           <a:p>
-            <a:pPr algn="l" indent="0" marL="0">
-              <a:buNone/>
-            </a:pPr>
-            <a:r>
-              <a:rPr lang="en-US" sz="2700" spc="-40" kern="0" dirty="0">
+            <a:pPr marL="0" indent="0" algn="l">
+              <a:buNone/>
+            </a:pPr>
+            <a:r>
+              <a:rPr lang="en-US" sz="2700" kern="0" spc="-40" dirty="0">
                 <a:solidFill>
                   <a:srgbClr val="0C0A09"/>
                 </a:solidFill>
@@ -12678,7 +12343,7 @@
           <a:bodyPr wrap="square" rtlCol="0" anchor="ctr"/>
           <a:lstStyle/>
           <a:p>
-            <a:pPr algn="l" indent="0" marL="0">
+            <a:pPr marL="0" indent="0" algn="l">
               <a:buNone/>
             </a:pPr>
             <a:r>
@@ -12740,7 +12405,7 @@
           <a:bodyPr wrap="square" rtlCol="0" anchor="ctr"/>
           <a:lstStyle/>
           <a:p>
-            <a:pPr algn="l" indent="0" marL="0">
+            <a:pPr marL="0" indent="0" algn="l">
               <a:buNone/>
             </a:pPr>
             <a:r>
@@ -12779,7 +12444,7 @@
           <a:bodyPr wrap="square" rtlCol="0" anchor="ctr"/>
           <a:lstStyle/>
           <a:p>
-            <a:pPr algn="r" indent="0" marL="0">
+            <a:pPr marL="0" indent="0" algn="r">
               <a:buNone/>
             </a:pPr>
             <a:r>
@@ -12823,7 +12488,7 @@
             <a:prstDash val="solid"/>
           </a:ln>
           <a:effectLst>
-            <a:outerShdw sx="100000" sy="100000" kx="0" ky="0" algn="bl" rotWithShape="0" blurRad="152400" dist="38100" dir="5400000">
+            <a:outerShdw blurRad="152400" dist="38100" dir="5400000" algn="bl" rotWithShape="0">
               <a:srgbClr val="000000">
                 <a:alpha val="6000"/>
               </a:srgbClr>
@@ -12874,7 +12539,7 @@
           <a:bodyPr wrap="square" rtlCol="0" anchor="ctr"/>
           <a:lstStyle/>
           <a:p>
-            <a:pPr algn="ctr" indent="0" marL="0">
+            <a:pPr marL="0" indent="0" algn="ctr">
               <a:buNone/>
             </a:pPr>
             <a:r>
@@ -12913,7 +12578,7 @@
           <a:bodyPr wrap="square" rtlCol="0" anchor="ctr"/>
           <a:lstStyle/>
           <a:p>
-            <a:pPr algn="ctr" indent="0" marL="0">
+            <a:pPr marL="0" indent="0" algn="ctr">
               <a:buNone/>
             </a:pPr>
             <a:r>
@@ -12957,7 +12622,7 @@
             <a:prstDash val="solid"/>
           </a:ln>
           <a:effectLst>
-            <a:outerShdw sx="100000" sy="100000" kx="0" ky="0" algn="bl" rotWithShape="0" blurRad="152400" dist="38100" dir="5400000">
+            <a:outerShdw blurRad="152400" dist="38100" dir="5400000" algn="bl" rotWithShape="0">
               <a:srgbClr val="000000">
                 <a:alpha val="6000"/>
               </a:srgbClr>
@@ -12986,11 +12651,11 @@
           <a:bodyPr wrap="square" rtlCol="0" anchor="ctr"/>
           <a:lstStyle/>
           <a:p>
-            <a:pPr indent="0" marL="0">
-              <a:buNone/>
-            </a:pPr>
-            <a:r>
-              <a:rPr lang="en-US" sz="1100" b="1" spc="100" kern="0" dirty="0">
+            <a:pPr marL="0" indent="0">
+              <a:buNone/>
+            </a:pPr>
+            <a:r>
+              <a:rPr lang="en-US" sz="1100" b="1" kern="0" spc="100" dirty="0">
                 <a:solidFill>
                   <a:srgbClr val="777169"/>
                 </a:solidFill>
@@ -13025,7 +12690,7 @@
           <a:bodyPr wrap="square" rtlCol="0" anchor="ctr"/>
           <a:lstStyle/>
           <a:p>
-            <a:pPr indent="0" marL="0">
+            <a:pPr marL="0" indent="0">
               <a:buNone/>
             </a:pPr>
             <a:r>
@@ -13064,7 +12729,7 @@
           <a:bodyPr wrap="square" rtlCol="0" anchor="t"/>
           <a:lstStyle/>
           <a:p>
-            <a:pPr indent="0" marL="0">
+            <a:pPr marL="0" indent="0">
               <a:lnSpc>
                 <a:spcPct val="140000"/>
               </a:lnSpc>
@@ -13111,7 +12776,7 @@
             <a:prstDash val="solid"/>
           </a:ln>
           <a:effectLst>
-            <a:outerShdw sx="100000" sy="100000" kx="0" ky="0" algn="bl" rotWithShape="0" blurRad="152400" dist="38100" dir="5400000">
+            <a:outerShdw blurRad="152400" dist="38100" dir="5400000" algn="bl" rotWithShape="0">
               <a:srgbClr val="000000">
                 <a:alpha val="6000"/>
               </a:srgbClr>
@@ -13162,7 +12827,7 @@
           <a:bodyPr wrap="square" rtlCol="0" anchor="ctr"/>
           <a:lstStyle/>
           <a:p>
-            <a:pPr algn="ctr" indent="0" marL="0">
+            <a:pPr marL="0" indent="0" algn="ctr">
               <a:buNone/>
             </a:pPr>
             <a:r>
@@ -13201,7 +12866,7 @@
           <a:bodyPr wrap="square" rtlCol="0" anchor="t"/>
           <a:lstStyle/>
           <a:p>
-            <a:pPr indent="0" marL="0">
+            <a:pPr marL="0" indent="0">
               <a:lnSpc>
                 <a:spcPct val="135000"/>
               </a:lnSpc>
@@ -13248,7 +12913,7 @@
             <a:prstDash val="solid"/>
           </a:ln>
           <a:effectLst>
-            <a:outerShdw sx="100000" sy="100000" kx="0" ky="0" algn="bl" rotWithShape="0" blurRad="152400" dist="38100" dir="5400000">
+            <a:outerShdw blurRad="152400" dist="38100" dir="5400000" algn="bl" rotWithShape="0">
               <a:srgbClr val="000000">
                 <a:alpha val="6000"/>
               </a:srgbClr>
@@ -13299,7 +12964,7 @@
           <a:bodyPr wrap="square" rtlCol="0" anchor="ctr"/>
           <a:lstStyle/>
           <a:p>
-            <a:pPr algn="ctr" indent="0" marL="0">
+            <a:pPr marL="0" indent="0" algn="ctr">
               <a:buNone/>
             </a:pPr>
             <a:r>
@@ -13338,7 +13003,7 @@
           <a:bodyPr wrap="square" rtlCol="0" anchor="t"/>
           <a:lstStyle/>
           <a:p>
-            <a:pPr indent="0" marL="0">
+            <a:pPr marL="0" indent="0">
               <a:lnSpc>
                 <a:spcPct val="135000"/>
               </a:lnSpc>
@@ -13385,7 +13050,7 @@
             <a:prstDash val="solid"/>
           </a:ln>
           <a:effectLst>
-            <a:outerShdw sx="100000" sy="100000" kx="0" ky="0" algn="bl" rotWithShape="0" blurRad="152400" dist="38100" dir="5400000">
+            <a:outerShdw blurRad="152400" dist="38100" dir="5400000" algn="bl" rotWithShape="0">
               <a:srgbClr val="000000">
                 <a:alpha val="6000"/>
               </a:srgbClr>
@@ -13436,7 +13101,7 @@
           <a:bodyPr wrap="square" rtlCol="0" anchor="ctr"/>
           <a:lstStyle/>
           <a:p>
-            <a:pPr algn="ctr" indent="0" marL="0">
+            <a:pPr marL="0" indent="0" algn="ctr">
               <a:buNone/>
             </a:pPr>
             <a:r>
@@ -13475,7 +13140,7 @@
           <a:bodyPr wrap="square" rtlCol="0" anchor="t"/>
           <a:lstStyle/>
           <a:p>
-            <a:pPr indent="0" marL="0">
+            <a:pPr marL="0" indent="0">
               <a:lnSpc>
                 <a:spcPct val="135000"/>
               </a:lnSpc>
@@ -13512,6 +13177,7 @@
         <a:solidFill>
           <a:srgbClr val="F5F5F5"/>
         </a:solidFill>
+        <a:effectLst/>
       </p:bgPr>
     </p:bg>
     <p:spTree>
@@ -13571,7 +13237,7 @@
           <a:bodyPr wrap="square" rtlCol="0" anchor="ctr"/>
           <a:lstStyle/>
           <a:p>
-            <a:pPr algn="l" indent="0" marL="0">
+            <a:pPr marL="0" indent="0" algn="l">
               <a:buNone/>
             </a:pPr>
             <a:r>
@@ -13610,11 +13276,11 @@
           <a:bodyPr wrap="square" rtlCol="0" anchor="ctr"/>
           <a:lstStyle/>
           <a:p>
-            <a:pPr algn="r" indent="0" marL="0">
-              <a:buNone/>
-            </a:pPr>
-            <a:r>
-              <a:rPr lang="en-US" sz="900" b="1" spc="200" kern="0" dirty="0">
+            <a:pPr marL="0" indent="0" algn="r">
+              <a:buNone/>
+            </a:pPr>
+            <a:r>
+              <a:rPr lang="en-US" sz="900" b="1" kern="0" spc="200" dirty="0">
                 <a:solidFill>
                   <a:srgbClr val="777169"/>
                 </a:solidFill>
@@ -13649,11 +13315,11 @@
           <a:bodyPr wrap="square" rtlCol="0" anchor="ctr"/>
           <a:lstStyle/>
           <a:p>
-            <a:pPr algn="l" indent="0" marL="0">
-              <a:buNone/>
-            </a:pPr>
-            <a:r>
-              <a:rPr lang="en-US" sz="900" b="1" spc="300" kern="0" dirty="0">
+            <a:pPr marL="0" indent="0" algn="l">
+              <a:buNone/>
+            </a:pPr>
+            <a:r>
+              <a:rPr lang="en-US" sz="900" b="1" kern="0" spc="300" dirty="0">
                 <a:solidFill>
                   <a:srgbClr val="777169"/>
                 </a:solidFill>
@@ -13688,11 +13354,11 @@
           <a:bodyPr wrap="square" rtlCol="0" anchor="t"/>
           <a:lstStyle/>
           <a:p>
-            <a:pPr algn="l" indent="0" marL="0">
-              <a:buNone/>
-            </a:pPr>
-            <a:r>
-              <a:rPr lang="en-US" sz="2700" spc="-40" kern="0" dirty="0">
+            <a:pPr marL="0" indent="0" algn="l">
+              <a:buNone/>
+            </a:pPr>
+            <a:r>
+              <a:rPr lang="en-US" sz="2700" kern="0" spc="-40" dirty="0">
                 <a:solidFill>
                   <a:srgbClr val="0C0A09"/>
                 </a:solidFill>
@@ -13727,7 +13393,7 @@
           <a:bodyPr wrap="square" rtlCol="0" anchor="ctr"/>
           <a:lstStyle/>
           <a:p>
-            <a:pPr algn="l" indent="0" marL="0">
+            <a:pPr marL="0" indent="0" algn="l">
               <a:buNone/>
             </a:pPr>
             <a:r>
@@ -13789,7 +13455,7 @@
           <a:bodyPr wrap="square" rtlCol="0" anchor="ctr"/>
           <a:lstStyle/>
           <a:p>
-            <a:pPr algn="l" indent="0" marL="0">
+            <a:pPr marL="0" indent="0" algn="l">
               <a:buNone/>
             </a:pPr>
             <a:r>
@@ -13828,7 +13494,7 @@
           <a:bodyPr wrap="square" rtlCol="0" anchor="ctr"/>
           <a:lstStyle/>
           <a:p>
-            <a:pPr algn="r" indent="0" marL="0">
+            <a:pPr marL="0" indent="0" algn="r">
               <a:buNone/>
             </a:pPr>
             <a:r>
@@ -13872,7 +13538,7 @@
             <a:prstDash val="solid"/>
           </a:ln>
           <a:effectLst>
-            <a:outerShdw sx="100000" sy="100000" kx="0" ky="0" algn="bl" rotWithShape="0" blurRad="152400" dist="38100" dir="5400000">
+            <a:outerShdw blurRad="152400" dist="38100" dir="5400000" algn="bl" rotWithShape="0">
               <a:srgbClr val="000000">
                 <a:alpha val="6000"/>
               </a:srgbClr>
@@ -13923,7 +13589,7 @@
           <a:bodyPr wrap="square" rtlCol="0" anchor="ctr"/>
           <a:lstStyle/>
           <a:p>
-            <a:pPr algn="ctr" indent="0" marL="0">
+            <a:pPr marL="0" indent="0" algn="ctr">
               <a:buNone/>
             </a:pPr>
             <a:r>
@@ -13962,7 +13628,7 @@
           <a:bodyPr wrap="square" rtlCol="0" anchor="ctr"/>
           <a:lstStyle/>
           <a:p>
-            <a:pPr algn="ctr" indent="0" marL="0">
+            <a:pPr marL="0" indent="0" algn="ctr">
               <a:buNone/>
             </a:pPr>
             <a:r>
@@ -14006,7 +13672,7 @@
             <a:prstDash val="solid"/>
           </a:ln>
           <a:effectLst>
-            <a:outerShdw sx="100000" sy="100000" kx="0" ky="0" algn="bl" rotWithShape="0" blurRad="152400" dist="38100" dir="5400000">
+            <a:outerShdw blurRad="152400" dist="38100" dir="5400000" algn="bl" rotWithShape="0">
               <a:srgbClr val="000000">
                 <a:alpha val="6000"/>
               </a:srgbClr>
@@ -14035,11 +13701,11 @@
           <a:bodyPr wrap="square" rtlCol="0" anchor="ctr"/>
           <a:lstStyle/>
           <a:p>
-            <a:pPr indent="0" marL="0">
-              <a:buNone/>
-            </a:pPr>
-            <a:r>
-              <a:rPr lang="en-US" sz="1100" b="1" spc="100" kern="0" dirty="0">
+            <a:pPr marL="0" indent="0">
+              <a:buNone/>
+            </a:pPr>
+            <a:r>
+              <a:rPr lang="en-US" sz="1100" b="1" kern="0" spc="100" dirty="0">
                 <a:solidFill>
                   <a:srgbClr val="777169"/>
                 </a:solidFill>
@@ -14074,7 +13740,7 @@
           <a:bodyPr wrap="square" rtlCol="0" anchor="ctr"/>
           <a:lstStyle/>
           <a:p>
-            <a:pPr indent="0" marL="0">
+            <a:pPr marL="0" indent="0">
               <a:buNone/>
             </a:pPr>
             <a:r>
@@ -14113,7 +13779,7 @@
           <a:bodyPr wrap="square" rtlCol="0" anchor="t"/>
           <a:lstStyle/>
           <a:p>
-            <a:pPr indent="0" marL="0">
+            <a:pPr marL="0" indent="0">
               <a:lnSpc>
                 <a:spcPct val="140000"/>
               </a:lnSpc>
@@ -14160,7 +13826,7 @@
             <a:prstDash val="solid"/>
           </a:ln>
           <a:effectLst>
-            <a:outerShdw sx="100000" sy="100000" kx="0" ky="0" algn="bl" rotWithShape="0" blurRad="152400" dist="38100" dir="5400000">
+            <a:outerShdw blurRad="152400" dist="38100" dir="5400000" algn="bl" rotWithShape="0">
               <a:srgbClr val="000000">
                 <a:alpha val="6000"/>
               </a:srgbClr>
@@ -14211,7 +13877,7 @@
           <a:bodyPr wrap="square" rtlCol="0" anchor="ctr"/>
           <a:lstStyle/>
           <a:p>
-            <a:pPr algn="ctr" indent="0" marL="0">
+            <a:pPr marL="0" indent="0" algn="ctr">
               <a:buNone/>
             </a:pPr>
             <a:r>
@@ -14250,7 +13916,7 @@
           <a:bodyPr wrap="square" rtlCol="0" anchor="t"/>
           <a:lstStyle/>
           <a:p>
-            <a:pPr indent="0" marL="0">
+            <a:pPr marL="0" indent="0">
               <a:lnSpc>
                 <a:spcPct val="135000"/>
               </a:lnSpc>
@@ -14297,7 +13963,7 @@
             <a:prstDash val="solid"/>
           </a:ln>
           <a:effectLst>
-            <a:outerShdw sx="100000" sy="100000" kx="0" ky="0" algn="bl" rotWithShape="0" blurRad="152400" dist="38100" dir="5400000">
+            <a:outerShdw blurRad="152400" dist="38100" dir="5400000" algn="bl" rotWithShape="0">
               <a:srgbClr val="000000">
                 <a:alpha val="6000"/>
               </a:srgbClr>
@@ -14348,7 +14014,7 @@
           <a:bodyPr wrap="square" rtlCol="0" anchor="ctr"/>
           <a:lstStyle/>
           <a:p>
-            <a:pPr algn="ctr" indent="0" marL="0">
+            <a:pPr marL="0" indent="0" algn="ctr">
               <a:buNone/>
             </a:pPr>
             <a:r>
@@ -14387,7 +14053,7 @@
           <a:bodyPr wrap="square" rtlCol="0" anchor="t"/>
           <a:lstStyle/>
           <a:p>
-            <a:pPr indent="0" marL="0">
+            <a:pPr marL="0" indent="0">
               <a:lnSpc>
                 <a:spcPct val="135000"/>
               </a:lnSpc>
@@ -14434,7 +14100,7 @@
             <a:prstDash val="solid"/>
           </a:ln>
           <a:effectLst>
-            <a:outerShdw sx="100000" sy="100000" kx="0" ky="0" algn="bl" rotWithShape="0" blurRad="152400" dist="38100" dir="5400000">
+            <a:outerShdw blurRad="152400" dist="38100" dir="5400000" algn="bl" rotWithShape="0">
               <a:srgbClr val="000000">
                 <a:alpha val="6000"/>
               </a:srgbClr>
@@ -14485,7 +14151,7 @@
           <a:bodyPr wrap="square" rtlCol="0" anchor="ctr"/>
           <a:lstStyle/>
           <a:p>
-            <a:pPr algn="ctr" indent="0" marL="0">
+            <a:pPr marL="0" indent="0" algn="ctr">
               <a:buNone/>
             </a:pPr>
             <a:r>
@@ -14524,7 +14190,7 @@
           <a:bodyPr wrap="square" rtlCol="0" anchor="t"/>
           <a:lstStyle/>
           <a:p>
-            <a:pPr indent="0" marL="0">
+            <a:pPr marL="0" indent="0">
               <a:lnSpc>
                 <a:spcPct val="135000"/>
               </a:lnSpc>
@@ -14561,6 +14227,7 @@
         <a:solidFill>
           <a:srgbClr val="F5F5F5"/>
         </a:solidFill>
+        <a:effectLst/>
       </p:bgPr>
     </p:bg>
     <p:spTree>
@@ -14620,7 +14287,7 @@
           <a:bodyPr wrap="square" rtlCol="0" anchor="ctr"/>
           <a:lstStyle/>
           <a:p>
-            <a:pPr algn="l" indent="0" marL="0">
+            <a:pPr marL="0" indent="0" algn="l">
               <a:buNone/>
             </a:pPr>
             <a:r>
@@ -14659,11 +14326,11 @@
           <a:bodyPr wrap="square" rtlCol="0" anchor="ctr"/>
           <a:lstStyle/>
           <a:p>
-            <a:pPr algn="r" indent="0" marL="0">
-              <a:buNone/>
-            </a:pPr>
-            <a:r>
-              <a:rPr lang="en-US" sz="900" b="1" spc="200" kern="0" dirty="0">
+            <a:pPr marL="0" indent="0" algn="r">
+              <a:buNone/>
+            </a:pPr>
+            <a:r>
+              <a:rPr lang="en-US" sz="900" b="1" kern="0" spc="200" dirty="0">
                 <a:solidFill>
                   <a:srgbClr val="777169"/>
                 </a:solidFill>
@@ -14698,11 +14365,11 @@
           <a:bodyPr wrap="square" rtlCol="0" anchor="ctr"/>
           <a:lstStyle/>
           <a:p>
-            <a:pPr algn="l" indent="0" marL="0">
-              <a:buNone/>
-            </a:pPr>
-            <a:r>
-              <a:rPr lang="en-US" sz="900" b="1" spc="300" kern="0" dirty="0">
+            <a:pPr marL="0" indent="0" algn="l">
+              <a:buNone/>
+            </a:pPr>
+            <a:r>
+              <a:rPr lang="en-US" sz="900" b="1" kern="0" spc="300" dirty="0">
                 <a:solidFill>
                   <a:srgbClr val="777169"/>
                 </a:solidFill>
@@ -14737,11 +14404,11 @@
           <a:bodyPr wrap="square" rtlCol="0" anchor="t"/>
           <a:lstStyle/>
           <a:p>
-            <a:pPr algn="l" indent="0" marL="0">
-              <a:buNone/>
-            </a:pPr>
-            <a:r>
-              <a:rPr lang="en-US" sz="2700" spc="-40" kern="0" dirty="0">
+            <a:pPr marL="0" indent="0" algn="l">
+              <a:buNone/>
+            </a:pPr>
+            <a:r>
+              <a:rPr lang="en-US" sz="2700" kern="0" spc="-40" dirty="0">
                 <a:solidFill>
                   <a:srgbClr val="0C0A09"/>
                 </a:solidFill>
@@ -14776,7 +14443,7 @@
           <a:bodyPr wrap="square" rtlCol="0" anchor="ctr"/>
           <a:lstStyle/>
           <a:p>
-            <a:pPr algn="l" indent="0" marL="0">
+            <a:pPr marL="0" indent="0" algn="l">
               <a:buNone/>
             </a:pPr>
             <a:r>
@@ -14838,7 +14505,7 @@
           <a:bodyPr wrap="square" rtlCol="0" anchor="ctr"/>
           <a:lstStyle/>
           <a:p>
-            <a:pPr algn="l" indent="0" marL="0">
+            <a:pPr marL="0" indent="0" algn="l">
               <a:buNone/>
             </a:pPr>
             <a:r>
@@ -14877,7 +14544,7 @@
           <a:bodyPr wrap="square" rtlCol="0" anchor="ctr"/>
           <a:lstStyle/>
           <a:p>
-            <a:pPr algn="r" indent="0" marL="0">
+            <a:pPr marL="0" indent="0" algn="r">
               <a:buNone/>
             </a:pPr>
             <a:r>
@@ -14921,7 +14588,7 @@
             <a:prstDash val="solid"/>
           </a:ln>
           <a:effectLst>
-            <a:outerShdw sx="100000" sy="100000" kx="0" ky="0" algn="bl" rotWithShape="0" blurRad="152400" dist="38100" dir="5400000">
+            <a:outerShdw blurRad="152400" dist="38100" dir="5400000" algn="bl" rotWithShape="0">
               <a:srgbClr val="000000">
                 <a:alpha val="6000"/>
               </a:srgbClr>
@@ -14972,7 +14639,7 @@
           <a:bodyPr wrap="square" rtlCol="0" anchor="ctr"/>
           <a:lstStyle/>
           <a:p>
-            <a:pPr algn="ctr" indent="0" marL="0">
+            <a:pPr marL="0" indent="0" algn="ctr">
               <a:buNone/>
             </a:pPr>
             <a:r>
@@ -15011,7 +14678,7 @@
           <a:bodyPr wrap="square" rtlCol="0" anchor="ctr"/>
           <a:lstStyle/>
           <a:p>
-            <a:pPr algn="ctr" indent="0" marL="0">
+            <a:pPr marL="0" indent="0" algn="ctr">
               <a:buNone/>
             </a:pPr>
             <a:r>
@@ -15055,7 +14722,7 @@
             <a:prstDash val="solid"/>
           </a:ln>
           <a:effectLst>
-            <a:outerShdw sx="100000" sy="100000" kx="0" ky="0" algn="bl" rotWithShape="0" blurRad="152400" dist="38100" dir="5400000">
+            <a:outerShdw blurRad="152400" dist="38100" dir="5400000" algn="bl" rotWithShape="0">
               <a:srgbClr val="000000">
                 <a:alpha val="6000"/>
               </a:srgbClr>
@@ -15084,11 +14751,11 @@
           <a:bodyPr wrap="square" rtlCol="0" anchor="ctr"/>
           <a:lstStyle/>
           <a:p>
-            <a:pPr indent="0" marL="0">
-              <a:buNone/>
-            </a:pPr>
-            <a:r>
-              <a:rPr lang="en-US" sz="1100" b="1" spc="100" kern="0" dirty="0">
+            <a:pPr marL="0" indent="0">
+              <a:buNone/>
+            </a:pPr>
+            <a:r>
+              <a:rPr lang="en-US" sz="1100" b="1" kern="0" spc="100" dirty="0">
                 <a:solidFill>
                   <a:srgbClr val="777169"/>
                 </a:solidFill>
@@ -15123,7 +14790,7 @@
           <a:bodyPr wrap="square" rtlCol="0" anchor="ctr"/>
           <a:lstStyle/>
           <a:p>
-            <a:pPr indent="0" marL="0">
+            <a:pPr marL="0" indent="0">
               <a:buNone/>
             </a:pPr>
             <a:r>
@@ -15162,7 +14829,7 @@
           <a:bodyPr wrap="square" rtlCol="0" anchor="t"/>
           <a:lstStyle/>
           <a:p>
-            <a:pPr indent="0" marL="0">
+            <a:pPr marL="0" indent="0">
               <a:lnSpc>
                 <a:spcPct val="140000"/>
               </a:lnSpc>
@@ -15209,7 +14876,7 @@
             <a:prstDash val="solid"/>
           </a:ln>
           <a:effectLst>
-            <a:outerShdw sx="100000" sy="100000" kx="0" ky="0" algn="bl" rotWithShape="0" blurRad="152400" dist="38100" dir="5400000">
+            <a:outerShdw blurRad="152400" dist="38100" dir="5400000" algn="bl" rotWithShape="0">
               <a:srgbClr val="000000">
                 <a:alpha val="6000"/>
               </a:srgbClr>
@@ -15260,7 +14927,7 @@
           <a:bodyPr wrap="square" rtlCol="0" anchor="ctr"/>
           <a:lstStyle/>
           <a:p>
-            <a:pPr algn="ctr" indent="0" marL="0">
+            <a:pPr marL="0" indent="0" algn="ctr">
               <a:buNone/>
             </a:pPr>
             <a:r>
@@ -15299,7 +14966,7 @@
           <a:bodyPr wrap="square" rtlCol="0" anchor="t"/>
           <a:lstStyle/>
           <a:p>
-            <a:pPr indent="0" marL="0">
+            <a:pPr marL="0" indent="0">
               <a:lnSpc>
                 <a:spcPct val="135000"/>
               </a:lnSpc>
@@ -15346,7 +15013,7 @@
             <a:prstDash val="solid"/>
           </a:ln>
           <a:effectLst>
-            <a:outerShdw sx="100000" sy="100000" kx="0" ky="0" algn="bl" rotWithShape="0" blurRad="152400" dist="38100" dir="5400000">
+            <a:outerShdw blurRad="152400" dist="38100" dir="5400000" algn="bl" rotWithShape="0">
               <a:srgbClr val="000000">
                 <a:alpha val="6000"/>
               </a:srgbClr>
@@ -15397,7 +15064,7 @@
           <a:bodyPr wrap="square" rtlCol="0" anchor="ctr"/>
           <a:lstStyle/>
           <a:p>
-            <a:pPr algn="ctr" indent="0" marL="0">
+            <a:pPr marL="0" indent="0" algn="ctr">
               <a:buNone/>
             </a:pPr>
             <a:r>
@@ -15436,7 +15103,7 @@
           <a:bodyPr wrap="square" rtlCol="0" anchor="t"/>
           <a:lstStyle/>
           <a:p>
-            <a:pPr indent="0" marL="0">
+            <a:pPr marL="0" indent="0">
               <a:lnSpc>
                 <a:spcPct val="135000"/>
               </a:lnSpc>
@@ -15483,7 +15150,7 @@
             <a:prstDash val="solid"/>
           </a:ln>
           <a:effectLst>
-            <a:outerShdw sx="100000" sy="100000" kx="0" ky="0" algn="bl" rotWithShape="0" blurRad="152400" dist="38100" dir="5400000">
+            <a:outerShdw blurRad="152400" dist="38100" dir="5400000" algn="bl" rotWithShape="0">
               <a:srgbClr val="000000">
                 <a:alpha val="6000"/>
               </a:srgbClr>
@@ -15534,7 +15201,7 @@
           <a:bodyPr wrap="square" rtlCol="0" anchor="ctr"/>
           <a:lstStyle/>
           <a:p>
-            <a:pPr algn="ctr" indent="0" marL="0">
+            <a:pPr marL="0" indent="0" algn="ctr">
               <a:buNone/>
             </a:pPr>
             <a:r>
@@ -15573,7 +15240,7 @@
           <a:bodyPr wrap="square" rtlCol="0" anchor="t"/>
           <a:lstStyle/>
           <a:p>
-            <a:pPr indent="0" marL="0">
+            <a:pPr marL="0" indent="0">
               <a:lnSpc>
                 <a:spcPct val="135000"/>
               </a:lnSpc>
@@ -15610,6 +15277,7 @@
         <a:solidFill>
           <a:srgbClr val="F5F5F5"/>
         </a:solidFill>
+        <a:effectLst/>
       </p:bgPr>
     </p:bg>
     <p:spTree>
@@ -15669,7 +15337,7 @@
           <a:bodyPr wrap="square" rtlCol="0" anchor="ctr"/>
           <a:lstStyle/>
           <a:p>
-            <a:pPr algn="l" indent="0" marL="0">
+            <a:pPr marL="0" indent="0" algn="l">
               <a:buNone/>
             </a:pPr>
             <a:r>
@@ -15708,11 +15376,11 @@
           <a:bodyPr wrap="square" rtlCol="0" anchor="ctr"/>
           <a:lstStyle/>
           <a:p>
-            <a:pPr algn="r" indent="0" marL="0">
-              <a:buNone/>
-            </a:pPr>
-            <a:r>
-              <a:rPr lang="en-US" sz="900" b="1" spc="200" kern="0" dirty="0">
+            <a:pPr marL="0" indent="0" algn="r">
+              <a:buNone/>
+            </a:pPr>
+            <a:r>
+              <a:rPr lang="en-US" sz="900" b="1" kern="0" spc="200" dirty="0">
                 <a:solidFill>
                   <a:srgbClr val="777169"/>
                 </a:solidFill>
@@ -15747,11 +15415,11 @@
           <a:bodyPr wrap="square" rtlCol="0" anchor="ctr"/>
           <a:lstStyle/>
           <a:p>
-            <a:pPr algn="l" indent="0" marL="0">
-              <a:buNone/>
-            </a:pPr>
-            <a:r>
-              <a:rPr lang="en-US" sz="900" b="1" spc="300" kern="0" dirty="0">
+            <a:pPr marL="0" indent="0" algn="l">
+              <a:buNone/>
+            </a:pPr>
+            <a:r>
+              <a:rPr lang="en-US" sz="900" b="1" kern="0" spc="300" dirty="0">
                 <a:solidFill>
                   <a:srgbClr val="777169"/>
                 </a:solidFill>
@@ -15786,11 +15454,11 @@
           <a:bodyPr wrap="square" rtlCol="0" anchor="t"/>
           <a:lstStyle/>
           <a:p>
-            <a:pPr algn="l" indent="0" marL="0">
-              <a:buNone/>
-            </a:pPr>
-            <a:r>
-              <a:rPr lang="en-US" sz="2700" spc="-40" kern="0" dirty="0">
+            <a:pPr marL="0" indent="0" algn="l">
+              <a:buNone/>
+            </a:pPr>
+            <a:r>
+              <a:rPr lang="en-US" sz="2700" kern="0" spc="-40" dirty="0">
                 <a:solidFill>
                   <a:srgbClr val="0C0A09"/>
                 </a:solidFill>
@@ -15825,7 +15493,7 @@
           <a:bodyPr wrap="square" rtlCol="0" anchor="ctr"/>
           <a:lstStyle/>
           <a:p>
-            <a:pPr algn="l" indent="0" marL="0">
+            <a:pPr marL="0" indent="0" algn="l">
               <a:buNone/>
             </a:pPr>
             <a:r>
@@ -15887,7 +15555,7 @@
           <a:bodyPr wrap="square" rtlCol="0" anchor="ctr"/>
           <a:lstStyle/>
           <a:p>
-            <a:pPr algn="l" indent="0" marL="0">
+            <a:pPr marL="0" indent="0" algn="l">
               <a:buNone/>
             </a:pPr>
             <a:r>
@@ -15926,7 +15594,7 @@
           <a:bodyPr wrap="square" rtlCol="0" anchor="ctr"/>
           <a:lstStyle/>
           <a:p>
-            <a:pPr algn="r" indent="0" marL="0">
+            <a:pPr marL="0" indent="0" algn="r">
               <a:buNone/>
             </a:pPr>
             <a:r>
@@ -15970,7 +15638,7 @@
             <a:prstDash val="solid"/>
           </a:ln>
           <a:effectLst>
-            <a:outerShdw sx="100000" sy="100000" kx="0" ky="0" algn="bl" rotWithShape="0" blurRad="152400" dist="38100" dir="5400000">
+            <a:outerShdw blurRad="152400" dist="38100" dir="5400000" algn="bl" rotWithShape="0">
               <a:srgbClr val="000000">
                 <a:alpha val="6000"/>
               </a:srgbClr>
@@ -16021,7 +15689,7 @@
           <a:bodyPr wrap="square" rtlCol="0" anchor="ctr"/>
           <a:lstStyle/>
           <a:p>
-            <a:pPr algn="ctr" indent="0" marL="0">
+            <a:pPr marL="0" indent="0" algn="ctr">
               <a:buNone/>
             </a:pPr>
             <a:r>
@@ -16060,7 +15728,7 @@
           <a:bodyPr wrap="square" rtlCol="0" anchor="ctr"/>
           <a:lstStyle/>
           <a:p>
-            <a:pPr algn="ctr" indent="0" marL="0">
+            <a:pPr marL="0" indent="0" algn="ctr">
               <a:buNone/>
             </a:pPr>
             <a:r>
@@ -16104,7 +15772,7 @@
             <a:prstDash val="solid"/>
           </a:ln>
           <a:effectLst>
-            <a:outerShdw sx="100000" sy="100000" kx="0" ky="0" algn="bl" rotWithShape="0" blurRad="152400" dist="38100" dir="5400000">
+            <a:outerShdw blurRad="152400" dist="38100" dir="5400000" algn="bl" rotWithShape="0">
               <a:srgbClr val="000000">
                 <a:alpha val="6000"/>
               </a:srgbClr>
@@ -16133,11 +15801,11 @@
           <a:bodyPr wrap="square" rtlCol="0" anchor="ctr"/>
           <a:lstStyle/>
           <a:p>
-            <a:pPr indent="0" marL="0">
-              <a:buNone/>
-            </a:pPr>
-            <a:r>
-              <a:rPr lang="en-US" sz="1100" b="1" spc="100" kern="0" dirty="0">
+            <a:pPr marL="0" indent="0">
+              <a:buNone/>
+            </a:pPr>
+            <a:r>
+              <a:rPr lang="en-US" sz="1100" b="1" kern="0" spc="100" dirty="0">
                 <a:solidFill>
                   <a:srgbClr val="777169"/>
                 </a:solidFill>
@@ -16172,7 +15840,7 @@
           <a:bodyPr wrap="square" rtlCol="0" anchor="ctr"/>
           <a:lstStyle/>
           <a:p>
-            <a:pPr indent="0" marL="0">
+            <a:pPr marL="0" indent="0">
               <a:buNone/>
             </a:pPr>
             <a:r>
@@ -16211,7 +15879,7 @@
           <a:bodyPr wrap="square" rtlCol="0" anchor="t"/>
           <a:lstStyle/>
           <a:p>
-            <a:pPr indent="0" marL="0">
+            <a:pPr marL="0" indent="0">
               <a:lnSpc>
                 <a:spcPct val="140000"/>
               </a:lnSpc>
@@ -16258,7 +15926,7 @@
             <a:prstDash val="solid"/>
           </a:ln>
           <a:effectLst>
-            <a:outerShdw sx="100000" sy="100000" kx="0" ky="0" algn="bl" rotWithShape="0" blurRad="152400" dist="38100" dir="5400000">
+            <a:outerShdw blurRad="152400" dist="38100" dir="5400000" algn="bl" rotWithShape="0">
               <a:srgbClr val="000000">
                 <a:alpha val="6000"/>
               </a:srgbClr>
@@ -16309,7 +15977,7 @@
           <a:bodyPr wrap="square" rtlCol="0" anchor="ctr"/>
           <a:lstStyle/>
           <a:p>
-            <a:pPr algn="ctr" indent="0" marL="0">
+            <a:pPr marL="0" indent="0" algn="ctr">
               <a:buNone/>
             </a:pPr>
             <a:r>
@@ -16348,7 +16016,7 @@
           <a:bodyPr wrap="square" rtlCol="0" anchor="t"/>
           <a:lstStyle/>
           <a:p>
-            <a:pPr indent="0" marL="0">
+            <a:pPr marL="0" indent="0">
               <a:lnSpc>
                 <a:spcPct val="135000"/>
               </a:lnSpc>
@@ -16395,7 +16063,7 @@
             <a:prstDash val="solid"/>
           </a:ln>
           <a:effectLst>
-            <a:outerShdw sx="100000" sy="100000" kx="0" ky="0" algn="bl" rotWithShape="0" blurRad="152400" dist="38100" dir="5400000">
+            <a:outerShdw blurRad="152400" dist="38100" dir="5400000" algn="bl" rotWithShape="0">
               <a:srgbClr val="000000">
                 <a:alpha val="6000"/>
               </a:srgbClr>
@@ -16446,7 +16114,7 @@
           <a:bodyPr wrap="square" rtlCol="0" anchor="ctr"/>
           <a:lstStyle/>
           <a:p>
-            <a:pPr algn="ctr" indent="0" marL="0">
+            <a:pPr marL="0" indent="0" algn="ctr">
               <a:buNone/>
             </a:pPr>
             <a:r>
@@ -16485,7 +16153,7 @@
           <a:bodyPr wrap="square" rtlCol="0" anchor="t"/>
           <a:lstStyle/>
           <a:p>
-            <a:pPr indent="0" marL="0">
+            <a:pPr marL="0" indent="0">
               <a:lnSpc>
                 <a:spcPct val="135000"/>
               </a:lnSpc>
@@ -16532,7 +16200,7 @@
             <a:prstDash val="solid"/>
           </a:ln>
           <a:effectLst>
-            <a:outerShdw sx="100000" sy="100000" kx="0" ky="0" algn="bl" rotWithShape="0" blurRad="152400" dist="38100" dir="5400000">
+            <a:outerShdw blurRad="152400" dist="38100" dir="5400000" algn="bl" rotWithShape="0">
               <a:srgbClr val="000000">
                 <a:alpha val="6000"/>
               </a:srgbClr>
@@ -16583,7 +16251,7 @@
           <a:bodyPr wrap="square" rtlCol="0" anchor="ctr"/>
           <a:lstStyle/>
           <a:p>
-            <a:pPr algn="ctr" indent="0" marL="0">
+            <a:pPr marL="0" indent="0" algn="ctr">
               <a:buNone/>
             </a:pPr>
             <a:r>
@@ -16622,7 +16290,7 @@
           <a:bodyPr wrap="square" rtlCol="0" anchor="t"/>
           <a:lstStyle/>
           <a:p>
-            <a:pPr indent="0" marL="0">
+            <a:pPr marL="0" indent="0">
               <a:lnSpc>
                 <a:spcPct val="135000"/>
               </a:lnSpc>
@@ -16659,6 +16327,7 @@
         <a:solidFill>
           <a:srgbClr val="F5F5F5"/>
         </a:solidFill>
+        <a:effectLst/>
       </p:bgPr>
     </p:bg>
     <p:spTree>
@@ -16718,7 +16387,7 @@
           <a:bodyPr wrap="square" rtlCol="0" anchor="ctr"/>
           <a:lstStyle/>
           <a:p>
-            <a:pPr algn="l" indent="0" marL="0">
+            <a:pPr marL="0" indent="0" algn="l">
               <a:buNone/>
             </a:pPr>
             <a:r>
@@ -16757,11 +16426,11 @@
           <a:bodyPr wrap="square" rtlCol="0" anchor="ctr"/>
           <a:lstStyle/>
           <a:p>
-            <a:pPr algn="r" indent="0" marL="0">
-              <a:buNone/>
-            </a:pPr>
-            <a:r>
-              <a:rPr lang="en-US" sz="900" b="1" spc="200" kern="0" dirty="0">
+            <a:pPr marL="0" indent="0" algn="r">
+              <a:buNone/>
+            </a:pPr>
+            <a:r>
+              <a:rPr lang="en-US" sz="900" b="1" kern="0" spc="200" dirty="0">
                 <a:solidFill>
                   <a:srgbClr val="777169"/>
                 </a:solidFill>
@@ -16796,11 +16465,11 @@
           <a:bodyPr wrap="square" rtlCol="0" anchor="ctr"/>
           <a:lstStyle/>
           <a:p>
-            <a:pPr algn="l" indent="0" marL="0">
-              <a:buNone/>
-            </a:pPr>
-            <a:r>
-              <a:rPr lang="en-US" sz="900" b="1" spc="300" kern="0" dirty="0">
+            <a:pPr marL="0" indent="0" algn="l">
+              <a:buNone/>
+            </a:pPr>
+            <a:r>
+              <a:rPr lang="en-US" sz="900" b="1" kern="0" spc="300" dirty="0">
                 <a:solidFill>
                   <a:srgbClr val="777169"/>
                 </a:solidFill>
@@ -16835,11 +16504,11 @@
           <a:bodyPr wrap="square" rtlCol="0" anchor="t"/>
           <a:lstStyle/>
           <a:p>
-            <a:pPr algn="l" indent="0" marL="0">
-              <a:buNone/>
-            </a:pPr>
-            <a:r>
-              <a:rPr lang="en-US" sz="2700" spc="-40" kern="0" dirty="0">
+            <a:pPr marL="0" indent="0" algn="l">
+              <a:buNone/>
+            </a:pPr>
+            <a:r>
+              <a:rPr lang="en-US" sz="2700" kern="0" spc="-40" dirty="0">
                 <a:solidFill>
                   <a:srgbClr val="0C0A09"/>
                 </a:solidFill>
@@ -16874,7 +16543,7 @@
           <a:bodyPr wrap="square" rtlCol="0" anchor="ctr"/>
           <a:lstStyle/>
           <a:p>
-            <a:pPr algn="l" indent="0" marL="0">
+            <a:pPr marL="0" indent="0" algn="l">
               <a:buNone/>
             </a:pPr>
             <a:r>
@@ -16936,7 +16605,7 @@
           <a:bodyPr wrap="square" rtlCol="0" anchor="ctr"/>
           <a:lstStyle/>
           <a:p>
-            <a:pPr algn="l" indent="0" marL="0">
+            <a:pPr marL="0" indent="0" algn="l">
               <a:buNone/>
             </a:pPr>
             <a:r>
@@ -16975,7 +16644,7 @@
           <a:bodyPr wrap="square" rtlCol="0" anchor="ctr"/>
           <a:lstStyle/>
           <a:p>
-            <a:pPr algn="r" indent="0" marL="0">
+            <a:pPr marL="0" indent="0" algn="r">
               <a:buNone/>
             </a:pPr>
             <a:r>
@@ -17034,11 +16703,11 @@
           <a:bodyPr wrap="square" lIns="0" tIns="0" rIns="0" bIns="0" rtlCol="0" anchor="ctr"/>
           <a:lstStyle/>
           <a:p>
-            <a:pPr algn="ctr" indent="0" marL="0">
-              <a:buNone/>
-            </a:pPr>
-            <a:r>
-              <a:rPr lang="en-US" sz="1300" b="1" spc="100" kern="0" dirty="0">
+            <a:pPr marL="0" indent="0" algn="ctr">
+              <a:buNone/>
+            </a:pPr>
+            <a:r>
+              <a:rPr lang="en-US" sz="1300" b="1" kern="0" spc="100" dirty="0">
                 <a:solidFill>
                   <a:srgbClr val="FFFFFF"/>
                 </a:solidFill>
@@ -17093,11 +16762,11 @@
           <a:bodyPr wrap="square" lIns="0" tIns="0" rIns="0" bIns="0" rtlCol="0" anchor="ctr"/>
           <a:lstStyle/>
           <a:p>
-            <a:pPr algn="ctr" indent="0" marL="0">
-              <a:buNone/>
-            </a:pPr>
-            <a:r>
-              <a:rPr lang="en-US" sz="1300" b="1" spc="100" kern="0" dirty="0">
+            <a:pPr marL="0" indent="0" algn="ctr">
+              <a:buNone/>
+            </a:pPr>
+            <a:r>
+              <a:rPr lang="en-US" sz="1300" b="1" kern="0" spc="100" dirty="0">
                 <a:solidFill>
                   <a:srgbClr val="FFFFFF"/>
                 </a:solidFill>
@@ -17152,11 +16821,11 @@
           <a:bodyPr wrap="square" lIns="109728" tIns="109728" rIns="109728" bIns="109728" rtlCol="0" anchor="ctr"/>
           <a:lstStyle/>
           <a:p>
-            <a:pPr algn="l" indent="0" marL="0">
-              <a:buNone/>
-            </a:pPr>
-            <a:r>
-              <a:rPr lang="en-US" sz="1300" b="1" spc="100" kern="0" dirty="0">
+            <a:pPr marL="0" indent="0" algn="l">
+              <a:buNone/>
+            </a:pPr>
+            <a:r>
+              <a:rPr lang="en-US" sz="1300" b="1" kern="0" spc="100" dirty="0">
                 <a:solidFill>
                   <a:srgbClr val="FFFFFF"/>
                 </a:solidFill>
@@ -17211,11 +16880,11 @@
           <a:bodyPr wrap="square" lIns="109728" tIns="109728" rIns="109728" bIns="109728" rtlCol="0" anchor="ctr"/>
           <a:lstStyle/>
           <a:p>
-            <a:pPr algn="l" indent="0" marL="0">
-              <a:buNone/>
-            </a:pPr>
-            <a:r>
-              <a:rPr lang="en-US" sz="1300" b="1" spc="100" kern="0" dirty="0">
+            <a:pPr marL="0" indent="0" algn="l">
+              <a:buNone/>
+            </a:pPr>
+            <a:r>
+              <a:rPr lang="en-US" sz="1300" b="1" kern="0" spc="100" dirty="0">
                 <a:solidFill>
                   <a:srgbClr val="FFFFFF"/>
                 </a:solidFill>
@@ -17297,7 +16966,7 @@
           <a:bodyPr wrap="square" rtlCol="0" anchor="ctr"/>
           <a:lstStyle/>
           <a:p>
-            <a:pPr algn="ctr" indent="0" marL="0">
+            <a:pPr marL="0" indent="0" algn="ctr">
               <a:buNone/>
             </a:pPr>
             <a:r>
@@ -17336,7 +17005,7 @@
           <a:bodyPr wrap="square" rtlCol="0" anchor="ctr"/>
           <a:lstStyle/>
           <a:p>
-            <a:pPr algn="ctr" indent="0" marL="0">
+            <a:pPr marL="0" indent="0" algn="ctr">
               <a:buNone/>
             </a:pPr>
             <a:r>
@@ -17375,7 +17044,7 @@
           <a:bodyPr wrap="square" rtlCol="0" anchor="ctr"/>
           <a:lstStyle/>
           <a:p>
-            <a:pPr algn="l" indent="0" marL="0">
+            <a:pPr marL="0" indent="0" algn="l">
               <a:buNone/>
             </a:pPr>
             <a:r>
@@ -17414,7 +17083,7 @@
           <a:bodyPr wrap="square" rtlCol="0" anchor="ctr"/>
           <a:lstStyle/>
           <a:p>
-            <a:pPr algn="l" indent="0" marL="0">
+            <a:pPr marL="0" indent="0" algn="l">
               <a:buNone/>
             </a:pPr>
             <a:r>
@@ -17500,7 +17169,7 @@
           <a:bodyPr wrap="square" rtlCol="0" anchor="ctr"/>
           <a:lstStyle/>
           <a:p>
-            <a:pPr algn="ctr" indent="0" marL="0">
+            <a:pPr marL="0" indent="0" algn="ctr">
               <a:buNone/>
             </a:pPr>
             <a:r>
@@ -17539,7 +17208,7 @@
           <a:bodyPr wrap="square" rtlCol="0" anchor="ctr"/>
           <a:lstStyle/>
           <a:p>
-            <a:pPr algn="ctr" indent="0" marL="0">
+            <a:pPr marL="0" indent="0" algn="ctr">
               <a:buNone/>
             </a:pPr>
             <a:r>
@@ -17578,7 +17247,7 @@
           <a:bodyPr wrap="square" rtlCol="0" anchor="ctr"/>
           <a:lstStyle/>
           <a:p>
-            <a:pPr algn="l" indent="0" marL="0">
+            <a:pPr marL="0" indent="0" algn="l">
               <a:buNone/>
             </a:pPr>
             <a:r>
@@ -17617,7 +17286,7 @@
           <a:bodyPr wrap="square" rtlCol="0" anchor="ctr"/>
           <a:lstStyle/>
           <a:p>
-            <a:pPr algn="l" indent="0" marL="0">
+            <a:pPr marL="0" indent="0" algn="l">
               <a:buNone/>
             </a:pPr>
             <a:r>
@@ -17703,7 +17372,7 @@
           <a:bodyPr wrap="square" rtlCol="0" anchor="ctr"/>
           <a:lstStyle/>
           <a:p>
-            <a:pPr algn="ctr" indent="0" marL="0">
+            <a:pPr marL="0" indent="0" algn="ctr">
               <a:buNone/>
             </a:pPr>
             <a:r>
@@ -17742,7 +17411,7 @@
           <a:bodyPr wrap="square" rtlCol="0" anchor="ctr"/>
           <a:lstStyle/>
           <a:p>
-            <a:pPr algn="ctr" indent="0" marL="0">
+            <a:pPr marL="0" indent="0" algn="ctr">
               <a:buNone/>
             </a:pPr>
             <a:r>
@@ -17781,7 +17450,7 @@
           <a:bodyPr wrap="square" rtlCol="0" anchor="ctr"/>
           <a:lstStyle/>
           <a:p>
-            <a:pPr algn="l" indent="0" marL="0">
+            <a:pPr marL="0" indent="0" algn="l">
               <a:buNone/>
             </a:pPr>
             <a:r>
@@ -17820,7 +17489,7 @@
           <a:bodyPr wrap="square" rtlCol="0" anchor="ctr"/>
           <a:lstStyle/>
           <a:p>
-            <a:pPr algn="l" indent="0" marL="0">
+            <a:pPr marL="0" indent="0" algn="l">
               <a:buNone/>
             </a:pPr>
             <a:r>
@@ -17906,7 +17575,7 @@
           <a:bodyPr wrap="square" rtlCol="0" anchor="ctr"/>
           <a:lstStyle/>
           <a:p>
-            <a:pPr algn="ctr" indent="0" marL="0">
+            <a:pPr marL="0" indent="0" algn="ctr">
               <a:buNone/>
             </a:pPr>
             <a:r>
@@ -17945,7 +17614,7 @@
           <a:bodyPr wrap="square" rtlCol="0" anchor="ctr"/>
           <a:lstStyle/>
           <a:p>
-            <a:pPr algn="ctr" indent="0" marL="0">
+            <a:pPr marL="0" indent="0" algn="ctr">
               <a:buNone/>
             </a:pPr>
             <a:r>
@@ -17984,7 +17653,7 @@
           <a:bodyPr wrap="square" rtlCol="0" anchor="ctr"/>
           <a:lstStyle/>
           <a:p>
-            <a:pPr algn="l" indent="0" marL="0">
+            <a:pPr marL="0" indent="0" algn="l">
               <a:buNone/>
             </a:pPr>
             <a:r>
@@ -18023,7 +17692,7 @@
           <a:bodyPr wrap="square" rtlCol="0" anchor="ctr"/>
           <a:lstStyle/>
           <a:p>
-            <a:pPr algn="l" indent="0" marL="0">
+            <a:pPr marL="0" indent="0" algn="l">
               <a:buNone/>
             </a:pPr>
             <a:r>
@@ -18109,7 +17778,7 @@
           <a:bodyPr wrap="square" rtlCol="0" anchor="ctr"/>
           <a:lstStyle/>
           <a:p>
-            <a:pPr algn="ctr" indent="0" marL="0">
+            <a:pPr marL="0" indent="0" algn="ctr">
               <a:buNone/>
             </a:pPr>
             <a:r>
@@ -18148,7 +17817,7 @@
           <a:bodyPr wrap="square" rtlCol="0" anchor="ctr"/>
           <a:lstStyle/>
           <a:p>
-            <a:pPr algn="ctr" indent="0" marL="0">
+            <a:pPr marL="0" indent="0" algn="ctr">
               <a:buNone/>
             </a:pPr>
             <a:r>
@@ -18187,7 +17856,7 @@
           <a:bodyPr wrap="square" rtlCol="0" anchor="ctr"/>
           <a:lstStyle/>
           <a:p>
-            <a:pPr algn="l" indent="0" marL="0">
+            <a:pPr marL="0" indent="0" algn="l">
               <a:buNone/>
             </a:pPr>
             <a:r>
@@ -18226,7 +17895,7 @@
           <a:bodyPr wrap="square" rtlCol="0" anchor="ctr"/>
           <a:lstStyle/>
           <a:p>
-            <a:pPr algn="l" indent="0" marL="0">
+            <a:pPr marL="0" indent="0" algn="l">
               <a:buNone/>
             </a:pPr>
             <a:r>
@@ -18260,6 +17929,7 @@
         <a:solidFill>
           <a:srgbClr val="F5F5F5"/>
         </a:solidFill>
+        <a:effectLst/>
       </p:bgPr>
     </p:bg>
     <p:spTree>
@@ -18319,7 +17989,7 @@
           <a:bodyPr wrap="square" rtlCol="0" anchor="ctr"/>
           <a:lstStyle/>
           <a:p>
-            <a:pPr algn="l" indent="0" marL="0">
+            <a:pPr marL="0" indent="0" algn="l">
               <a:buNone/>
             </a:pPr>
             <a:r>
@@ -18358,11 +18028,11 @@
           <a:bodyPr wrap="square" rtlCol="0" anchor="ctr"/>
           <a:lstStyle/>
           <a:p>
-            <a:pPr algn="r" indent="0" marL="0">
-              <a:buNone/>
-            </a:pPr>
-            <a:r>
-              <a:rPr lang="en-US" sz="900" b="1" spc="200" kern="0" dirty="0">
+            <a:pPr marL="0" indent="0" algn="r">
+              <a:buNone/>
+            </a:pPr>
+            <a:r>
+              <a:rPr lang="en-US" sz="900" b="1" kern="0" spc="200" dirty="0">
                 <a:solidFill>
                   <a:srgbClr val="777169"/>
                 </a:solidFill>
@@ -18397,11 +18067,11 @@
           <a:bodyPr wrap="square" rtlCol="0" anchor="ctr"/>
           <a:lstStyle/>
           <a:p>
-            <a:pPr algn="l" indent="0" marL="0">
-              <a:buNone/>
-            </a:pPr>
-            <a:r>
-              <a:rPr lang="en-US" sz="900" b="1" spc="300" kern="0" dirty="0">
+            <a:pPr marL="0" indent="0" algn="l">
+              <a:buNone/>
+            </a:pPr>
+            <a:r>
+              <a:rPr lang="en-US" sz="900" b="1" kern="0" spc="300" dirty="0">
                 <a:solidFill>
                   <a:srgbClr val="777169"/>
                 </a:solidFill>
@@ -18436,11 +18106,11 @@
           <a:bodyPr wrap="square" rtlCol="0" anchor="t"/>
           <a:lstStyle/>
           <a:p>
-            <a:pPr algn="l" indent="0" marL="0">
-              <a:buNone/>
-            </a:pPr>
-            <a:r>
-              <a:rPr lang="en-US" sz="2700" spc="-40" kern="0" dirty="0">
+            <a:pPr marL="0" indent="0" algn="l">
+              <a:buNone/>
+            </a:pPr>
+            <a:r>
+              <a:rPr lang="en-US" sz="2700" kern="0" spc="-40" dirty="0">
                 <a:solidFill>
                   <a:srgbClr val="0C0A09"/>
                 </a:solidFill>
@@ -18475,7 +18145,7 @@
           <a:bodyPr wrap="square" rtlCol="0" anchor="ctr"/>
           <a:lstStyle/>
           <a:p>
-            <a:pPr algn="l" indent="0" marL="0">
+            <a:pPr marL="0" indent="0" algn="l">
               <a:buNone/>
             </a:pPr>
             <a:r>
@@ -18537,7 +18207,7 @@
           <a:bodyPr wrap="square" rtlCol="0" anchor="ctr"/>
           <a:lstStyle/>
           <a:p>
-            <a:pPr algn="l" indent="0" marL="0">
+            <a:pPr marL="0" indent="0" algn="l">
               <a:buNone/>
             </a:pPr>
             <a:r>
@@ -18576,7 +18246,7 @@
           <a:bodyPr wrap="square" rtlCol="0" anchor="ctr"/>
           <a:lstStyle/>
           <a:p>
-            <a:pPr algn="r" indent="0" marL="0">
+            <a:pPr marL="0" indent="0" algn="r">
               <a:buNone/>
             </a:pPr>
             <a:r>
@@ -18620,7 +18290,7 @@
             <a:prstDash val="solid"/>
           </a:ln>
           <a:effectLst>
-            <a:outerShdw sx="100000" sy="100000" kx="0" ky="0" algn="bl" rotWithShape="0" blurRad="152400" dist="38100" dir="5400000">
+            <a:outerShdw blurRad="152400" dist="38100" dir="5400000" algn="bl" rotWithShape="0">
               <a:srgbClr val="000000">
                 <a:alpha val="6000"/>
               </a:srgbClr>
@@ -18649,7 +18319,7 @@
           <a:bodyPr wrap="square" rtlCol="0" anchor="ctr"/>
           <a:lstStyle/>
           <a:p>
-            <a:pPr algn="l" indent="0" marL="0">
+            <a:pPr marL="0" indent="0" algn="l">
               <a:buNone/>
             </a:pPr>
             <a:r>
@@ -18688,7 +18358,7 @@
           <a:bodyPr wrap="square" rtlCol="0" anchor="ctr"/>
           <a:lstStyle/>
           <a:p>
-            <a:pPr algn="l" indent="0" marL="0">
+            <a:pPr marL="0" indent="0" algn="l">
               <a:buNone/>
             </a:pPr>
             <a:r>
@@ -18727,7 +18397,7 @@
           <a:bodyPr wrap="square" rtlCol="0" anchor="ctr"/>
           <a:lstStyle/>
           <a:p>
-            <a:pPr algn="l" indent="0" marL="0">
+            <a:pPr marL="0" indent="0" algn="l">
               <a:buNone/>
             </a:pPr>
             <a:r>
@@ -18771,7 +18441,7 @@
             <a:prstDash val="solid"/>
           </a:ln>
           <a:effectLst>
-            <a:outerShdw sx="100000" sy="100000" kx="0" ky="0" algn="bl" rotWithShape="0" blurRad="152400" dist="38100" dir="5400000">
+            <a:outerShdw blurRad="152400" dist="38100" dir="5400000" algn="bl" rotWithShape="0">
               <a:srgbClr val="000000">
                 <a:alpha val="6000"/>
               </a:srgbClr>
@@ -18788,19 +18458,19 @@
         <p:spPr>
           <a:xfrm>
             <a:off x="971550" y="3314700"/>
-            <a:ext cx="666750" cy="666750"/>
-          </a:xfrm>
-          <a:prstGeom prst="rect">
-            <a:avLst/>
-          </a:prstGeom>
-          <a:noFill/>
-          <a:ln/>
-        </p:spPr>
-        <p:txBody>
-          <a:bodyPr wrap="square" rtlCol="0" anchor="ctr"/>
-          <a:lstStyle/>
-          <a:p>
-            <a:pPr algn="l" indent="0" marL="0">
+            <a:ext cx="742950" cy="666750"/>
+          </a:xfrm>
+          <a:prstGeom prst="rect">
+            <a:avLst/>
+          </a:prstGeom>
+          <a:noFill/>
+          <a:ln/>
+        </p:spPr>
+        <p:txBody>
+          <a:bodyPr wrap="square" rtlCol="0" anchor="ctr"/>
+          <a:lstStyle/>
+          <a:p>
+            <a:pPr marL="0" indent="0" algn="l">
               <a:buNone/>
             </a:pPr>
             <a:r>
@@ -18839,7 +18509,7 @@
           <a:bodyPr wrap="square" rtlCol="0" anchor="ctr"/>
           <a:lstStyle/>
           <a:p>
-            <a:pPr algn="l" indent="0" marL="0">
+            <a:pPr marL="0" indent="0" algn="l">
               <a:buNone/>
             </a:pPr>
             <a:r>
@@ -18878,7 +18548,7 @@
           <a:bodyPr wrap="square" rtlCol="0" anchor="ctr"/>
           <a:lstStyle/>
           <a:p>
-            <a:pPr algn="l" indent="0" marL="0">
+            <a:pPr marL="0" indent="0" algn="l">
               <a:buNone/>
             </a:pPr>
             <a:r>
@@ -18922,7 +18592,7 @@
             <a:prstDash val="solid"/>
           </a:ln>
           <a:effectLst>
-            <a:outerShdw sx="100000" sy="100000" kx="0" ky="0" algn="bl" rotWithShape="0" blurRad="152400" dist="38100" dir="5400000">
+            <a:outerShdw blurRad="152400" dist="38100" dir="5400000" algn="bl" rotWithShape="0">
               <a:srgbClr val="000000">
                 <a:alpha val="6000"/>
               </a:srgbClr>
@@ -18939,19 +18609,19 @@
         <p:spPr>
           <a:xfrm>
             <a:off x="971550" y="4057650"/>
-            <a:ext cx="666750" cy="666750"/>
-          </a:xfrm>
-          <a:prstGeom prst="rect">
-            <a:avLst/>
-          </a:prstGeom>
-          <a:noFill/>
-          <a:ln/>
-        </p:spPr>
-        <p:txBody>
-          <a:bodyPr wrap="square" rtlCol="0" anchor="ctr"/>
-          <a:lstStyle/>
-          <a:p>
-            <a:pPr algn="l" indent="0" marL="0">
+            <a:ext cx="742950" cy="666750"/>
+          </a:xfrm>
+          <a:prstGeom prst="rect">
+            <a:avLst/>
+          </a:prstGeom>
+          <a:noFill/>
+          <a:ln/>
+        </p:spPr>
+        <p:txBody>
+          <a:bodyPr wrap="square" rtlCol="0" anchor="ctr"/>
+          <a:lstStyle/>
+          <a:p>
+            <a:pPr marL="0" indent="0" algn="l">
               <a:buNone/>
             </a:pPr>
             <a:r>
@@ -18990,7 +18660,7 @@
           <a:bodyPr wrap="square" rtlCol="0" anchor="ctr"/>
           <a:lstStyle/>
           <a:p>
-            <a:pPr algn="l" indent="0" marL="0">
+            <a:pPr marL="0" indent="0" algn="l">
               <a:buNone/>
             </a:pPr>
             <a:r>
@@ -19029,7 +18699,7 @@
           <a:bodyPr wrap="square" rtlCol="0" anchor="ctr"/>
           <a:lstStyle/>
           <a:p>
-            <a:pPr algn="l" indent="0" marL="0">
+            <a:pPr marL="0" indent="0" algn="l">
               <a:buNone/>
             </a:pPr>
             <a:r>
@@ -19073,7 +18743,7 @@
             <a:prstDash val="solid"/>
           </a:ln>
           <a:effectLst>
-            <a:outerShdw sx="100000" sy="100000" kx="0" ky="0" algn="bl" rotWithShape="0" blurRad="152400" dist="38100" dir="5400000">
+            <a:outerShdw blurRad="152400" dist="38100" dir="5400000" algn="bl" rotWithShape="0">
               <a:srgbClr val="000000">
                 <a:alpha val="6000"/>
               </a:srgbClr>
@@ -19090,19 +18760,19 @@
         <p:spPr>
           <a:xfrm>
             <a:off x="971550" y="4800600"/>
-            <a:ext cx="666750" cy="666750"/>
-          </a:xfrm>
-          <a:prstGeom prst="rect">
-            <a:avLst/>
-          </a:prstGeom>
-          <a:noFill/>
-          <a:ln/>
-        </p:spPr>
-        <p:txBody>
-          <a:bodyPr wrap="square" rtlCol="0" anchor="ctr"/>
-          <a:lstStyle/>
-          <a:p>
-            <a:pPr algn="l" indent="0" marL="0">
+            <a:ext cx="742950" cy="666750"/>
+          </a:xfrm>
+          <a:prstGeom prst="rect">
+            <a:avLst/>
+          </a:prstGeom>
+          <a:noFill/>
+          <a:ln/>
+        </p:spPr>
+        <p:txBody>
+          <a:bodyPr wrap="square" rtlCol="0" anchor="ctr"/>
+          <a:lstStyle/>
+          <a:p>
+            <a:pPr marL="0" indent="0" algn="l">
               <a:buNone/>
             </a:pPr>
             <a:r>
@@ -19141,7 +18811,7 @@
           <a:bodyPr wrap="square" rtlCol="0" anchor="ctr"/>
           <a:lstStyle/>
           <a:p>
-            <a:pPr algn="l" indent="0" marL="0">
+            <a:pPr marL="0" indent="0" algn="l">
               <a:buNone/>
             </a:pPr>
             <a:r>
@@ -19180,7 +18850,7 @@
           <a:bodyPr wrap="square" rtlCol="0" anchor="ctr"/>
           <a:lstStyle/>
           <a:p>
-            <a:pPr algn="l" indent="0" marL="0">
+            <a:pPr marL="0" indent="0" algn="l">
               <a:buNone/>
             </a:pPr>
             <a:r>
@@ -19224,7 +18894,7 @@
             <a:prstDash val="solid"/>
           </a:ln>
           <a:effectLst>
-            <a:outerShdw sx="100000" sy="100000" kx="0" ky="0" algn="bl" rotWithShape="0" blurRad="152400" dist="38100" dir="5400000">
+            <a:outerShdw blurRad="152400" dist="38100" dir="5400000" algn="bl" rotWithShape="0">
               <a:srgbClr val="000000">
                 <a:alpha val="6000"/>
               </a:srgbClr>
@@ -19241,19 +18911,19 @@
         <p:spPr>
           <a:xfrm>
             <a:off x="971550" y="5543550"/>
-            <a:ext cx="666750" cy="666750"/>
-          </a:xfrm>
-          <a:prstGeom prst="rect">
-            <a:avLst/>
-          </a:prstGeom>
-          <a:noFill/>
-          <a:ln/>
-        </p:spPr>
-        <p:txBody>
-          <a:bodyPr wrap="square" rtlCol="0" anchor="ctr"/>
-          <a:lstStyle/>
-          <a:p>
-            <a:pPr algn="l" indent="0" marL="0">
+            <a:ext cx="933450" cy="666750"/>
+          </a:xfrm>
+          <a:prstGeom prst="rect">
+            <a:avLst/>
+          </a:prstGeom>
+          <a:noFill/>
+          <a:ln/>
+        </p:spPr>
+        <p:txBody>
+          <a:bodyPr wrap="square" rtlCol="0" anchor="ctr"/>
+          <a:lstStyle/>
+          <a:p>
+            <a:pPr marL="0" indent="0" algn="l">
               <a:buNone/>
             </a:pPr>
             <a:r>
@@ -19292,7 +18962,7 @@
           <a:bodyPr wrap="square" rtlCol="0" anchor="ctr"/>
           <a:lstStyle/>
           <a:p>
-            <a:pPr algn="l" indent="0" marL="0">
+            <a:pPr marL="0" indent="0" algn="l">
               <a:buNone/>
             </a:pPr>
             <a:r>
@@ -19331,7 +19001,7 @@
           <a:bodyPr wrap="square" rtlCol="0" anchor="ctr"/>
           <a:lstStyle/>
           <a:p>
-            <a:pPr algn="l" indent="0" marL="0">
+            <a:pPr marL="0" indent="0" algn="l">
               <a:buNone/>
             </a:pPr>
             <a:r>
@@ -19365,6 +19035,7 @@
         <a:solidFill>
           <a:srgbClr val="F5F5F5"/>
         </a:solidFill>
+        <a:effectLst/>
       </p:bgPr>
     </p:bg>
     <p:spTree>
@@ -19446,7 +19117,7 @@
           <a:bodyPr wrap="square" rtlCol="0" anchor="ctr"/>
           <a:lstStyle/>
           <a:p>
-            <a:pPr algn="l" indent="0" marL="0">
+            <a:pPr marL="0" indent="0" algn="l">
               <a:buNone/>
             </a:pPr>
             <a:r>
@@ -19485,11 +19156,11 @@
           <a:bodyPr wrap="square" rtlCol="0" anchor="ctr"/>
           <a:lstStyle/>
           <a:p>
-            <a:pPr algn="r" indent="0" marL="0">
-              <a:buNone/>
-            </a:pPr>
-            <a:r>
-              <a:rPr lang="en-US" sz="900" b="1" spc="200" kern="0" dirty="0">
+            <a:pPr marL="0" indent="0" algn="r">
+              <a:buNone/>
+            </a:pPr>
+            <a:r>
+              <a:rPr lang="en-US" sz="900" b="1" kern="0" spc="200" dirty="0">
                 <a:solidFill>
                   <a:srgbClr val="777169"/>
                 </a:solidFill>
@@ -19524,11 +19195,11 @@
           <a:bodyPr wrap="square" rtlCol="0" anchor="ctr"/>
           <a:lstStyle/>
           <a:p>
-            <a:pPr algn="l" indent="0" marL="0">
-              <a:buNone/>
-            </a:pPr>
-            <a:r>
-              <a:rPr lang="en-US" sz="1200" b="1" spc="500" kern="0" dirty="0">
+            <a:pPr marL="0" indent="0" algn="l">
+              <a:buNone/>
+            </a:pPr>
+            <a:r>
+              <a:rPr lang="en-US" sz="1200" b="1" kern="0" spc="500" dirty="0">
                 <a:solidFill>
                   <a:srgbClr val="777169"/>
                 </a:solidFill>
@@ -19563,11 +19234,11 @@
           <a:bodyPr wrap="square" rtlCol="0" anchor="t"/>
           <a:lstStyle/>
           <a:p>
-            <a:pPr algn="l" indent="0" marL="0">
-              <a:buNone/>
-            </a:pPr>
-            <a:r>
-              <a:rPr lang="en-US" sz="4800" spc="-100" kern="0" dirty="0">
+            <a:pPr marL="0" indent="0" algn="l">
+              <a:buNone/>
+            </a:pPr>
+            <a:r>
+              <a:rPr lang="en-US" sz="4800" kern="0" spc="-100" dirty="0">
                 <a:solidFill>
                   <a:srgbClr val="0C0A09"/>
                 </a:solidFill>
@@ -19602,11 +19273,11 @@
           <a:bodyPr wrap="square" rtlCol="0" anchor="ctr"/>
           <a:lstStyle/>
           <a:p>
-            <a:pPr algn="l" indent="0" marL="0">
-              <a:buNone/>
-            </a:pPr>
-            <a:r>
-              <a:rPr lang="en-US" sz="1400" b="1" spc="200" kern="0" dirty="0">
+            <a:pPr marL="0" indent="0" algn="l">
+              <a:buNone/>
+            </a:pPr>
+            <a:r>
+              <a:rPr lang="en-US" sz="1400" b="1" kern="0" spc="200" dirty="0">
                 <a:solidFill>
                   <a:srgbClr val="A8A29E"/>
                 </a:solidFill>
@@ -19641,7 +19312,7 @@
           <a:bodyPr wrap="square" rtlCol="0" anchor="t"/>
           <a:lstStyle/>
           <a:p>
-            <a:pPr algn="l" indent="0" marL="0">
+            <a:pPr marL="0" indent="0" algn="l">
               <a:lnSpc>
                 <a:spcPct val="145000"/>
               </a:lnSpc>
@@ -19706,7 +19377,7 @@
           <a:bodyPr wrap="square" rtlCol="0" anchor="ctr"/>
           <a:lstStyle/>
           <a:p>
-            <a:pPr algn="l" indent="0" marL="0">
+            <a:pPr marL="0" indent="0" algn="l">
               <a:buNone/>
             </a:pPr>
             <a:r>
@@ -19745,7 +19416,7 @@
           <a:bodyPr wrap="square" rtlCol="0" anchor="ctr"/>
           <a:lstStyle/>
           <a:p>
-            <a:pPr algn="r" indent="0" marL="0">
+            <a:pPr marL="0" indent="0" algn="r">
               <a:buNone/>
             </a:pPr>
             <a:r>
@@ -19779,6 +19450,7 @@
         <a:solidFill>
           <a:srgbClr val="F5F5F5"/>
         </a:solidFill>
+        <a:effectLst/>
       </p:bgPr>
     </p:bg>
     <p:spTree>
@@ -19838,7 +19510,7 @@
           <a:bodyPr wrap="square" rtlCol="0" anchor="ctr"/>
           <a:lstStyle/>
           <a:p>
-            <a:pPr algn="l" indent="0" marL="0">
+            <a:pPr marL="0" indent="0" algn="l">
               <a:buNone/>
             </a:pPr>
             <a:r>
@@ -19877,11 +19549,11 @@
           <a:bodyPr wrap="square" rtlCol="0" anchor="ctr"/>
           <a:lstStyle/>
           <a:p>
-            <a:pPr algn="r" indent="0" marL="0">
-              <a:buNone/>
-            </a:pPr>
-            <a:r>
-              <a:rPr lang="en-US" sz="900" b="1" spc="200" kern="0" dirty="0">
+            <a:pPr marL="0" indent="0" algn="r">
+              <a:buNone/>
+            </a:pPr>
+            <a:r>
+              <a:rPr lang="en-US" sz="900" b="1" kern="0" spc="200" dirty="0">
                 <a:solidFill>
                   <a:srgbClr val="777169"/>
                 </a:solidFill>
@@ -19916,11 +19588,11 @@
           <a:bodyPr wrap="square" rtlCol="0" anchor="ctr"/>
           <a:lstStyle/>
           <a:p>
-            <a:pPr algn="l" indent="0" marL="0">
-              <a:buNone/>
-            </a:pPr>
-            <a:r>
-              <a:rPr lang="en-US" sz="900" b="1" spc="300" kern="0" dirty="0">
+            <a:pPr marL="0" indent="0" algn="l">
+              <a:buNone/>
+            </a:pPr>
+            <a:r>
+              <a:rPr lang="en-US" sz="900" b="1" kern="0" spc="300" dirty="0">
                 <a:solidFill>
                   <a:srgbClr val="777169"/>
                 </a:solidFill>
@@ -19955,11 +19627,11 @@
           <a:bodyPr wrap="square" rtlCol="0" anchor="t"/>
           <a:lstStyle/>
           <a:p>
-            <a:pPr algn="l" indent="0" marL="0">
-              <a:buNone/>
-            </a:pPr>
-            <a:r>
-              <a:rPr lang="en-US" sz="2700" spc="-40" kern="0" dirty="0">
+            <a:pPr marL="0" indent="0" algn="l">
+              <a:buNone/>
+            </a:pPr>
+            <a:r>
+              <a:rPr lang="en-US" sz="2700" kern="0" spc="-40" dirty="0">
                 <a:solidFill>
                   <a:srgbClr val="0C0A09"/>
                 </a:solidFill>
@@ -19994,7 +19666,7 @@
           <a:bodyPr wrap="square" rtlCol="0" anchor="ctr"/>
           <a:lstStyle/>
           <a:p>
-            <a:pPr algn="l" indent="0" marL="0">
+            <a:pPr marL="0" indent="0" algn="l">
               <a:buNone/>
             </a:pPr>
             <a:r>
@@ -20056,7 +19728,7 @@
           <a:bodyPr wrap="square" rtlCol="0" anchor="ctr"/>
           <a:lstStyle/>
           <a:p>
-            <a:pPr algn="l" indent="0" marL="0">
+            <a:pPr marL="0" indent="0" algn="l">
               <a:buNone/>
             </a:pPr>
             <a:r>
@@ -20095,7 +19767,7 @@
           <a:bodyPr wrap="square" rtlCol="0" anchor="ctr"/>
           <a:lstStyle/>
           <a:p>
-            <a:pPr algn="r" indent="0" marL="0">
+            <a:pPr marL="0" indent="0" algn="r">
               <a:buNone/>
             </a:pPr>
             <a:r>
@@ -20139,7 +19811,7 @@
             <a:prstDash val="solid"/>
           </a:ln>
           <a:effectLst>
-            <a:outerShdw sx="100000" sy="100000" kx="0" ky="0" algn="bl" rotWithShape="0" blurRad="152400" dist="38100" dir="5400000">
+            <a:outerShdw blurRad="152400" dist="38100" dir="5400000" algn="bl" rotWithShape="0">
               <a:srgbClr val="000000">
                 <a:alpha val="6000"/>
               </a:srgbClr>
@@ -20190,7 +19862,7 @@
           <a:bodyPr wrap="square" rtlCol="0" anchor="ctr"/>
           <a:lstStyle/>
           <a:p>
-            <a:pPr algn="ctr" indent="0" marL="0">
+            <a:pPr marL="0" indent="0" algn="ctr">
               <a:buNone/>
             </a:pPr>
             <a:r>
@@ -20251,11 +19923,11 @@
           <a:bodyPr wrap="square" rtlCol="0" anchor="ctr"/>
           <a:lstStyle/>
           <a:p>
-            <a:pPr algn="ctr" indent="0" marL="0">
-              <a:buNone/>
-            </a:pPr>
-            <a:r>
-              <a:rPr lang="en-US" sz="1000" b="1" spc="100" kern="0" dirty="0">
+            <a:pPr marL="0" indent="0" algn="ctr">
+              <a:buNone/>
+            </a:pPr>
+            <a:r>
+              <a:rPr lang="en-US" sz="1000" b="1" kern="0" spc="100" dirty="0">
                 <a:solidFill>
                   <a:srgbClr val="292524"/>
                 </a:solidFill>
@@ -20290,7 +19962,7 @@
           <a:bodyPr wrap="square" rtlCol="0" anchor="ctr"/>
           <a:lstStyle/>
           <a:p>
-            <a:pPr indent="0" marL="0">
+            <a:pPr marL="0" indent="0">
               <a:buNone/>
             </a:pPr>
             <a:r>
@@ -20329,7 +20001,7 @@
           <a:bodyPr wrap="square" rtlCol="0" anchor="ctr"/>
           <a:lstStyle/>
           <a:p>
-            <a:pPr indent="0" marL="0">
+            <a:pPr marL="0" indent="0">
               <a:buNone/>
             </a:pPr>
             <a:r>
@@ -20391,7 +20063,7 @@
           <a:bodyPr wrap="square" rtlCol="0" anchor="ctr"/>
           <a:lstStyle/>
           <a:p>
-            <a:pPr indent="0" marL="0">
+            <a:pPr marL="0" indent="0">
               <a:buNone/>
             </a:pPr>
             <a:r>
@@ -20430,7 +20102,7 @@
           <a:bodyPr wrap="square" rtlCol="0" anchor="t"/>
           <a:lstStyle/>
           <a:p>
-            <a:pPr indent="0" marL="0">
+            <a:pPr marL="0" indent="0">
               <a:lnSpc>
                 <a:spcPct val="150000"/>
               </a:lnSpc>
@@ -20477,7 +20149,7 @@
             <a:prstDash val="solid"/>
           </a:ln>
           <a:effectLst>
-            <a:outerShdw sx="100000" sy="100000" kx="0" ky="0" algn="bl" rotWithShape="0" blurRad="152400" dist="38100" dir="5400000">
+            <a:outerShdw blurRad="152400" dist="38100" dir="5400000" algn="bl" rotWithShape="0">
               <a:srgbClr val="000000">
                 <a:alpha val="6000"/>
               </a:srgbClr>
@@ -20528,7 +20200,7 @@
           <a:bodyPr wrap="square" rtlCol="0" anchor="ctr"/>
           <a:lstStyle/>
           <a:p>
-            <a:pPr algn="ctr" indent="0" marL="0">
+            <a:pPr marL="0" indent="0" algn="ctr">
               <a:buNone/>
             </a:pPr>
             <a:r>
@@ -20589,11 +20261,11 @@
           <a:bodyPr wrap="square" rtlCol="0" anchor="ctr"/>
           <a:lstStyle/>
           <a:p>
-            <a:pPr algn="ctr" indent="0" marL="0">
-              <a:buNone/>
-            </a:pPr>
-            <a:r>
-              <a:rPr lang="en-US" sz="1000" b="1" spc="100" kern="0" dirty="0">
+            <a:pPr marL="0" indent="0" algn="ctr">
+              <a:buNone/>
+            </a:pPr>
+            <a:r>
+              <a:rPr lang="en-US" sz="1000" b="1" kern="0" spc="100" dirty="0">
                 <a:solidFill>
                   <a:srgbClr val="292524"/>
                 </a:solidFill>
@@ -20628,7 +20300,7 @@
           <a:bodyPr wrap="square" rtlCol="0" anchor="ctr"/>
           <a:lstStyle/>
           <a:p>
-            <a:pPr indent="0" marL="0">
+            <a:pPr marL="0" indent="0">
               <a:buNone/>
             </a:pPr>
             <a:r>
@@ -20667,7 +20339,7 @@
           <a:bodyPr wrap="square" rtlCol="0" anchor="ctr"/>
           <a:lstStyle/>
           <a:p>
-            <a:pPr indent="0" marL="0">
+            <a:pPr marL="0" indent="0">
               <a:buNone/>
             </a:pPr>
             <a:r>
@@ -20729,7 +20401,7 @@
           <a:bodyPr wrap="square" rtlCol="0" anchor="ctr"/>
           <a:lstStyle/>
           <a:p>
-            <a:pPr indent="0" marL="0">
+            <a:pPr marL="0" indent="0">
               <a:buNone/>
             </a:pPr>
             <a:r>
@@ -20768,7 +20440,7 @@
           <a:bodyPr wrap="square" rtlCol="0" anchor="t"/>
           <a:lstStyle/>
           <a:p>
-            <a:pPr indent="0" marL="0">
+            <a:pPr marL="0" indent="0">
               <a:lnSpc>
                 <a:spcPct val="150000"/>
               </a:lnSpc>
@@ -20805,6 +20477,7 @@
         <a:solidFill>
           <a:srgbClr val="F5F5F5"/>
         </a:solidFill>
+        <a:effectLst/>
       </p:bgPr>
     </p:bg>
     <p:spTree>
@@ -20864,7 +20537,7 @@
           <a:bodyPr wrap="square" rtlCol="0" anchor="ctr"/>
           <a:lstStyle/>
           <a:p>
-            <a:pPr algn="l" indent="0" marL="0">
+            <a:pPr marL="0" indent="0" algn="l">
               <a:buNone/>
             </a:pPr>
             <a:r>
@@ -20903,11 +20576,11 @@
           <a:bodyPr wrap="square" rtlCol="0" anchor="ctr"/>
           <a:lstStyle/>
           <a:p>
-            <a:pPr algn="r" indent="0" marL="0">
-              <a:buNone/>
-            </a:pPr>
-            <a:r>
-              <a:rPr lang="en-US" sz="900" b="1" spc="200" kern="0" dirty="0">
+            <a:pPr marL="0" indent="0" algn="r">
+              <a:buNone/>
+            </a:pPr>
+            <a:r>
+              <a:rPr lang="en-US" sz="900" b="1" kern="0" spc="200" dirty="0">
                 <a:solidFill>
                   <a:srgbClr val="777169"/>
                 </a:solidFill>
@@ -20942,11 +20615,11 @@
           <a:bodyPr wrap="square" rtlCol="0" anchor="ctr"/>
           <a:lstStyle/>
           <a:p>
-            <a:pPr algn="l" indent="0" marL="0">
-              <a:buNone/>
-            </a:pPr>
-            <a:r>
-              <a:rPr lang="en-US" sz="900" b="1" spc="300" kern="0" dirty="0">
+            <a:pPr marL="0" indent="0" algn="l">
+              <a:buNone/>
+            </a:pPr>
+            <a:r>
+              <a:rPr lang="en-US" sz="900" b="1" kern="0" spc="300" dirty="0">
                 <a:solidFill>
                   <a:srgbClr val="777169"/>
                 </a:solidFill>
@@ -20981,11 +20654,11 @@
           <a:bodyPr wrap="square" rtlCol="0" anchor="t"/>
           <a:lstStyle/>
           <a:p>
-            <a:pPr algn="l" indent="0" marL="0">
-              <a:buNone/>
-            </a:pPr>
-            <a:r>
-              <a:rPr lang="en-US" sz="2700" spc="-40" kern="0" dirty="0">
+            <a:pPr marL="0" indent="0" algn="l">
+              <a:buNone/>
+            </a:pPr>
+            <a:r>
+              <a:rPr lang="en-US" sz="2700" kern="0" spc="-40" dirty="0">
                 <a:solidFill>
                   <a:srgbClr val="0C0A09"/>
                 </a:solidFill>
@@ -21020,7 +20693,7 @@
           <a:bodyPr wrap="square" rtlCol="0" anchor="ctr"/>
           <a:lstStyle/>
           <a:p>
-            <a:pPr algn="l" indent="0" marL="0">
+            <a:pPr marL="0" indent="0" algn="l">
               <a:buNone/>
             </a:pPr>
             <a:r>
@@ -21082,7 +20755,7 @@
           <a:bodyPr wrap="square" rtlCol="0" anchor="ctr"/>
           <a:lstStyle/>
           <a:p>
-            <a:pPr algn="l" indent="0" marL="0">
+            <a:pPr marL="0" indent="0" algn="l">
               <a:buNone/>
             </a:pPr>
             <a:r>
@@ -21121,7 +20794,7 @@
           <a:bodyPr wrap="square" rtlCol="0" anchor="ctr"/>
           <a:lstStyle/>
           <a:p>
-            <a:pPr algn="r" indent="0" marL="0">
+            <a:pPr marL="0" indent="0" algn="r">
               <a:buNone/>
             </a:pPr>
             <a:r>
@@ -21165,7 +20838,7 @@
             <a:prstDash val="solid"/>
           </a:ln>
           <a:effectLst>
-            <a:outerShdw sx="100000" sy="100000" kx="0" ky="0" algn="bl" rotWithShape="0" blurRad="152400" dist="38100" dir="5400000">
+            <a:outerShdw blurRad="152400" dist="38100" dir="5400000" algn="bl" rotWithShape="0">
               <a:srgbClr val="000000">
                 <a:alpha val="6000"/>
               </a:srgbClr>
@@ -21216,7 +20889,7 @@
           <a:bodyPr wrap="square" rtlCol="0" anchor="ctr"/>
           <a:lstStyle/>
           <a:p>
-            <a:pPr algn="ctr" indent="0" marL="0">
+            <a:pPr marL="0" indent="0" algn="ctr">
               <a:buNone/>
             </a:pPr>
             <a:r>
@@ -21277,11 +20950,11 @@
           <a:bodyPr wrap="square" rtlCol="0" anchor="ctr"/>
           <a:lstStyle/>
           <a:p>
-            <a:pPr algn="ctr" indent="0" marL="0">
-              <a:buNone/>
-            </a:pPr>
-            <a:r>
-              <a:rPr lang="en-US" sz="1000" b="1" spc="100" kern="0" dirty="0">
+            <a:pPr marL="0" indent="0" algn="ctr">
+              <a:buNone/>
+            </a:pPr>
+            <a:r>
+              <a:rPr lang="en-US" sz="1000" b="1" kern="0" spc="100" dirty="0">
                 <a:solidFill>
                   <a:srgbClr val="292524"/>
                 </a:solidFill>
@@ -21316,7 +20989,7 @@
           <a:bodyPr wrap="square" rtlCol="0" anchor="ctr"/>
           <a:lstStyle/>
           <a:p>
-            <a:pPr indent="0" marL="0">
+            <a:pPr marL="0" indent="0">
               <a:buNone/>
             </a:pPr>
             <a:r>
@@ -21355,7 +21028,7 @@
           <a:bodyPr wrap="square" rtlCol="0" anchor="ctr"/>
           <a:lstStyle/>
           <a:p>
-            <a:pPr indent="0" marL="0">
+            <a:pPr marL="0" indent="0">
               <a:buNone/>
             </a:pPr>
             <a:r>
@@ -21417,7 +21090,7 @@
           <a:bodyPr wrap="square" rtlCol="0" anchor="ctr"/>
           <a:lstStyle/>
           <a:p>
-            <a:pPr indent="0" marL="0">
+            <a:pPr marL="0" indent="0">
               <a:buNone/>
             </a:pPr>
             <a:r>
@@ -21456,7 +21129,7 @@
           <a:bodyPr wrap="square" rtlCol="0" anchor="t"/>
           <a:lstStyle/>
           <a:p>
-            <a:pPr indent="0" marL="0">
+            <a:pPr marL="0" indent="0">
               <a:lnSpc>
                 <a:spcPct val="150000"/>
               </a:lnSpc>
@@ -21503,7 +21176,7 @@
             <a:prstDash val="solid"/>
           </a:ln>
           <a:effectLst>
-            <a:outerShdw sx="100000" sy="100000" kx="0" ky="0" algn="bl" rotWithShape="0" blurRad="152400" dist="38100" dir="5400000">
+            <a:outerShdw blurRad="152400" dist="38100" dir="5400000" algn="bl" rotWithShape="0">
               <a:srgbClr val="000000">
                 <a:alpha val="6000"/>
               </a:srgbClr>
@@ -21554,7 +21227,7 @@
           <a:bodyPr wrap="square" rtlCol="0" anchor="ctr"/>
           <a:lstStyle/>
           <a:p>
-            <a:pPr algn="ctr" indent="0" marL="0">
+            <a:pPr marL="0" indent="0" algn="ctr">
               <a:buNone/>
             </a:pPr>
             <a:r>
@@ -21615,11 +21288,11 @@
           <a:bodyPr wrap="square" rtlCol="0" anchor="ctr"/>
           <a:lstStyle/>
           <a:p>
-            <a:pPr algn="ctr" indent="0" marL="0">
-              <a:buNone/>
-            </a:pPr>
-            <a:r>
-              <a:rPr lang="en-US" sz="1000" b="1" spc="100" kern="0" dirty="0">
+            <a:pPr marL="0" indent="0" algn="ctr">
+              <a:buNone/>
+            </a:pPr>
+            <a:r>
+              <a:rPr lang="en-US" sz="1000" b="1" kern="0" spc="100" dirty="0">
                 <a:solidFill>
                   <a:srgbClr val="292524"/>
                 </a:solidFill>
@@ -21654,7 +21327,7 @@
           <a:bodyPr wrap="square" rtlCol="0" anchor="ctr"/>
           <a:lstStyle/>
           <a:p>
-            <a:pPr indent="0" marL="0">
+            <a:pPr marL="0" indent="0">
               <a:buNone/>
             </a:pPr>
             <a:r>
@@ -21693,7 +21366,7 @@
           <a:bodyPr wrap="square" rtlCol="0" anchor="ctr"/>
           <a:lstStyle/>
           <a:p>
-            <a:pPr indent="0" marL="0">
+            <a:pPr marL="0" indent="0">
               <a:buNone/>
             </a:pPr>
             <a:r>
@@ -21755,7 +21428,7 @@
           <a:bodyPr wrap="square" rtlCol="0" anchor="ctr"/>
           <a:lstStyle/>
           <a:p>
-            <a:pPr indent="0" marL="0">
+            <a:pPr marL="0" indent="0">
               <a:buNone/>
             </a:pPr>
             <a:r>
@@ -21794,7 +21467,7 @@
           <a:bodyPr wrap="square" rtlCol="0" anchor="t"/>
           <a:lstStyle/>
           <a:p>
-            <a:pPr indent="0" marL="0">
+            <a:pPr marL="0" indent="0">
               <a:lnSpc>
                 <a:spcPct val="150000"/>
               </a:lnSpc>
@@ -21831,6 +21504,7 @@
         <a:solidFill>
           <a:srgbClr val="F5F5F5"/>
         </a:solidFill>
+        <a:effectLst/>
       </p:bgPr>
     </p:bg>
     <p:spTree>
@@ -21890,7 +21564,7 @@
           <a:bodyPr wrap="square" rtlCol="0" anchor="ctr"/>
           <a:lstStyle/>
           <a:p>
-            <a:pPr algn="l" indent="0" marL="0">
+            <a:pPr marL="0" indent="0" algn="l">
               <a:buNone/>
             </a:pPr>
             <a:r>
@@ -21929,11 +21603,11 @@
           <a:bodyPr wrap="square" rtlCol="0" anchor="ctr"/>
           <a:lstStyle/>
           <a:p>
-            <a:pPr algn="r" indent="0" marL="0">
-              <a:buNone/>
-            </a:pPr>
-            <a:r>
-              <a:rPr lang="en-US" sz="900" b="1" spc="200" kern="0" dirty="0">
+            <a:pPr marL="0" indent="0" algn="r">
+              <a:buNone/>
+            </a:pPr>
+            <a:r>
+              <a:rPr lang="en-US" sz="900" b="1" kern="0" spc="200" dirty="0">
                 <a:solidFill>
                   <a:srgbClr val="777169"/>
                 </a:solidFill>
@@ -21968,11 +21642,11 @@
           <a:bodyPr wrap="square" rtlCol="0" anchor="ctr"/>
           <a:lstStyle/>
           <a:p>
-            <a:pPr algn="l" indent="0" marL="0">
-              <a:buNone/>
-            </a:pPr>
-            <a:r>
-              <a:rPr lang="en-US" sz="900" b="1" spc="300" kern="0" dirty="0">
+            <a:pPr marL="0" indent="0" algn="l">
+              <a:buNone/>
+            </a:pPr>
+            <a:r>
+              <a:rPr lang="en-US" sz="900" b="1" kern="0" spc="300" dirty="0">
                 <a:solidFill>
                   <a:srgbClr val="777169"/>
                 </a:solidFill>
@@ -22007,11 +21681,11 @@
           <a:bodyPr wrap="square" rtlCol="0" anchor="t"/>
           <a:lstStyle/>
           <a:p>
-            <a:pPr algn="l" indent="0" marL="0">
-              <a:buNone/>
-            </a:pPr>
-            <a:r>
-              <a:rPr lang="en-US" sz="2700" spc="-40" kern="0" dirty="0">
+            <a:pPr marL="0" indent="0" algn="l">
+              <a:buNone/>
+            </a:pPr>
+            <a:r>
+              <a:rPr lang="en-US" sz="2700" kern="0" spc="-40" dirty="0">
                 <a:solidFill>
                   <a:srgbClr val="0C0A09"/>
                 </a:solidFill>
@@ -22046,7 +21720,7 @@
           <a:bodyPr wrap="square" rtlCol="0" anchor="ctr"/>
           <a:lstStyle/>
           <a:p>
-            <a:pPr algn="l" indent="0" marL="0">
+            <a:pPr marL="0" indent="0" algn="l">
               <a:buNone/>
             </a:pPr>
             <a:r>
@@ -22108,7 +21782,7 @@
           <a:bodyPr wrap="square" rtlCol="0" anchor="ctr"/>
           <a:lstStyle/>
           <a:p>
-            <a:pPr algn="l" indent="0" marL="0">
+            <a:pPr marL="0" indent="0" algn="l">
               <a:buNone/>
             </a:pPr>
             <a:r>
@@ -22147,7 +21821,7 @@
           <a:bodyPr wrap="square" rtlCol="0" anchor="ctr"/>
           <a:lstStyle/>
           <a:p>
-            <a:pPr algn="r" indent="0" marL="0">
+            <a:pPr marL="0" indent="0" algn="r">
               <a:buNone/>
             </a:pPr>
             <a:r>
@@ -22191,7 +21865,7 @@
             <a:prstDash val="solid"/>
           </a:ln>
           <a:effectLst>
-            <a:outerShdw sx="100000" sy="100000" kx="0" ky="0" algn="bl" rotWithShape="0" blurRad="152400" dist="38100" dir="5400000">
+            <a:outerShdw blurRad="152400" dist="38100" dir="5400000" algn="bl" rotWithShape="0">
               <a:srgbClr val="000000">
                 <a:alpha val="6000"/>
               </a:srgbClr>
@@ -22242,7 +21916,7 @@
           <a:bodyPr wrap="square" rtlCol="0" anchor="ctr"/>
           <a:lstStyle/>
           <a:p>
-            <a:pPr algn="ctr" indent="0" marL="0">
+            <a:pPr marL="0" indent="0" algn="ctr">
               <a:buNone/>
             </a:pPr>
             <a:r>
@@ -22303,11 +21977,11 @@
           <a:bodyPr wrap="square" rtlCol="0" anchor="ctr"/>
           <a:lstStyle/>
           <a:p>
-            <a:pPr algn="ctr" indent="0" marL="0">
-              <a:buNone/>
-            </a:pPr>
-            <a:r>
-              <a:rPr lang="en-US" sz="1000" b="1" spc="100" kern="0" dirty="0">
+            <a:pPr marL="0" indent="0" algn="ctr">
+              <a:buNone/>
+            </a:pPr>
+            <a:r>
+              <a:rPr lang="en-US" sz="1000" b="1" kern="0" spc="100" dirty="0">
                 <a:solidFill>
                   <a:srgbClr val="292524"/>
                 </a:solidFill>
@@ -22342,7 +22016,7 @@
           <a:bodyPr wrap="square" rtlCol="0" anchor="ctr"/>
           <a:lstStyle/>
           <a:p>
-            <a:pPr indent="0" marL="0">
+            <a:pPr marL="0" indent="0">
               <a:buNone/>
             </a:pPr>
             <a:r>
@@ -22381,7 +22055,7 @@
           <a:bodyPr wrap="square" rtlCol="0" anchor="ctr"/>
           <a:lstStyle/>
           <a:p>
-            <a:pPr indent="0" marL="0">
+            <a:pPr marL="0" indent="0">
               <a:buNone/>
             </a:pPr>
             <a:r>
@@ -22443,7 +22117,7 @@
           <a:bodyPr wrap="square" rtlCol="0" anchor="ctr"/>
           <a:lstStyle/>
           <a:p>
-            <a:pPr indent="0" marL="0">
+            <a:pPr marL="0" indent="0">
               <a:buNone/>
             </a:pPr>
             <a:r>
@@ -22482,7 +22156,7 @@
           <a:bodyPr wrap="square" rtlCol="0" anchor="t"/>
           <a:lstStyle/>
           <a:p>
-            <a:pPr indent="0" marL="0">
+            <a:pPr marL="0" indent="0">
               <a:lnSpc>
                 <a:spcPct val="150000"/>
               </a:lnSpc>
@@ -22529,7 +22203,7 @@
             <a:prstDash val="solid"/>
           </a:ln>
           <a:effectLst>
-            <a:outerShdw sx="100000" sy="100000" kx="0" ky="0" algn="bl" rotWithShape="0" blurRad="152400" dist="38100" dir="5400000">
+            <a:outerShdw blurRad="152400" dist="38100" dir="5400000" algn="bl" rotWithShape="0">
               <a:srgbClr val="000000">
                 <a:alpha val="6000"/>
               </a:srgbClr>
@@ -22580,7 +22254,7 @@
           <a:bodyPr wrap="square" rtlCol="0" anchor="ctr"/>
           <a:lstStyle/>
           <a:p>
-            <a:pPr algn="ctr" indent="0" marL="0">
+            <a:pPr marL="0" indent="0" algn="ctr">
               <a:buNone/>
             </a:pPr>
             <a:r>
@@ -22641,11 +22315,11 @@
           <a:bodyPr wrap="square" rtlCol="0" anchor="ctr"/>
           <a:lstStyle/>
           <a:p>
-            <a:pPr algn="ctr" indent="0" marL="0">
-              <a:buNone/>
-            </a:pPr>
-            <a:r>
-              <a:rPr lang="en-US" sz="1000" b="1" spc="100" kern="0" dirty="0">
+            <a:pPr marL="0" indent="0" algn="ctr">
+              <a:buNone/>
+            </a:pPr>
+            <a:r>
+              <a:rPr lang="en-US" sz="1000" b="1" kern="0" spc="100" dirty="0">
                 <a:solidFill>
                   <a:srgbClr val="292524"/>
                 </a:solidFill>
@@ -22680,7 +22354,7 @@
           <a:bodyPr wrap="square" rtlCol="0" anchor="ctr"/>
           <a:lstStyle/>
           <a:p>
-            <a:pPr indent="0" marL="0">
+            <a:pPr marL="0" indent="0">
               <a:buNone/>
             </a:pPr>
             <a:r>
@@ -22719,7 +22393,7 @@
           <a:bodyPr wrap="square" rtlCol="0" anchor="ctr"/>
           <a:lstStyle/>
           <a:p>
-            <a:pPr indent="0" marL="0">
+            <a:pPr marL="0" indent="0">
               <a:buNone/>
             </a:pPr>
             <a:r>
@@ -22781,7 +22455,7 @@
           <a:bodyPr wrap="square" rtlCol="0" anchor="ctr"/>
           <a:lstStyle/>
           <a:p>
-            <a:pPr indent="0" marL="0">
+            <a:pPr marL="0" indent="0">
               <a:buNone/>
             </a:pPr>
             <a:r>
@@ -22820,7 +22494,7 @@
           <a:bodyPr wrap="square" rtlCol="0" anchor="t"/>
           <a:lstStyle/>
           <a:p>
-            <a:pPr indent="0" marL="0">
+            <a:pPr marL="0" indent="0">
               <a:lnSpc>
                 <a:spcPct val="150000"/>
               </a:lnSpc>
@@ -22857,6 +22531,7 @@
         <a:solidFill>
           <a:srgbClr val="F5F5F5"/>
         </a:solidFill>
+        <a:effectLst/>
       </p:bgPr>
     </p:bg>
     <p:spTree>
@@ -22916,7 +22591,7 @@
           <a:bodyPr wrap="square" rtlCol="0" anchor="ctr"/>
           <a:lstStyle/>
           <a:p>
-            <a:pPr algn="l" indent="0" marL="0">
+            <a:pPr marL="0" indent="0" algn="l">
               <a:buNone/>
             </a:pPr>
             <a:r>
@@ -22955,11 +22630,11 @@
           <a:bodyPr wrap="square" rtlCol="0" anchor="ctr"/>
           <a:lstStyle/>
           <a:p>
-            <a:pPr algn="r" indent="0" marL="0">
-              <a:buNone/>
-            </a:pPr>
-            <a:r>
-              <a:rPr lang="en-US" sz="900" b="1" spc="200" kern="0" dirty="0">
+            <a:pPr marL="0" indent="0" algn="r">
+              <a:buNone/>
+            </a:pPr>
+            <a:r>
+              <a:rPr lang="en-US" sz="900" b="1" kern="0" spc="200" dirty="0">
                 <a:solidFill>
                   <a:srgbClr val="777169"/>
                 </a:solidFill>
@@ -22994,11 +22669,11 @@
           <a:bodyPr wrap="square" rtlCol="0" anchor="ctr"/>
           <a:lstStyle/>
           <a:p>
-            <a:pPr algn="l" indent="0" marL="0">
-              <a:buNone/>
-            </a:pPr>
-            <a:r>
-              <a:rPr lang="en-US" sz="900" b="1" spc="300" kern="0" dirty="0">
+            <a:pPr marL="0" indent="0" algn="l">
+              <a:buNone/>
+            </a:pPr>
+            <a:r>
+              <a:rPr lang="en-US" sz="900" b="1" kern="0" spc="300" dirty="0">
                 <a:solidFill>
                   <a:srgbClr val="777169"/>
                 </a:solidFill>
@@ -23033,11 +22708,11 @@
           <a:bodyPr wrap="square" rtlCol="0" anchor="t"/>
           <a:lstStyle/>
           <a:p>
-            <a:pPr algn="l" indent="0" marL="0">
-              <a:buNone/>
-            </a:pPr>
-            <a:r>
-              <a:rPr lang="en-US" sz="2700" spc="-40" kern="0" dirty="0">
+            <a:pPr marL="0" indent="0" algn="l">
+              <a:buNone/>
+            </a:pPr>
+            <a:r>
+              <a:rPr lang="en-US" sz="2700" kern="0" spc="-40" dirty="0">
                 <a:solidFill>
                   <a:srgbClr val="0C0A09"/>
                 </a:solidFill>
@@ -23072,7 +22747,7 @@
           <a:bodyPr wrap="square" rtlCol="0" anchor="ctr"/>
           <a:lstStyle/>
           <a:p>
-            <a:pPr algn="l" indent="0" marL="0">
+            <a:pPr marL="0" indent="0" algn="l">
               <a:buNone/>
             </a:pPr>
             <a:r>
@@ -23134,7 +22809,7 @@
           <a:bodyPr wrap="square" rtlCol="0" anchor="ctr"/>
           <a:lstStyle/>
           <a:p>
-            <a:pPr algn="l" indent="0" marL="0">
+            <a:pPr marL="0" indent="0" algn="l">
               <a:buNone/>
             </a:pPr>
             <a:r>
@@ -23173,7 +22848,7 @@
           <a:bodyPr wrap="square" rtlCol="0" anchor="ctr"/>
           <a:lstStyle/>
           <a:p>
-            <a:pPr algn="r" indent="0" marL="0">
+            <a:pPr marL="0" indent="0" algn="r">
               <a:buNone/>
             </a:pPr>
             <a:r>
@@ -23217,7 +22892,7 @@
             <a:prstDash val="solid"/>
           </a:ln>
           <a:effectLst>
-            <a:outerShdw sx="100000" sy="100000" kx="0" ky="0" algn="bl" rotWithShape="0" blurRad="152400" dist="38100" dir="5400000">
+            <a:outerShdw blurRad="152400" dist="38100" dir="5400000" algn="bl" rotWithShape="0">
               <a:srgbClr val="000000">
                 <a:alpha val="6000"/>
               </a:srgbClr>
@@ -23268,7 +22943,7 @@
           <a:bodyPr wrap="square" rtlCol="0" anchor="ctr"/>
           <a:lstStyle/>
           <a:p>
-            <a:pPr algn="ctr" indent="0" marL="0">
+            <a:pPr marL="0" indent="0" algn="ctr">
               <a:buNone/>
             </a:pPr>
             <a:r>
@@ -23329,11 +23004,11 @@
           <a:bodyPr wrap="square" rtlCol="0" anchor="ctr"/>
           <a:lstStyle/>
           <a:p>
-            <a:pPr algn="ctr" indent="0" marL="0">
-              <a:buNone/>
-            </a:pPr>
-            <a:r>
-              <a:rPr lang="en-US" sz="1000" b="1" spc="100" kern="0" dirty="0">
+            <a:pPr marL="0" indent="0" algn="ctr">
+              <a:buNone/>
+            </a:pPr>
+            <a:r>
+              <a:rPr lang="en-US" sz="1000" b="1" kern="0" spc="100" dirty="0">
                 <a:solidFill>
                   <a:srgbClr val="292524"/>
                 </a:solidFill>
@@ -23368,7 +23043,7 @@
           <a:bodyPr wrap="square" rtlCol="0" anchor="ctr"/>
           <a:lstStyle/>
           <a:p>
-            <a:pPr indent="0" marL="0">
+            <a:pPr marL="0" indent="0">
               <a:buNone/>
             </a:pPr>
             <a:r>
@@ -23407,7 +23082,7 @@
           <a:bodyPr wrap="square" rtlCol="0" anchor="ctr"/>
           <a:lstStyle/>
           <a:p>
-            <a:pPr indent="0" marL="0">
+            <a:pPr marL="0" indent="0">
               <a:buNone/>
             </a:pPr>
             <a:r>
@@ -23469,7 +23144,7 @@
           <a:bodyPr wrap="square" rtlCol="0" anchor="ctr"/>
           <a:lstStyle/>
           <a:p>
-            <a:pPr indent="0" marL="0">
+            <a:pPr marL="0" indent="0">
               <a:buNone/>
             </a:pPr>
             <a:r>
@@ -23508,7 +23183,7 @@
           <a:bodyPr wrap="square" rtlCol="0" anchor="t"/>
           <a:lstStyle/>
           <a:p>
-            <a:pPr indent="0" marL="0">
+            <a:pPr marL="0" indent="0">
               <a:lnSpc>
                 <a:spcPct val="150000"/>
               </a:lnSpc>
@@ -23555,7 +23230,7 @@
             <a:prstDash val="solid"/>
           </a:ln>
           <a:effectLst>
-            <a:outerShdw sx="100000" sy="100000" kx="0" ky="0" algn="bl" rotWithShape="0" blurRad="152400" dist="38100" dir="5400000">
+            <a:outerShdw blurRad="152400" dist="38100" dir="5400000" algn="bl" rotWithShape="0">
               <a:srgbClr val="000000">
                 <a:alpha val="6000"/>
               </a:srgbClr>
@@ -23606,7 +23281,7 @@
           <a:bodyPr wrap="square" rtlCol="0" anchor="ctr"/>
           <a:lstStyle/>
           <a:p>
-            <a:pPr algn="ctr" indent="0" marL="0">
+            <a:pPr marL="0" indent="0" algn="ctr">
               <a:buNone/>
             </a:pPr>
             <a:r>
@@ -23667,11 +23342,11 @@
           <a:bodyPr wrap="square" rtlCol="0" anchor="ctr"/>
           <a:lstStyle/>
           <a:p>
-            <a:pPr algn="ctr" indent="0" marL="0">
-              <a:buNone/>
-            </a:pPr>
-            <a:r>
-              <a:rPr lang="en-US" sz="1000" b="1" spc="100" kern="0" dirty="0">
+            <a:pPr marL="0" indent="0" algn="ctr">
+              <a:buNone/>
+            </a:pPr>
+            <a:r>
+              <a:rPr lang="en-US" sz="1000" b="1" kern="0" spc="100" dirty="0">
                 <a:solidFill>
                   <a:srgbClr val="292524"/>
                 </a:solidFill>
@@ -23706,7 +23381,7 @@
           <a:bodyPr wrap="square" rtlCol="0" anchor="ctr"/>
           <a:lstStyle/>
           <a:p>
-            <a:pPr indent="0" marL="0">
+            <a:pPr marL="0" indent="0">
               <a:buNone/>
             </a:pPr>
             <a:r>
@@ -23745,7 +23420,7 @@
           <a:bodyPr wrap="square" rtlCol="0" anchor="ctr"/>
           <a:lstStyle/>
           <a:p>
-            <a:pPr indent="0" marL="0">
+            <a:pPr marL="0" indent="0">
               <a:buNone/>
             </a:pPr>
             <a:r>
@@ -23807,7 +23482,7 @@
           <a:bodyPr wrap="square" rtlCol="0" anchor="ctr"/>
           <a:lstStyle/>
           <a:p>
-            <a:pPr indent="0" marL="0">
+            <a:pPr marL="0" indent="0">
               <a:buNone/>
             </a:pPr>
             <a:r>
@@ -23846,7 +23521,7 @@
           <a:bodyPr wrap="square" rtlCol="0" anchor="t"/>
           <a:lstStyle/>
           <a:p>
-            <a:pPr indent="0" marL="0">
+            <a:pPr marL="0" indent="0">
               <a:lnSpc>
                 <a:spcPct val="150000"/>
               </a:lnSpc>
@@ -23883,6 +23558,7 @@
         <a:solidFill>
           <a:srgbClr val="F5F5F5"/>
         </a:solidFill>
+        <a:effectLst/>
       </p:bgPr>
     </p:bg>
     <p:spTree>
@@ -23942,7 +23618,7 @@
           <a:bodyPr wrap="square" rtlCol="0" anchor="ctr"/>
           <a:lstStyle/>
           <a:p>
-            <a:pPr algn="l" indent="0" marL="0">
+            <a:pPr marL="0" indent="0" algn="l">
               <a:buNone/>
             </a:pPr>
             <a:r>
@@ -23981,11 +23657,11 @@
           <a:bodyPr wrap="square" rtlCol="0" anchor="ctr"/>
           <a:lstStyle/>
           <a:p>
-            <a:pPr algn="r" indent="0" marL="0">
-              <a:buNone/>
-            </a:pPr>
-            <a:r>
-              <a:rPr lang="en-US" sz="900" b="1" spc="200" kern="0" dirty="0">
+            <a:pPr marL="0" indent="0" algn="r">
+              <a:buNone/>
+            </a:pPr>
+            <a:r>
+              <a:rPr lang="en-US" sz="900" b="1" kern="0" spc="200" dirty="0">
                 <a:solidFill>
                   <a:srgbClr val="777169"/>
                 </a:solidFill>
@@ -24020,11 +23696,11 @@
           <a:bodyPr wrap="square" rtlCol="0" anchor="ctr"/>
           <a:lstStyle/>
           <a:p>
-            <a:pPr algn="l" indent="0" marL="0">
-              <a:buNone/>
-            </a:pPr>
-            <a:r>
-              <a:rPr lang="en-US" sz="900" b="1" spc="300" kern="0" dirty="0">
+            <a:pPr marL="0" indent="0" algn="l">
+              <a:buNone/>
+            </a:pPr>
+            <a:r>
+              <a:rPr lang="en-US" sz="900" b="1" kern="0" spc="300" dirty="0">
                 <a:solidFill>
                   <a:srgbClr val="777169"/>
                 </a:solidFill>
@@ -24059,11 +23735,11 @@
           <a:bodyPr wrap="square" rtlCol="0" anchor="t"/>
           <a:lstStyle/>
           <a:p>
-            <a:pPr algn="l" indent="0" marL="0">
-              <a:buNone/>
-            </a:pPr>
-            <a:r>
-              <a:rPr lang="en-US" sz="2700" spc="-40" kern="0" dirty="0">
+            <a:pPr marL="0" indent="0" algn="l">
+              <a:buNone/>
+            </a:pPr>
+            <a:r>
+              <a:rPr lang="en-US" sz="2700" kern="0" spc="-40" dirty="0">
                 <a:solidFill>
                   <a:srgbClr val="0C0A09"/>
                 </a:solidFill>
@@ -24098,7 +23774,7 @@
           <a:bodyPr wrap="square" rtlCol="0" anchor="ctr"/>
           <a:lstStyle/>
           <a:p>
-            <a:pPr algn="l" indent="0" marL="0">
+            <a:pPr marL="0" indent="0" algn="l">
               <a:buNone/>
             </a:pPr>
             <a:r>
@@ -24160,7 +23836,7 @@
           <a:bodyPr wrap="square" rtlCol="0" anchor="ctr"/>
           <a:lstStyle/>
           <a:p>
-            <a:pPr algn="l" indent="0" marL="0">
+            <a:pPr marL="0" indent="0" algn="l">
               <a:buNone/>
             </a:pPr>
             <a:r>
@@ -24199,7 +23875,7 @@
           <a:bodyPr wrap="square" rtlCol="0" anchor="ctr"/>
           <a:lstStyle/>
           <a:p>
-            <a:pPr algn="r" indent="0" marL="0">
+            <a:pPr marL="0" indent="0" algn="r">
               <a:buNone/>
             </a:pPr>
             <a:r>
@@ -24243,7 +23919,7 @@
             <a:prstDash val="solid"/>
           </a:ln>
           <a:effectLst>
-            <a:outerShdw sx="100000" sy="100000" kx="0" ky="0" algn="bl" rotWithShape="0" blurRad="152400" dist="38100" dir="5400000">
+            <a:outerShdw blurRad="152400" dist="38100" dir="5400000" algn="bl" rotWithShape="0">
               <a:srgbClr val="000000">
                 <a:alpha val="6000"/>
               </a:srgbClr>
@@ -24294,7 +23970,7 @@
           <a:bodyPr wrap="square" rtlCol="0" anchor="ctr"/>
           <a:lstStyle/>
           <a:p>
-            <a:pPr algn="ctr" indent="0" marL="0">
+            <a:pPr marL="0" indent="0" algn="ctr">
               <a:buNone/>
             </a:pPr>
             <a:r>
@@ -24355,11 +24031,11 @@
           <a:bodyPr wrap="square" rtlCol="0" anchor="ctr"/>
           <a:lstStyle/>
           <a:p>
-            <a:pPr algn="ctr" indent="0" marL="0">
-              <a:buNone/>
-            </a:pPr>
-            <a:r>
-              <a:rPr lang="en-US" sz="1000" b="1" spc="100" kern="0" dirty="0">
+            <a:pPr marL="0" indent="0" algn="ctr">
+              <a:buNone/>
+            </a:pPr>
+            <a:r>
+              <a:rPr lang="en-US" sz="1000" b="1" kern="0" spc="100" dirty="0">
                 <a:solidFill>
                   <a:srgbClr val="292524"/>
                 </a:solidFill>
@@ -24394,7 +24070,7 @@
           <a:bodyPr wrap="square" rtlCol="0" anchor="ctr"/>
           <a:lstStyle/>
           <a:p>
-            <a:pPr indent="0" marL="0">
+            <a:pPr marL="0" indent="0">
               <a:buNone/>
             </a:pPr>
             <a:r>
@@ -24433,7 +24109,7 @@
           <a:bodyPr wrap="square" rtlCol="0" anchor="ctr"/>
           <a:lstStyle/>
           <a:p>
-            <a:pPr indent="0" marL="0">
+            <a:pPr marL="0" indent="0">
               <a:buNone/>
             </a:pPr>
             <a:r>
@@ -24495,7 +24171,7 @@
           <a:bodyPr wrap="square" rtlCol="0" anchor="ctr"/>
           <a:lstStyle/>
           <a:p>
-            <a:pPr indent="0" marL="0">
+            <a:pPr marL="0" indent="0">
               <a:buNone/>
             </a:pPr>
             <a:r>
@@ -24534,7 +24210,7 @@
           <a:bodyPr wrap="square" rtlCol="0" anchor="t"/>
           <a:lstStyle/>
           <a:p>
-            <a:pPr indent="0" marL="0">
+            <a:pPr marL="0" indent="0">
               <a:lnSpc>
                 <a:spcPct val="150000"/>
               </a:lnSpc>
@@ -24581,7 +24257,7 @@
             <a:prstDash val="solid"/>
           </a:ln>
           <a:effectLst>
-            <a:outerShdw sx="100000" sy="100000" kx="0" ky="0" algn="bl" rotWithShape="0" blurRad="152400" dist="38100" dir="5400000">
+            <a:outerShdw blurRad="152400" dist="38100" dir="5400000" algn="bl" rotWithShape="0">
               <a:srgbClr val="000000">
                 <a:alpha val="6000"/>
               </a:srgbClr>
@@ -24632,7 +24308,7 @@
           <a:bodyPr wrap="square" rtlCol="0" anchor="ctr"/>
           <a:lstStyle/>
           <a:p>
-            <a:pPr algn="ctr" indent="0" marL="0">
+            <a:pPr marL="0" indent="0" algn="ctr">
               <a:buNone/>
             </a:pPr>
             <a:r>
@@ -24693,11 +24369,11 @@
           <a:bodyPr wrap="square" rtlCol="0" anchor="ctr"/>
           <a:lstStyle/>
           <a:p>
-            <a:pPr algn="ctr" indent="0" marL="0">
-              <a:buNone/>
-            </a:pPr>
-            <a:r>
-              <a:rPr lang="en-US" sz="1000" b="1" spc="100" kern="0" dirty="0">
+            <a:pPr marL="0" indent="0" algn="ctr">
+              <a:buNone/>
+            </a:pPr>
+            <a:r>
+              <a:rPr lang="en-US" sz="1000" b="1" kern="0" spc="100" dirty="0">
                 <a:solidFill>
                   <a:srgbClr val="292524"/>
                 </a:solidFill>
@@ -24732,7 +24408,7 @@
           <a:bodyPr wrap="square" rtlCol="0" anchor="ctr"/>
           <a:lstStyle/>
           <a:p>
-            <a:pPr indent="0" marL="0">
+            <a:pPr marL="0" indent="0">
               <a:buNone/>
             </a:pPr>
             <a:r>
@@ -24771,7 +24447,7 @@
           <a:bodyPr wrap="square" rtlCol="0" anchor="ctr"/>
           <a:lstStyle/>
           <a:p>
-            <a:pPr indent="0" marL="0">
+            <a:pPr marL="0" indent="0">
               <a:buNone/>
             </a:pPr>
             <a:r>
@@ -24833,7 +24509,7 @@
           <a:bodyPr wrap="square" rtlCol="0" anchor="ctr"/>
           <a:lstStyle/>
           <a:p>
-            <a:pPr indent="0" marL="0">
+            <a:pPr marL="0" indent="0">
               <a:buNone/>
             </a:pPr>
             <a:r>
@@ -24872,7 +24548,7 @@
           <a:bodyPr wrap="square" rtlCol="0" anchor="t"/>
           <a:lstStyle/>
           <a:p>
-            <a:pPr indent="0" marL="0">
+            <a:pPr marL="0" indent="0">
               <a:lnSpc>
                 <a:spcPct val="150000"/>
               </a:lnSpc>
@@ -24909,6 +24585,7 @@
         <a:solidFill>
           <a:srgbClr val="F5F5F5"/>
         </a:solidFill>
+        <a:effectLst/>
       </p:bgPr>
     </p:bg>
     <p:spTree>
@@ -24990,7 +24667,7 @@
           <a:bodyPr wrap="square" rtlCol="0" anchor="ctr"/>
           <a:lstStyle/>
           <a:p>
-            <a:pPr algn="l" indent="0" marL="0">
+            <a:pPr marL="0" indent="0" algn="l">
               <a:buNone/>
             </a:pPr>
             <a:r>
@@ -25029,11 +24706,11 @@
           <a:bodyPr wrap="square" rtlCol="0" anchor="ctr"/>
           <a:lstStyle/>
           <a:p>
-            <a:pPr algn="r" indent="0" marL="0">
-              <a:buNone/>
-            </a:pPr>
-            <a:r>
-              <a:rPr lang="en-US" sz="900" b="1" spc="200" kern="0" dirty="0">
+            <a:pPr marL="0" indent="0" algn="r">
+              <a:buNone/>
+            </a:pPr>
+            <a:r>
+              <a:rPr lang="en-US" sz="900" b="1" kern="0" spc="200" dirty="0">
                 <a:solidFill>
                   <a:srgbClr val="777169"/>
                 </a:solidFill>
@@ -25068,11 +24745,11 @@
           <a:bodyPr wrap="square" rtlCol="0" anchor="ctr"/>
           <a:lstStyle/>
           <a:p>
-            <a:pPr algn="l" indent="0" marL="0">
-              <a:buNone/>
-            </a:pPr>
-            <a:r>
-              <a:rPr lang="en-US" sz="1200" b="1" spc="500" kern="0" dirty="0">
+            <a:pPr marL="0" indent="0" algn="l">
+              <a:buNone/>
+            </a:pPr>
+            <a:r>
+              <a:rPr lang="en-US" sz="1200" b="1" kern="0" spc="500" dirty="0">
                 <a:solidFill>
                   <a:srgbClr val="777169"/>
                 </a:solidFill>
@@ -25107,11 +24784,11 @@
           <a:bodyPr wrap="square" rtlCol="0" anchor="t"/>
           <a:lstStyle/>
           <a:p>
-            <a:pPr algn="l" indent="0" marL="0">
-              <a:buNone/>
-            </a:pPr>
-            <a:r>
-              <a:rPr lang="en-US" sz="4800" spc="-100" kern="0" dirty="0">
+            <a:pPr marL="0" indent="0" algn="l">
+              <a:buNone/>
+            </a:pPr>
+            <a:r>
+              <a:rPr lang="en-US" sz="4800" kern="0" spc="-100" dirty="0">
                 <a:solidFill>
                   <a:srgbClr val="0C0A09"/>
                 </a:solidFill>
@@ -25146,11 +24823,11 @@
           <a:bodyPr wrap="square" rtlCol="0" anchor="ctr"/>
           <a:lstStyle/>
           <a:p>
-            <a:pPr algn="l" indent="0" marL="0">
-              <a:buNone/>
-            </a:pPr>
-            <a:r>
-              <a:rPr lang="en-US" sz="1400" b="1" spc="200" kern="0" dirty="0">
+            <a:pPr marL="0" indent="0" algn="l">
+              <a:buNone/>
+            </a:pPr>
+            <a:r>
+              <a:rPr lang="en-US" sz="1400" b="1" kern="0" spc="200" dirty="0">
                 <a:solidFill>
                   <a:srgbClr val="A8A29E"/>
                 </a:solidFill>
@@ -25185,7 +24862,7 @@
           <a:bodyPr wrap="square" rtlCol="0" anchor="t"/>
           <a:lstStyle/>
           <a:p>
-            <a:pPr algn="l" indent="0" marL="0">
+            <a:pPr marL="0" indent="0" algn="l">
               <a:lnSpc>
                 <a:spcPct val="145000"/>
               </a:lnSpc>
@@ -25250,7 +24927,7 @@
           <a:bodyPr wrap="square" rtlCol="0" anchor="ctr"/>
           <a:lstStyle/>
           <a:p>
-            <a:pPr algn="l" indent="0" marL="0">
+            <a:pPr marL="0" indent="0" algn="l">
               <a:buNone/>
             </a:pPr>
             <a:r>
@@ -25289,7 +24966,7 @@
           <a:bodyPr wrap="square" rtlCol="0" anchor="ctr"/>
           <a:lstStyle/>
           <a:p>
-            <a:pPr algn="r" indent="0" marL="0">
+            <a:pPr marL="0" indent="0" algn="r">
               <a:buNone/>
             </a:pPr>
             <a:r>
@@ -25323,6 +25000,7 @@
         <a:solidFill>
           <a:srgbClr val="F5F5F5"/>
         </a:solidFill>
+        <a:effectLst/>
       </p:bgPr>
     </p:bg>
     <p:spTree>
@@ -25382,7 +25060,7 @@
           <a:bodyPr wrap="square" rtlCol="0" anchor="ctr"/>
           <a:lstStyle/>
           <a:p>
-            <a:pPr algn="l" indent="0" marL="0">
+            <a:pPr marL="0" indent="0" algn="l">
               <a:buNone/>
             </a:pPr>
             <a:r>
@@ -25421,11 +25099,11 @@
           <a:bodyPr wrap="square" rtlCol="0" anchor="ctr"/>
           <a:lstStyle/>
           <a:p>
-            <a:pPr algn="r" indent="0" marL="0">
-              <a:buNone/>
-            </a:pPr>
-            <a:r>
-              <a:rPr lang="en-US" sz="900" b="1" spc="200" kern="0" dirty="0">
+            <a:pPr marL="0" indent="0" algn="r">
+              <a:buNone/>
+            </a:pPr>
+            <a:r>
+              <a:rPr lang="en-US" sz="900" b="1" kern="0" spc="200" dirty="0">
                 <a:solidFill>
                   <a:srgbClr val="777169"/>
                 </a:solidFill>
@@ -25460,11 +25138,11 @@
           <a:bodyPr wrap="square" rtlCol="0" anchor="ctr"/>
           <a:lstStyle/>
           <a:p>
-            <a:pPr algn="l" indent="0" marL="0">
-              <a:buNone/>
-            </a:pPr>
-            <a:r>
-              <a:rPr lang="en-US" sz="900" b="1" spc="300" kern="0" dirty="0">
+            <a:pPr marL="0" indent="0" algn="l">
+              <a:buNone/>
+            </a:pPr>
+            <a:r>
+              <a:rPr lang="en-US" sz="900" b="1" kern="0" spc="300" dirty="0">
                 <a:solidFill>
                   <a:srgbClr val="777169"/>
                 </a:solidFill>
@@ -25499,11 +25177,11 @@
           <a:bodyPr wrap="square" rtlCol="0" anchor="t"/>
           <a:lstStyle/>
           <a:p>
-            <a:pPr algn="l" indent="0" marL="0">
-              <a:buNone/>
-            </a:pPr>
-            <a:r>
-              <a:rPr lang="en-US" sz="2700" spc="-40" kern="0" dirty="0">
+            <a:pPr marL="0" indent="0" algn="l">
+              <a:buNone/>
+            </a:pPr>
+            <a:r>
+              <a:rPr lang="en-US" sz="2700" kern="0" spc="-40" dirty="0">
                 <a:solidFill>
                   <a:srgbClr val="0C0A09"/>
                 </a:solidFill>
@@ -25538,7 +25216,7 @@
           <a:bodyPr wrap="square" rtlCol="0" anchor="ctr"/>
           <a:lstStyle/>
           <a:p>
-            <a:pPr algn="l" indent="0" marL="0">
+            <a:pPr marL="0" indent="0" algn="l">
               <a:buNone/>
             </a:pPr>
             <a:r>
@@ -25600,7 +25278,7 @@
           <a:bodyPr wrap="square" rtlCol="0" anchor="ctr"/>
           <a:lstStyle/>
           <a:p>
-            <a:pPr algn="l" indent="0" marL="0">
+            <a:pPr marL="0" indent="0" algn="l">
               <a:buNone/>
             </a:pPr>
             <a:r>
@@ -25639,7 +25317,7 @@
           <a:bodyPr wrap="square" rtlCol="0" anchor="ctr"/>
           <a:lstStyle/>
           <a:p>
-            <a:pPr algn="r" indent="0" marL="0">
+            <a:pPr marL="0" indent="0" algn="r">
               <a:buNone/>
             </a:pPr>
             <a:r>
@@ -25683,7 +25361,7 @@
             <a:prstDash val="solid"/>
           </a:ln>
           <a:effectLst>
-            <a:outerShdw sx="100000" sy="100000" kx="0" ky="0" algn="bl" rotWithShape="0" blurRad="152400" dist="38100" dir="5400000">
+            <a:outerShdw blurRad="152400" dist="38100" dir="5400000" algn="bl" rotWithShape="0">
               <a:srgbClr val="000000">
                 <a:alpha val="6000"/>
               </a:srgbClr>
@@ -25734,7 +25412,7 @@
           <a:bodyPr wrap="square" rtlCol="0" anchor="ctr"/>
           <a:lstStyle/>
           <a:p>
-            <a:pPr algn="ctr" indent="0" marL="0">
+            <a:pPr marL="0" indent="0" algn="ctr">
               <a:buNone/>
             </a:pPr>
             <a:r>
@@ -25773,7 +25451,7 @@
           <a:bodyPr wrap="square" rtlCol="0" anchor="ctr"/>
           <a:lstStyle/>
           <a:p>
-            <a:pPr algn="ctr" indent="0" marL="0">
+            <a:pPr marL="0" indent="0" algn="ctr">
               <a:buNone/>
             </a:pPr>
             <a:r>
@@ -25834,11 +25512,11 @@
           <a:bodyPr wrap="square" rtlCol="0" anchor="ctr"/>
           <a:lstStyle/>
           <a:p>
-            <a:pPr algn="ctr" indent="0" marL="0">
-              <a:buNone/>
-            </a:pPr>
-            <a:r>
-              <a:rPr lang="en-US" sz="1100" b="1" spc="50" kern="0" dirty="0">
+            <a:pPr marL="0" indent="0" algn="ctr">
+              <a:buNone/>
+            </a:pPr>
+            <a:r>
+              <a:rPr lang="en-US" sz="1100" b="1" kern="0" spc="50" dirty="0">
                 <a:solidFill>
                   <a:srgbClr val="292524"/>
                 </a:solidFill>
@@ -25896,7 +25574,7 @@
           <a:bodyPr wrap="square" rtlCol="0" anchor="t"/>
           <a:lstStyle/>
           <a:p>
-            <a:pPr algn="ctr" indent="0" marL="0">
+            <a:pPr marL="0" indent="0" algn="ctr">
               <a:lnSpc>
                 <a:spcPct val="150000"/>
               </a:lnSpc>
@@ -25943,7 +25621,7 @@
             <a:prstDash val="solid"/>
           </a:ln>
           <a:effectLst>
-            <a:outerShdw sx="100000" sy="100000" kx="0" ky="0" algn="bl" rotWithShape="0" blurRad="152400" dist="38100" dir="5400000">
+            <a:outerShdw blurRad="152400" dist="38100" dir="5400000" algn="bl" rotWithShape="0">
               <a:srgbClr val="000000">
                 <a:alpha val="6000"/>
               </a:srgbClr>
@@ -25994,7 +25672,7 @@
           <a:bodyPr wrap="square" rtlCol="0" anchor="ctr"/>
           <a:lstStyle/>
           <a:p>
-            <a:pPr algn="ctr" indent="0" marL="0">
+            <a:pPr marL="0" indent="0" algn="ctr">
               <a:buNone/>
             </a:pPr>
             <a:r>
@@ -26033,7 +25711,7 @@
           <a:bodyPr wrap="square" rtlCol="0" anchor="ctr"/>
           <a:lstStyle/>
           <a:p>
-            <a:pPr algn="ctr" indent="0" marL="0">
+            <a:pPr marL="0" indent="0" algn="ctr">
               <a:buNone/>
             </a:pPr>
             <a:r>
@@ -26094,11 +25772,11 @@
           <a:bodyPr wrap="square" rtlCol="0" anchor="ctr"/>
           <a:lstStyle/>
           <a:p>
-            <a:pPr algn="ctr" indent="0" marL="0">
-              <a:buNone/>
-            </a:pPr>
-            <a:r>
-              <a:rPr lang="en-US" sz="1100" b="1" spc="50" kern="0" dirty="0">
+            <a:pPr marL="0" indent="0" algn="ctr">
+              <a:buNone/>
+            </a:pPr>
+            <a:r>
+              <a:rPr lang="en-US" sz="1100" b="1" kern="0" spc="50" dirty="0">
                 <a:solidFill>
                   <a:srgbClr val="292524"/>
                 </a:solidFill>
@@ -26156,7 +25834,7 @@
           <a:bodyPr wrap="square" rtlCol="0" anchor="t"/>
           <a:lstStyle/>
           <a:p>
-            <a:pPr algn="ctr" indent="0" marL="0">
+            <a:pPr marL="0" indent="0" algn="ctr">
               <a:lnSpc>
                 <a:spcPct val="150000"/>
               </a:lnSpc>
@@ -26203,7 +25881,7 @@
             <a:prstDash val="solid"/>
           </a:ln>
           <a:effectLst>
-            <a:outerShdw sx="100000" sy="100000" kx="0" ky="0" algn="bl" rotWithShape="0" blurRad="152400" dist="38100" dir="5400000">
+            <a:outerShdw blurRad="152400" dist="38100" dir="5400000" algn="bl" rotWithShape="0">
               <a:srgbClr val="000000">
                 <a:alpha val="6000"/>
               </a:srgbClr>
@@ -26254,7 +25932,7 @@
           <a:bodyPr wrap="square" rtlCol="0" anchor="ctr"/>
           <a:lstStyle/>
           <a:p>
-            <a:pPr algn="ctr" indent="0" marL="0">
+            <a:pPr marL="0" indent="0" algn="ctr">
               <a:buNone/>
             </a:pPr>
             <a:r>
@@ -26293,7 +25971,7 @@
           <a:bodyPr wrap="square" rtlCol="0" anchor="ctr"/>
           <a:lstStyle/>
           <a:p>
-            <a:pPr algn="ctr" indent="0" marL="0">
+            <a:pPr marL="0" indent="0" algn="ctr">
               <a:buNone/>
             </a:pPr>
             <a:r>
@@ -26354,11 +26032,11 @@
           <a:bodyPr wrap="square" rtlCol="0" anchor="ctr"/>
           <a:lstStyle/>
           <a:p>
-            <a:pPr algn="ctr" indent="0" marL="0">
-              <a:buNone/>
-            </a:pPr>
-            <a:r>
-              <a:rPr lang="en-US" sz="1100" b="1" spc="50" kern="0" dirty="0">
+            <a:pPr marL="0" indent="0" algn="ctr">
+              <a:buNone/>
+            </a:pPr>
+            <a:r>
+              <a:rPr lang="en-US" sz="1100" b="1" kern="0" spc="50" dirty="0">
                 <a:solidFill>
                   <a:srgbClr val="292524"/>
                 </a:solidFill>
@@ -26416,7 +26094,7 @@
           <a:bodyPr wrap="square" rtlCol="0" anchor="t"/>
           <a:lstStyle/>
           <a:p>
-            <a:pPr algn="ctr" indent="0" marL="0">
+            <a:pPr marL="0" indent="0" algn="ctr">
               <a:lnSpc>
                 <a:spcPct val="150000"/>
               </a:lnSpc>
@@ -26453,6 +26131,7 @@
         <a:solidFill>
           <a:srgbClr val="F5F5F5"/>
         </a:solidFill>
+        <a:effectLst/>
       </p:bgPr>
     </p:bg>
     <p:spTree>
@@ -26512,7 +26191,7 @@
           <a:bodyPr wrap="square" rtlCol="0" anchor="ctr"/>
           <a:lstStyle/>
           <a:p>
-            <a:pPr algn="l" indent="0" marL="0">
+            <a:pPr marL="0" indent="0" algn="l">
               <a:buNone/>
             </a:pPr>
             <a:r>
@@ -26551,11 +26230,11 @@
           <a:bodyPr wrap="square" rtlCol="0" anchor="ctr"/>
           <a:lstStyle/>
           <a:p>
-            <a:pPr algn="r" indent="0" marL="0">
-              <a:buNone/>
-            </a:pPr>
-            <a:r>
-              <a:rPr lang="en-US" sz="900" b="1" spc="200" kern="0" dirty="0">
+            <a:pPr marL="0" indent="0" algn="r">
+              <a:buNone/>
+            </a:pPr>
+            <a:r>
+              <a:rPr lang="en-US" sz="900" b="1" kern="0" spc="200" dirty="0">
                 <a:solidFill>
                   <a:srgbClr val="777169"/>
                 </a:solidFill>
@@ -26590,11 +26269,11 @@
           <a:bodyPr wrap="square" rtlCol="0" anchor="ctr"/>
           <a:lstStyle/>
           <a:p>
-            <a:pPr algn="l" indent="0" marL="0">
-              <a:buNone/>
-            </a:pPr>
-            <a:r>
-              <a:rPr lang="en-US" sz="900" b="1" spc="300" kern="0" dirty="0">
+            <a:pPr marL="0" indent="0" algn="l">
+              <a:buNone/>
+            </a:pPr>
+            <a:r>
+              <a:rPr lang="en-US" sz="900" b="1" kern="0" spc="300" dirty="0">
                 <a:solidFill>
                   <a:srgbClr val="777169"/>
                 </a:solidFill>
@@ -26629,11 +26308,11 @@
           <a:bodyPr wrap="square" rtlCol="0" anchor="t"/>
           <a:lstStyle/>
           <a:p>
-            <a:pPr algn="l" indent="0" marL="0">
-              <a:buNone/>
-            </a:pPr>
-            <a:r>
-              <a:rPr lang="en-US" sz="2700" spc="-40" kern="0" dirty="0">
+            <a:pPr marL="0" indent="0" algn="l">
+              <a:buNone/>
+            </a:pPr>
+            <a:r>
+              <a:rPr lang="en-US" sz="2700" kern="0" spc="-40" dirty="0">
                 <a:solidFill>
                   <a:srgbClr val="0C0A09"/>
                 </a:solidFill>
@@ -26668,7 +26347,7 @@
           <a:bodyPr wrap="square" rtlCol="0" anchor="ctr"/>
           <a:lstStyle/>
           <a:p>
-            <a:pPr algn="l" indent="0" marL="0">
+            <a:pPr marL="0" indent="0" algn="l">
               <a:buNone/>
             </a:pPr>
             <a:r>
@@ -26730,7 +26409,7 @@
           <a:bodyPr wrap="square" rtlCol="0" anchor="ctr"/>
           <a:lstStyle/>
           <a:p>
-            <a:pPr algn="l" indent="0" marL="0">
+            <a:pPr marL="0" indent="0" algn="l">
               <a:buNone/>
             </a:pPr>
             <a:r>
@@ -26769,7 +26448,7 @@
           <a:bodyPr wrap="square" rtlCol="0" anchor="ctr"/>
           <a:lstStyle/>
           <a:p>
-            <a:pPr algn="r" indent="0" marL="0">
+            <a:pPr marL="0" indent="0" algn="r">
               <a:buNone/>
             </a:pPr>
             <a:r>
@@ -26813,7 +26492,7 @@
             <a:prstDash val="solid"/>
           </a:ln>
           <a:effectLst>
-            <a:outerShdw sx="100000" sy="100000" kx="0" ky="0" algn="bl" rotWithShape="0" blurRad="152400" dist="38100" dir="5400000">
+            <a:outerShdw blurRad="152400" dist="38100" dir="5400000" algn="bl" rotWithShape="0">
               <a:srgbClr val="000000">
                 <a:alpha val="6000"/>
               </a:srgbClr>
@@ -26864,7 +26543,7 @@
           <a:bodyPr wrap="square" rtlCol="0" anchor="ctr"/>
           <a:lstStyle/>
           <a:p>
-            <a:pPr algn="ctr" indent="0" marL="0">
+            <a:pPr marL="0" indent="0" algn="ctr">
               <a:buNone/>
             </a:pPr>
             <a:r>
@@ -26903,7 +26582,7 @@
           <a:bodyPr wrap="square" rtlCol="0" anchor="ctr"/>
           <a:lstStyle/>
           <a:p>
-            <a:pPr algn="ctr" indent="0" marL="0">
+            <a:pPr marL="0" indent="0" algn="ctr">
               <a:buNone/>
             </a:pPr>
             <a:r>
@@ -26964,11 +26643,11 @@
           <a:bodyPr wrap="square" rtlCol="0" anchor="ctr"/>
           <a:lstStyle/>
           <a:p>
-            <a:pPr algn="ctr" indent="0" marL="0">
-              <a:buNone/>
-            </a:pPr>
-            <a:r>
-              <a:rPr lang="en-US" sz="1100" b="1" spc="50" kern="0" dirty="0">
+            <a:pPr marL="0" indent="0" algn="ctr">
+              <a:buNone/>
+            </a:pPr>
+            <a:r>
+              <a:rPr lang="en-US" sz="1100" b="1" kern="0" spc="50" dirty="0">
                 <a:solidFill>
                   <a:srgbClr val="292524"/>
                 </a:solidFill>
@@ -27026,7 +26705,7 @@
           <a:bodyPr wrap="square" rtlCol="0" anchor="t"/>
           <a:lstStyle/>
           <a:p>
-            <a:pPr algn="ctr" indent="0" marL="0">
+            <a:pPr marL="0" indent="0" algn="ctr">
               <a:lnSpc>
                 <a:spcPct val="150000"/>
               </a:lnSpc>
@@ -27073,7 +26752,7 @@
             <a:prstDash val="solid"/>
           </a:ln>
           <a:effectLst>
-            <a:outerShdw sx="100000" sy="100000" kx="0" ky="0" algn="bl" rotWithShape="0" blurRad="152400" dist="38100" dir="5400000">
+            <a:outerShdw blurRad="152400" dist="38100" dir="5400000" algn="bl" rotWithShape="0">
               <a:srgbClr val="000000">
                 <a:alpha val="6000"/>
               </a:srgbClr>
@@ -27124,7 +26803,7 @@
           <a:bodyPr wrap="square" rtlCol="0" anchor="ctr"/>
           <a:lstStyle/>
           <a:p>
-            <a:pPr algn="ctr" indent="0" marL="0">
+            <a:pPr marL="0" indent="0" algn="ctr">
               <a:buNone/>
             </a:pPr>
             <a:r>
@@ -27163,7 +26842,7 @@
           <a:bodyPr wrap="square" rtlCol="0" anchor="ctr"/>
           <a:lstStyle/>
           <a:p>
-            <a:pPr algn="ctr" indent="0" marL="0">
+            <a:pPr marL="0" indent="0" algn="ctr">
               <a:buNone/>
             </a:pPr>
             <a:r>
@@ -27224,11 +26903,11 @@
           <a:bodyPr wrap="square" rtlCol="0" anchor="ctr"/>
           <a:lstStyle/>
           <a:p>
-            <a:pPr algn="ctr" indent="0" marL="0">
-              <a:buNone/>
-            </a:pPr>
-            <a:r>
-              <a:rPr lang="en-US" sz="1100" b="1" spc="50" kern="0" dirty="0">
+            <a:pPr marL="0" indent="0" algn="ctr">
+              <a:buNone/>
+            </a:pPr>
+            <a:r>
+              <a:rPr lang="en-US" sz="1100" b="1" kern="0" spc="50" dirty="0">
                 <a:solidFill>
                   <a:srgbClr val="292524"/>
                 </a:solidFill>
@@ -27286,7 +26965,7 @@
           <a:bodyPr wrap="square" rtlCol="0" anchor="t"/>
           <a:lstStyle/>
           <a:p>
-            <a:pPr algn="ctr" indent="0" marL="0">
+            <a:pPr marL="0" indent="0" algn="ctr">
               <a:lnSpc>
                 <a:spcPct val="150000"/>
               </a:lnSpc>
@@ -27333,7 +27012,7 @@
             <a:prstDash val="solid"/>
           </a:ln>
           <a:effectLst>
-            <a:outerShdw sx="100000" sy="100000" kx="0" ky="0" algn="bl" rotWithShape="0" blurRad="152400" dist="38100" dir="5400000">
+            <a:outerShdw blurRad="152400" dist="38100" dir="5400000" algn="bl" rotWithShape="0">
               <a:srgbClr val="000000">
                 <a:alpha val="6000"/>
               </a:srgbClr>
@@ -27384,7 +27063,7 @@
           <a:bodyPr wrap="square" rtlCol="0" anchor="ctr"/>
           <a:lstStyle/>
           <a:p>
-            <a:pPr algn="ctr" indent="0" marL="0">
+            <a:pPr marL="0" indent="0" algn="ctr">
               <a:buNone/>
             </a:pPr>
             <a:r>
@@ -27423,7 +27102,7 @@
           <a:bodyPr wrap="square" rtlCol="0" anchor="ctr"/>
           <a:lstStyle/>
           <a:p>
-            <a:pPr algn="ctr" indent="0" marL="0">
+            <a:pPr marL="0" indent="0" algn="ctr">
               <a:buNone/>
             </a:pPr>
             <a:r>
@@ -27484,11 +27163,11 @@
           <a:bodyPr wrap="square" rtlCol="0" anchor="ctr"/>
           <a:lstStyle/>
           <a:p>
-            <a:pPr algn="ctr" indent="0" marL="0">
-              <a:buNone/>
-            </a:pPr>
-            <a:r>
-              <a:rPr lang="en-US" sz="1100" b="1" spc="50" kern="0" dirty="0">
+            <a:pPr marL="0" indent="0" algn="ctr">
+              <a:buNone/>
+            </a:pPr>
+            <a:r>
+              <a:rPr lang="en-US" sz="1100" b="1" kern="0" spc="50" dirty="0">
                 <a:solidFill>
                   <a:srgbClr val="292524"/>
                 </a:solidFill>
@@ -27546,7 +27225,7 @@
           <a:bodyPr wrap="square" rtlCol="0" anchor="t"/>
           <a:lstStyle/>
           <a:p>
-            <a:pPr algn="ctr" indent="0" marL="0">
+            <a:pPr marL="0" indent="0" algn="ctr">
               <a:lnSpc>
                 <a:spcPct val="150000"/>
               </a:lnSpc>
@@ -27583,6 +27262,7 @@
         <a:solidFill>
           <a:srgbClr val="F5F5F5"/>
         </a:solidFill>
+        <a:effectLst/>
       </p:bgPr>
     </p:bg>
     <p:spTree>
@@ -27642,7 +27322,7 @@
           <a:bodyPr wrap="square" rtlCol="0" anchor="ctr"/>
           <a:lstStyle/>
           <a:p>
-            <a:pPr algn="l" indent="0" marL="0">
+            <a:pPr marL="0" indent="0" algn="l">
               <a:buNone/>
             </a:pPr>
             <a:r>
@@ -27681,11 +27361,11 @@
           <a:bodyPr wrap="square" rtlCol="0" anchor="ctr"/>
           <a:lstStyle/>
           <a:p>
-            <a:pPr algn="r" indent="0" marL="0">
-              <a:buNone/>
-            </a:pPr>
-            <a:r>
-              <a:rPr lang="en-US" sz="900" b="1" spc="200" kern="0" dirty="0">
+            <a:pPr marL="0" indent="0" algn="r">
+              <a:buNone/>
+            </a:pPr>
+            <a:r>
+              <a:rPr lang="en-US" sz="900" b="1" kern="0" spc="200" dirty="0">
                 <a:solidFill>
                   <a:srgbClr val="777169"/>
                 </a:solidFill>
@@ -27720,11 +27400,11 @@
           <a:bodyPr wrap="square" rtlCol="0" anchor="ctr"/>
           <a:lstStyle/>
           <a:p>
-            <a:pPr algn="l" indent="0" marL="0">
-              <a:buNone/>
-            </a:pPr>
-            <a:r>
-              <a:rPr lang="en-US" sz="900" b="1" spc="300" kern="0" dirty="0">
+            <a:pPr marL="0" indent="0" algn="l">
+              <a:buNone/>
+            </a:pPr>
+            <a:r>
+              <a:rPr lang="en-US" sz="900" b="1" kern="0" spc="300" dirty="0">
                 <a:solidFill>
                   <a:srgbClr val="777169"/>
                 </a:solidFill>
@@ -27759,11 +27439,11 @@
           <a:bodyPr wrap="square" rtlCol="0" anchor="t"/>
           <a:lstStyle/>
           <a:p>
-            <a:pPr algn="l" indent="0" marL="0">
-              <a:buNone/>
-            </a:pPr>
-            <a:r>
-              <a:rPr lang="en-US" sz="2700" spc="-40" kern="0" dirty="0">
+            <a:pPr marL="0" indent="0" algn="l">
+              <a:buNone/>
+            </a:pPr>
+            <a:r>
+              <a:rPr lang="en-US" sz="2700" kern="0" spc="-40" dirty="0">
                 <a:solidFill>
                   <a:srgbClr val="0C0A09"/>
                 </a:solidFill>
@@ -27798,7 +27478,7 @@
           <a:bodyPr wrap="square" rtlCol="0" anchor="ctr"/>
           <a:lstStyle/>
           <a:p>
-            <a:pPr algn="l" indent="0" marL="0">
+            <a:pPr marL="0" indent="0" algn="l">
               <a:buNone/>
             </a:pPr>
             <a:r>
@@ -27860,7 +27540,7 @@
           <a:bodyPr wrap="square" rtlCol="0" anchor="ctr"/>
           <a:lstStyle/>
           <a:p>
-            <a:pPr algn="l" indent="0" marL="0">
+            <a:pPr marL="0" indent="0" algn="l">
               <a:buNone/>
             </a:pPr>
             <a:r>
@@ -27899,7 +27579,7 @@
           <a:bodyPr wrap="square" rtlCol="0" anchor="ctr"/>
           <a:lstStyle/>
           <a:p>
-            <a:pPr algn="r" indent="0" marL="0">
+            <a:pPr marL="0" indent="0" algn="r">
               <a:buNone/>
             </a:pPr>
             <a:r>
@@ -27943,7 +27623,7 @@
             <a:prstDash val="solid"/>
           </a:ln>
           <a:effectLst>
-            <a:outerShdw sx="100000" sy="100000" kx="0" ky="0" algn="bl" rotWithShape="0" blurRad="152400" dist="38100" dir="5400000">
+            <a:outerShdw blurRad="152400" dist="38100" dir="5400000" algn="bl" rotWithShape="0">
               <a:srgbClr val="000000">
                 <a:alpha val="6000"/>
               </a:srgbClr>
@@ -27994,7 +27674,7 @@
           <a:bodyPr wrap="square" rtlCol="0" anchor="ctr"/>
           <a:lstStyle/>
           <a:p>
-            <a:pPr algn="ctr" indent="0" marL="0">
+            <a:pPr marL="0" indent="0" algn="ctr">
               <a:buNone/>
             </a:pPr>
             <a:r>
@@ -28033,7 +27713,7 @@
           <a:bodyPr wrap="square" rtlCol="0" anchor="ctr"/>
           <a:lstStyle/>
           <a:p>
-            <a:pPr algn="ctr" indent="0" marL="0">
+            <a:pPr marL="0" indent="0" algn="ctr">
               <a:buNone/>
             </a:pPr>
             <a:r>
@@ -28094,11 +27774,11 @@
           <a:bodyPr wrap="square" rtlCol="0" anchor="ctr"/>
           <a:lstStyle/>
           <a:p>
-            <a:pPr algn="ctr" indent="0" marL="0">
-              <a:buNone/>
-            </a:pPr>
-            <a:r>
-              <a:rPr lang="en-US" sz="1100" b="1" spc="50" kern="0" dirty="0">
+            <a:pPr marL="0" indent="0" algn="ctr">
+              <a:buNone/>
+            </a:pPr>
+            <a:r>
+              <a:rPr lang="en-US" sz="1100" b="1" kern="0" spc="50" dirty="0">
                 <a:solidFill>
                   <a:srgbClr val="292524"/>
                 </a:solidFill>
@@ -28156,7 +27836,7 @@
           <a:bodyPr wrap="square" rtlCol="0" anchor="t"/>
           <a:lstStyle/>
           <a:p>
-            <a:pPr algn="ctr" indent="0" marL="0">
+            <a:pPr marL="0" indent="0" algn="ctr">
               <a:lnSpc>
                 <a:spcPct val="150000"/>
               </a:lnSpc>
@@ -28203,7 +27883,7 @@
             <a:prstDash val="solid"/>
           </a:ln>
           <a:effectLst>
-            <a:outerShdw sx="100000" sy="100000" kx="0" ky="0" algn="bl" rotWithShape="0" blurRad="152400" dist="38100" dir="5400000">
+            <a:outerShdw blurRad="152400" dist="38100" dir="5400000" algn="bl" rotWithShape="0">
               <a:srgbClr val="000000">
                 <a:alpha val="6000"/>
               </a:srgbClr>
@@ -28254,7 +27934,7 @@
           <a:bodyPr wrap="square" rtlCol="0" anchor="ctr"/>
           <a:lstStyle/>
           <a:p>
-            <a:pPr algn="ctr" indent="0" marL="0">
+            <a:pPr marL="0" indent="0" algn="ctr">
               <a:buNone/>
             </a:pPr>
             <a:r>
@@ -28293,7 +27973,7 @@
           <a:bodyPr wrap="square" rtlCol="0" anchor="ctr"/>
           <a:lstStyle/>
           <a:p>
-            <a:pPr algn="ctr" indent="0" marL="0">
+            <a:pPr marL="0" indent="0" algn="ctr">
               <a:buNone/>
             </a:pPr>
             <a:r>
@@ -28354,11 +28034,11 @@
           <a:bodyPr wrap="square" rtlCol="0" anchor="ctr"/>
           <a:lstStyle/>
           <a:p>
-            <a:pPr algn="ctr" indent="0" marL="0">
-              <a:buNone/>
-            </a:pPr>
-            <a:r>
-              <a:rPr lang="en-US" sz="1100" b="1" spc="50" kern="0" dirty="0">
+            <a:pPr marL="0" indent="0" algn="ctr">
+              <a:buNone/>
+            </a:pPr>
+            <a:r>
+              <a:rPr lang="en-US" sz="1100" b="1" kern="0" spc="50" dirty="0">
                 <a:solidFill>
                   <a:srgbClr val="292524"/>
                 </a:solidFill>
@@ -28416,7 +28096,7 @@
           <a:bodyPr wrap="square" rtlCol="0" anchor="t"/>
           <a:lstStyle/>
           <a:p>
-            <a:pPr algn="ctr" indent="0" marL="0">
+            <a:pPr marL="0" indent="0" algn="ctr">
               <a:lnSpc>
                 <a:spcPct val="150000"/>
               </a:lnSpc>
@@ -28463,7 +28143,7 @@
             <a:prstDash val="solid"/>
           </a:ln>
           <a:effectLst>
-            <a:outerShdw sx="100000" sy="100000" kx="0" ky="0" algn="bl" rotWithShape="0" blurRad="152400" dist="38100" dir="5400000">
+            <a:outerShdw blurRad="152400" dist="38100" dir="5400000" algn="bl" rotWithShape="0">
               <a:srgbClr val="000000">
                 <a:alpha val="6000"/>
               </a:srgbClr>
@@ -28514,7 +28194,7 @@
           <a:bodyPr wrap="square" rtlCol="0" anchor="ctr"/>
           <a:lstStyle/>
           <a:p>
-            <a:pPr algn="ctr" indent="0" marL="0">
+            <a:pPr marL="0" indent="0" algn="ctr">
               <a:buNone/>
             </a:pPr>
             <a:r>
@@ -28553,7 +28233,7 @@
           <a:bodyPr wrap="square" rtlCol="0" anchor="ctr"/>
           <a:lstStyle/>
           <a:p>
-            <a:pPr algn="ctr" indent="0" marL="0">
+            <a:pPr marL="0" indent="0" algn="ctr">
               <a:buNone/>
             </a:pPr>
             <a:r>
@@ -28614,11 +28294,11 @@
           <a:bodyPr wrap="square" rtlCol="0" anchor="ctr"/>
           <a:lstStyle/>
           <a:p>
-            <a:pPr algn="ctr" indent="0" marL="0">
-              <a:buNone/>
-            </a:pPr>
-            <a:r>
-              <a:rPr lang="en-US" sz="1100" b="1" spc="50" kern="0" dirty="0">
+            <a:pPr marL="0" indent="0" algn="ctr">
+              <a:buNone/>
+            </a:pPr>
+            <a:r>
+              <a:rPr lang="en-US" sz="1100" b="1" kern="0" spc="50" dirty="0">
                 <a:solidFill>
                   <a:srgbClr val="292524"/>
                 </a:solidFill>
@@ -28676,7 +28356,7 @@
           <a:bodyPr wrap="square" rtlCol="0" anchor="t"/>
           <a:lstStyle/>
           <a:p>
-            <a:pPr algn="ctr" indent="0" marL="0">
+            <a:pPr marL="0" indent="0" algn="ctr">
               <a:lnSpc>
                 <a:spcPct val="150000"/>
               </a:lnSpc>
@@ -28713,6 +28393,7 @@
         <a:solidFill>
           <a:srgbClr val="F5F5F5"/>
         </a:solidFill>
+        <a:effectLst/>
       </p:bgPr>
     </p:bg>
     <p:spTree>
@@ -28772,7 +28453,7 @@
           <a:bodyPr wrap="square" rtlCol="0" anchor="ctr"/>
           <a:lstStyle/>
           <a:p>
-            <a:pPr algn="l" indent="0" marL="0">
+            <a:pPr marL="0" indent="0" algn="l">
               <a:buNone/>
             </a:pPr>
             <a:r>
@@ -28811,11 +28492,11 @@
           <a:bodyPr wrap="square" rtlCol="0" anchor="ctr"/>
           <a:lstStyle/>
           <a:p>
-            <a:pPr algn="r" indent="0" marL="0">
-              <a:buNone/>
-            </a:pPr>
-            <a:r>
-              <a:rPr lang="en-US" sz="900" b="1" spc="200" kern="0" dirty="0">
+            <a:pPr marL="0" indent="0" algn="r">
+              <a:buNone/>
+            </a:pPr>
+            <a:r>
+              <a:rPr lang="en-US" sz="900" b="1" kern="0" spc="200" dirty="0">
                 <a:solidFill>
                   <a:srgbClr val="777169"/>
                 </a:solidFill>
@@ -28850,11 +28531,11 @@
           <a:bodyPr wrap="square" rtlCol="0" anchor="ctr"/>
           <a:lstStyle/>
           <a:p>
-            <a:pPr algn="l" indent="0" marL="0">
-              <a:buNone/>
-            </a:pPr>
-            <a:r>
-              <a:rPr lang="en-US" sz="900" b="1" spc="300" kern="0" dirty="0">
+            <a:pPr marL="0" indent="0" algn="l">
+              <a:buNone/>
+            </a:pPr>
+            <a:r>
+              <a:rPr lang="en-US" sz="900" b="1" kern="0" spc="300" dirty="0">
                 <a:solidFill>
                   <a:srgbClr val="777169"/>
                 </a:solidFill>
@@ -28889,11 +28570,11 @@
           <a:bodyPr wrap="square" rtlCol="0" anchor="t"/>
           <a:lstStyle/>
           <a:p>
-            <a:pPr algn="l" indent="0" marL="0">
-              <a:buNone/>
-            </a:pPr>
-            <a:r>
-              <a:rPr lang="en-US" sz="2700" spc="-40" kern="0" dirty="0">
+            <a:pPr marL="0" indent="0" algn="l">
+              <a:buNone/>
+            </a:pPr>
+            <a:r>
+              <a:rPr lang="en-US" sz="2700" kern="0" spc="-40" dirty="0">
                 <a:solidFill>
                   <a:srgbClr val="0C0A09"/>
                 </a:solidFill>
@@ -28928,7 +28609,7 @@
           <a:bodyPr wrap="square" rtlCol="0" anchor="ctr"/>
           <a:lstStyle/>
           <a:p>
-            <a:pPr algn="l" indent="0" marL="0">
+            <a:pPr marL="0" indent="0" algn="l">
               <a:buNone/>
             </a:pPr>
             <a:r>
@@ -28990,7 +28671,7 @@
           <a:bodyPr wrap="square" rtlCol="0" anchor="ctr"/>
           <a:lstStyle/>
           <a:p>
-            <a:pPr algn="l" indent="0" marL="0">
+            <a:pPr marL="0" indent="0" algn="l">
               <a:buNone/>
             </a:pPr>
             <a:r>
@@ -29029,7 +28710,7 @@
           <a:bodyPr wrap="square" rtlCol="0" anchor="ctr"/>
           <a:lstStyle/>
           <a:p>
-            <a:pPr algn="r" indent="0" marL="0">
+            <a:pPr marL="0" indent="0" algn="r">
               <a:buNone/>
             </a:pPr>
             <a:r>
@@ -29073,7 +28754,7 @@
             <a:prstDash val="solid"/>
           </a:ln>
           <a:effectLst>
-            <a:outerShdw sx="100000" sy="100000" kx="0" ky="0" algn="bl" rotWithShape="0" blurRad="152400" dist="38100" dir="5400000">
+            <a:outerShdw blurRad="152400" dist="38100" dir="5400000" algn="bl" rotWithShape="0">
               <a:srgbClr val="000000">
                 <a:alpha val="6000"/>
               </a:srgbClr>
@@ -29122,7 +28803,7 @@
           <a:bodyPr wrap="square" rtlCol="0" anchor="ctr"/>
           <a:lstStyle/>
           <a:p>
-            <a:pPr algn="ctr" indent="0" marL="0">
+            <a:pPr marL="0" indent="0" algn="ctr">
               <a:buNone/>
             </a:pPr>
             <a:r>
@@ -29158,7 +28839,7 @@
           <a:bodyPr wrap="square" rtlCol="0" anchor="ctr"/>
           <a:lstStyle/>
           <a:p>
-            <a:pPr algn="l" indent="0" marL="0">
+            <a:pPr marL="0" indent="0" algn="l">
               <a:buNone/>
             </a:pPr>
             <a:r>
@@ -29197,7 +28878,7 @@
           <a:bodyPr wrap="square" rtlCol="0" anchor="t"/>
           <a:lstStyle/>
           <a:p>
-            <a:pPr algn="l" indent="0" marL="0">
+            <a:pPr marL="0" indent="0" algn="l">
               <a:lnSpc>
                 <a:spcPct val="135000"/>
               </a:lnSpc>
@@ -29244,7 +28925,7 @@
             <a:prstDash val="solid"/>
           </a:ln>
           <a:effectLst>
-            <a:outerShdw sx="100000" sy="100000" kx="0" ky="0" algn="bl" rotWithShape="0" blurRad="152400" dist="38100" dir="5400000">
+            <a:outerShdw blurRad="152400" dist="38100" dir="5400000" algn="bl" rotWithShape="0">
               <a:srgbClr val="000000">
                 <a:alpha val="6000"/>
               </a:srgbClr>
@@ -29293,7 +28974,7 @@
           <a:bodyPr wrap="square" rtlCol="0" anchor="ctr"/>
           <a:lstStyle/>
           <a:p>
-            <a:pPr algn="ctr" indent="0" marL="0">
+            <a:pPr marL="0" indent="0" algn="ctr">
               <a:buNone/>
             </a:pPr>
             <a:r>
@@ -29329,7 +29010,7 @@
           <a:bodyPr wrap="square" rtlCol="0" anchor="ctr"/>
           <a:lstStyle/>
           <a:p>
-            <a:pPr algn="l" indent="0" marL="0">
+            <a:pPr marL="0" indent="0" algn="l">
               <a:buNone/>
             </a:pPr>
             <a:r>
@@ -29368,7 +29049,7 @@
           <a:bodyPr wrap="square" rtlCol="0" anchor="t"/>
           <a:lstStyle/>
           <a:p>
-            <a:pPr algn="l" indent="0" marL="0">
+            <a:pPr marL="0" indent="0" algn="l">
               <a:lnSpc>
                 <a:spcPct val="135000"/>
               </a:lnSpc>
@@ -29415,7 +29096,7 @@
             <a:prstDash val="solid"/>
           </a:ln>
           <a:effectLst>
-            <a:outerShdw sx="100000" sy="100000" kx="0" ky="0" algn="bl" rotWithShape="0" blurRad="152400" dist="38100" dir="5400000">
+            <a:outerShdw blurRad="152400" dist="38100" dir="5400000" algn="bl" rotWithShape="0">
               <a:srgbClr val="000000">
                 <a:alpha val="6000"/>
               </a:srgbClr>
@@ -29464,7 +29145,7 @@
           <a:bodyPr wrap="square" rtlCol="0" anchor="ctr"/>
           <a:lstStyle/>
           <a:p>
-            <a:pPr algn="ctr" indent="0" marL="0">
+            <a:pPr marL="0" indent="0" algn="ctr">
               <a:buNone/>
             </a:pPr>
             <a:r>
@@ -29500,7 +29181,7 @@
           <a:bodyPr wrap="square" rtlCol="0" anchor="ctr"/>
           <a:lstStyle/>
           <a:p>
-            <a:pPr algn="l" indent="0" marL="0">
+            <a:pPr marL="0" indent="0" algn="l">
               <a:buNone/>
             </a:pPr>
             <a:r>
@@ -29539,7 +29220,7 @@
           <a:bodyPr wrap="square" rtlCol="0" anchor="t"/>
           <a:lstStyle/>
           <a:p>
-            <a:pPr algn="l" indent="0" marL="0">
+            <a:pPr marL="0" indent="0" algn="l">
               <a:lnSpc>
                 <a:spcPct val="135000"/>
               </a:lnSpc>
@@ -29586,7 +29267,7 @@
             <a:prstDash val="solid"/>
           </a:ln>
           <a:effectLst>
-            <a:outerShdw sx="100000" sy="100000" kx="0" ky="0" algn="bl" rotWithShape="0" blurRad="152400" dist="38100" dir="5400000">
+            <a:outerShdw blurRad="152400" dist="38100" dir="5400000" algn="bl" rotWithShape="0">
               <a:srgbClr val="000000">
                 <a:alpha val="6000"/>
               </a:srgbClr>
@@ -29635,7 +29316,7 @@
           <a:bodyPr wrap="square" rtlCol="0" anchor="ctr"/>
           <a:lstStyle/>
           <a:p>
-            <a:pPr algn="ctr" indent="0" marL="0">
+            <a:pPr marL="0" indent="0" algn="ctr">
               <a:buNone/>
             </a:pPr>
             <a:r>
@@ -29671,7 +29352,7 @@
           <a:bodyPr wrap="square" rtlCol="0" anchor="ctr"/>
           <a:lstStyle/>
           <a:p>
-            <a:pPr algn="l" indent="0" marL="0">
+            <a:pPr marL="0" indent="0" algn="l">
               <a:buNone/>
             </a:pPr>
             <a:r>
@@ -29710,7 +29391,7 @@
           <a:bodyPr wrap="square" rtlCol="0" anchor="t"/>
           <a:lstStyle/>
           <a:p>
-            <a:pPr algn="l" indent="0" marL="0">
+            <a:pPr marL="0" indent="0" algn="l">
               <a:lnSpc>
                 <a:spcPct val="135000"/>
               </a:lnSpc>
@@ -29747,6 +29428,7 @@
         <a:solidFill>
           <a:srgbClr val="F5F5F5"/>
         </a:solidFill>
+        <a:effectLst/>
       </p:bgPr>
     </p:bg>
     <p:spTree>
@@ -29806,7 +29488,7 @@
           <a:bodyPr wrap="square" rtlCol="0" anchor="ctr"/>
           <a:lstStyle/>
           <a:p>
-            <a:pPr algn="l" indent="0" marL="0">
+            <a:pPr marL="0" indent="0" algn="l">
               <a:buNone/>
             </a:pPr>
             <a:r>
@@ -29845,11 +29527,11 @@
           <a:bodyPr wrap="square" rtlCol="0" anchor="ctr"/>
           <a:lstStyle/>
           <a:p>
-            <a:pPr algn="r" indent="0" marL="0">
-              <a:buNone/>
-            </a:pPr>
-            <a:r>
-              <a:rPr lang="en-US" sz="900" b="1" spc="200" kern="0" dirty="0">
+            <a:pPr marL="0" indent="0" algn="r">
+              <a:buNone/>
+            </a:pPr>
+            <a:r>
+              <a:rPr lang="en-US" sz="900" b="1" kern="0" spc="200" dirty="0">
                 <a:solidFill>
                   <a:srgbClr val="777169"/>
                 </a:solidFill>
@@ -29884,11 +29566,11 @@
           <a:bodyPr wrap="square" rtlCol="0" anchor="ctr"/>
           <a:lstStyle/>
           <a:p>
-            <a:pPr algn="l" indent="0" marL="0">
-              <a:buNone/>
-            </a:pPr>
-            <a:r>
-              <a:rPr lang="en-US" sz="900" b="1" spc="300" kern="0" dirty="0">
+            <a:pPr marL="0" indent="0" algn="l">
+              <a:buNone/>
+            </a:pPr>
+            <a:r>
+              <a:rPr lang="en-US" sz="900" b="1" kern="0" spc="300" dirty="0">
                 <a:solidFill>
                   <a:srgbClr val="777169"/>
                 </a:solidFill>
@@ -29923,11 +29605,11 @@
           <a:bodyPr wrap="square" rtlCol="0" anchor="t"/>
           <a:lstStyle/>
           <a:p>
-            <a:pPr algn="l" indent="0" marL="0">
-              <a:buNone/>
-            </a:pPr>
-            <a:r>
-              <a:rPr lang="en-US" sz="2700" spc="-40" kern="0" dirty="0">
+            <a:pPr marL="0" indent="0" algn="l">
+              <a:buNone/>
+            </a:pPr>
+            <a:r>
+              <a:rPr lang="en-US" sz="2700" kern="0" spc="-40" dirty="0">
                 <a:solidFill>
                   <a:srgbClr val="0C0A09"/>
                 </a:solidFill>
@@ -29962,7 +29644,7 @@
           <a:bodyPr wrap="square" rtlCol="0" anchor="ctr"/>
           <a:lstStyle/>
           <a:p>
-            <a:pPr algn="l" indent="0" marL="0">
+            <a:pPr marL="0" indent="0" algn="l">
               <a:buNone/>
             </a:pPr>
             <a:r>
@@ -30024,7 +29706,7 @@
           <a:bodyPr wrap="square" rtlCol="0" anchor="ctr"/>
           <a:lstStyle/>
           <a:p>
-            <a:pPr algn="l" indent="0" marL="0">
+            <a:pPr marL="0" indent="0" algn="l">
               <a:buNone/>
             </a:pPr>
             <a:r>
@@ -30063,7 +29745,7 @@
           <a:bodyPr wrap="square" rtlCol="0" anchor="ctr"/>
           <a:lstStyle/>
           <a:p>
-            <a:pPr algn="r" indent="0" marL="0">
+            <a:pPr marL="0" indent="0" algn="r">
               <a:buNone/>
             </a:pPr>
             <a:r>
@@ -30107,7 +29789,7 @@
             <a:prstDash val="solid"/>
           </a:ln>
           <a:effectLst>
-            <a:outerShdw sx="100000" sy="100000" kx="0" ky="0" algn="bl" rotWithShape="0" blurRad="152400" dist="38100" dir="5400000">
+            <a:outerShdw blurRad="152400" dist="38100" dir="5400000" algn="bl" rotWithShape="0">
               <a:srgbClr val="000000">
                 <a:alpha val="6000"/>
               </a:srgbClr>
@@ -30158,7 +29840,7 @@
           <a:bodyPr wrap="square" rtlCol="0" anchor="ctr"/>
           <a:lstStyle/>
           <a:p>
-            <a:pPr algn="ctr" indent="0" marL="0">
+            <a:pPr marL="0" indent="0" algn="ctr">
               <a:buNone/>
             </a:pPr>
             <a:r>
@@ -30197,7 +29879,7 @@
           <a:bodyPr wrap="square" rtlCol="0" anchor="ctr"/>
           <a:lstStyle/>
           <a:p>
-            <a:pPr algn="ctr" indent="0" marL="0">
+            <a:pPr marL="0" indent="0" algn="ctr">
               <a:buNone/>
             </a:pPr>
             <a:r>
@@ -30258,11 +29940,11 @@
           <a:bodyPr wrap="square" rtlCol="0" anchor="ctr"/>
           <a:lstStyle/>
           <a:p>
-            <a:pPr algn="ctr" indent="0" marL="0">
-              <a:buNone/>
-            </a:pPr>
-            <a:r>
-              <a:rPr lang="en-US" sz="1100" b="1" spc="50" kern="0" dirty="0">
+            <a:pPr marL="0" indent="0" algn="ctr">
+              <a:buNone/>
+            </a:pPr>
+            <a:r>
+              <a:rPr lang="en-US" sz="1100" b="1" kern="0" spc="50" dirty="0">
                 <a:solidFill>
                   <a:srgbClr val="292524"/>
                 </a:solidFill>
@@ -30320,7 +30002,7 @@
           <a:bodyPr wrap="square" rtlCol="0" anchor="t"/>
           <a:lstStyle/>
           <a:p>
-            <a:pPr algn="ctr" indent="0" marL="0">
+            <a:pPr marL="0" indent="0" algn="ctr">
               <a:lnSpc>
                 <a:spcPct val="150000"/>
               </a:lnSpc>
@@ -30367,7 +30049,7 @@
             <a:prstDash val="solid"/>
           </a:ln>
           <a:effectLst>
-            <a:outerShdw sx="100000" sy="100000" kx="0" ky="0" algn="bl" rotWithShape="0" blurRad="152400" dist="38100" dir="5400000">
+            <a:outerShdw blurRad="152400" dist="38100" dir="5400000" algn="bl" rotWithShape="0">
               <a:srgbClr val="000000">
                 <a:alpha val="6000"/>
               </a:srgbClr>
@@ -30418,7 +30100,7 @@
           <a:bodyPr wrap="square" rtlCol="0" anchor="ctr"/>
           <a:lstStyle/>
           <a:p>
-            <a:pPr algn="ctr" indent="0" marL="0">
+            <a:pPr marL="0" indent="0" algn="ctr">
               <a:buNone/>
             </a:pPr>
             <a:r>
@@ -30457,7 +30139,7 @@
           <a:bodyPr wrap="square" rtlCol="0" anchor="ctr"/>
           <a:lstStyle/>
           <a:p>
-            <a:pPr algn="ctr" indent="0" marL="0">
+            <a:pPr marL="0" indent="0" algn="ctr">
               <a:buNone/>
             </a:pPr>
             <a:r>
@@ -30518,11 +30200,11 @@
           <a:bodyPr wrap="square" rtlCol="0" anchor="ctr"/>
           <a:lstStyle/>
           <a:p>
-            <a:pPr algn="ctr" indent="0" marL="0">
-              <a:buNone/>
-            </a:pPr>
-            <a:r>
-              <a:rPr lang="en-US" sz="1100" b="1" spc="50" kern="0" dirty="0">
+            <a:pPr marL="0" indent="0" algn="ctr">
+              <a:buNone/>
+            </a:pPr>
+            <a:r>
+              <a:rPr lang="en-US" sz="1100" b="1" kern="0" spc="50" dirty="0">
                 <a:solidFill>
                   <a:srgbClr val="292524"/>
                 </a:solidFill>
@@ -30580,7 +30262,7 @@
           <a:bodyPr wrap="square" rtlCol="0" anchor="t"/>
           <a:lstStyle/>
           <a:p>
-            <a:pPr algn="ctr" indent="0" marL="0">
+            <a:pPr marL="0" indent="0" algn="ctr">
               <a:lnSpc>
                 <a:spcPct val="150000"/>
               </a:lnSpc>
@@ -30627,7 +30309,7 @@
             <a:prstDash val="solid"/>
           </a:ln>
           <a:effectLst>
-            <a:outerShdw sx="100000" sy="100000" kx="0" ky="0" algn="bl" rotWithShape="0" blurRad="152400" dist="38100" dir="5400000">
+            <a:outerShdw blurRad="152400" dist="38100" dir="5400000" algn="bl" rotWithShape="0">
               <a:srgbClr val="000000">
                 <a:alpha val="6000"/>
               </a:srgbClr>
@@ -30678,7 +30360,7 @@
           <a:bodyPr wrap="square" rtlCol="0" anchor="ctr"/>
           <a:lstStyle/>
           <a:p>
-            <a:pPr algn="ctr" indent="0" marL="0">
+            <a:pPr marL="0" indent="0" algn="ctr">
               <a:buNone/>
             </a:pPr>
             <a:r>
@@ -30717,7 +30399,7 @@
           <a:bodyPr wrap="square" rtlCol="0" anchor="ctr"/>
           <a:lstStyle/>
           <a:p>
-            <a:pPr algn="ctr" indent="0" marL="0">
+            <a:pPr marL="0" indent="0" algn="ctr">
               <a:buNone/>
             </a:pPr>
             <a:r>
@@ -30778,11 +30460,11 @@
           <a:bodyPr wrap="square" rtlCol="0" anchor="ctr"/>
           <a:lstStyle/>
           <a:p>
-            <a:pPr algn="ctr" indent="0" marL="0">
-              <a:buNone/>
-            </a:pPr>
-            <a:r>
-              <a:rPr lang="en-US" sz="1100" b="1" spc="50" kern="0" dirty="0">
+            <a:pPr marL="0" indent="0" algn="ctr">
+              <a:buNone/>
+            </a:pPr>
+            <a:r>
+              <a:rPr lang="en-US" sz="1100" b="1" kern="0" spc="50" dirty="0">
                 <a:solidFill>
                   <a:srgbClr val="292524"/>
                 </a:solidFill>
@@ -30840,7 +30522,7 @@
           <a:bodyPr wrap="square" rtlCol="0" anchor="t"/>
           <a:lstStyle/>
           <a:p>
-            <a:pPr algn="ctr" indent="0" marL="0">
+            <a:pPr marL="0" indent="0" algn="ctr">
               <a:lnSpc>
                 <a:spcPct val="150000"/>
               </a:lnSpc>
@@ -30877,6 +30559,7 @@
         <a:solidFill>
           <a:srgbClr val="F5F5F5"/>
         </a:solidFill>
+        <a:effectLst/>
       </p:bgPr>
     </p:bg>
     <p:spTree>
@@ -30936,7 +30619,7 @@
           <a:bodyPr wrap="square" rtlCol="0" anchor="ctr"/>
           <a:lstStyle/>
           <a:p>
-            <a:pPr algn="l" indent="0" marL="0">
+            <a:pPr marL="0" indent="0" algn="l">
               <a:buNone/>
             </a:pPr>
             <a:r>
@@ -30975,11 +30658,11 @@
           <a:bodyPr wrap="square" rtlCol="0" anchor="ctr"/>
           <a:lstStyle/>
           <a:p>
-            <a:pPr algn="r" indent="0" marL="0">
-              <a:buNone/>
-            </a:pPr>
-            <a:r>
-              <a:rPr lang="en-US" sz="900" b="1" spc="200" kern="0" dirty="0">
+            <a:pPr marL="0" indent="0" algn="r">
+              <a:buNone/>
+            </a:pPr>
+            <a:r>
+              <a:rPr lang="en-US" sz="900" b="1" kern="0" spc="200" dirty="0">
                 <a:solidFill>
                   <a:srgbClr val="777169"/>
                 </a:solidFill>
@@ -31014,11 +30697,11 @@
           <a:bodyPr wrap="square" rtlCol="0" anchor="ctr"/>
           <a:lstStyle/>
           <a:p>
-            <a:pPr algn="l" indent="0" marL="0">
-              <a:buNone/>
-            </a:pPr>
-            <a:r>
-              <a:rPr lang="en-US" sz="900" b="1" spc="300" kern="0" dirty="0">
+            <a:pPr marL="0" indent="0" algn="l">
+              <a:buNone/>
+            </a:pPr>
+            <a:r>
+              <a:rPr lang="en-US" sz="900" b="1" kern="0" spc="300" dirty="0">
                 <a:solidFill>
                   <a:srgbClr val="777169"/>
                 </a:solidFill>
@@ -31053,11 +30736,11 @@
           <a:bodyPr wrap="square" rtlCol="0" anchor="t"/>
           <a:lstStyle/>
           <a:p>
-            <a:pPr algn="l" indent="0" marL="0">
-              <a:buNone/>
-            </a:pPr>
-            <a:r>
-              <a:rPr lang="en-US" sz="2700" spc="-40" kern="0" dirty="0">
+            <a:pPr marL="0" indent="0" algn="l">
+              <a:buNone/>
+            </a:pPr>
+            <a:r>
+              <a:rPr lang="en-US" sz="2700" kern="0" spc="-40" dirty="0">
                 <a:solidFill>
                   <a:srgbClr val="0C0A09"/>
                 </a:solidFill>
@@ -31092,7 +30775,7 @@
           <a:bodyPr wrap="square" rtlCol="0" anchor="ctr"/>
           <a:lstStyle/>
           <a:p>
-            <a:pPr algn="l" indent="0" marL="0">
+            <a:pPr marL="0" indent="0" algn="l">
               <a:buNone/>
             </a:pPr>
             <a:r>
@@ -31154,7 +30837,7 @@
           <a:bodyPr wrap="square" rtlCol="0" anchor="ctr"/>
           <a:lstStyle/>
           <a:p>
-            <a:pPr algn="l" indent="0" marL="0">
+            <a:pPr marL="0" indent="0" algn="l">
               <a:buNone/>
             </a:pPr>
             <a:r>
@@ -31193,7 +30876,7 @@
           <a:bodyPr wrap="square" rtlCol="0" anchor="ctr"/>
           <a:lstStyle/>
           <a:p>
-            <a:pPr algn="r" indent="0" marL="0">
+            <a:pPr marL="0" indent="0" algn="r">
               <a:buNone/>
             </a:pPr>
             <a:r>
@@ -31237,7 +30920,7 @@
             <a:prstDash val="solid"/>
           </a:ln>
           <a:effectLst>
-            <a:outerShdw sx="100000" sy="100000" kx="0" ky="0" algn="bl" rotWithShape="0" blurRad="152400" dist="38100" dir="5400000">
+            <a:outerShdw blurRad="152400" dist="38100" dir="5400000" algn="bl" rotWithShape="0">
               <a:srgbClr val="000000">
                 <a:alpha val="6000"/>
               </a:srgbClr>
@@ -31286,7 +30969,7 @@
           <a:bodyPr wrap="square" rtlCol="0" anchor="ctr"/>
           <a:lstStyle/>
           <a:p>
-            <a:pPr algn="ctr" indent="0" marL="0">
+            <a:pPr marL="0" indent="0" algn="ctr">
               <a:buNone/>
             </a:pPr>
             <a:r>
@@ -31322,7 +31005,7 @@
           <a:bodyPr wrap="square" rtlCol="0" anchor="ctr"/>
           <a:lstStyle/>
           <a:p>
-            <a:pPr indent="0" marL="0">
+            <a:pPr marL="0" indent="0">
               <a:buNone/>
             </a:pPr>
             <a:r>
@@ -31361,7 +31044,7 @@
           <a:bodyPr wrap="square" rtlCol="0" anchor="t"/>
           <a:lstStyle/>
           <a:p>
-            <a:pPr indent="0" marL="0">
+            <a:pPr marL="0" indent="0">
               <a:lnSpc>
                 <a:spcPct val="140000"/>
               </a:lnSpc>
@@ -31408,7 +31091,7 @@
             <a:prstDash val="solid"/>
           </a:ln>
           <a:effectLst>
-            <a:outerShdw sx="100000" sy="100000" kx="0" ky="0" algn="bl" rotWithShape="0" blurRad="152400" dist="38100" dir="5400000">
+            <a:outerShdw blurRad="152400" dist="38100" dir="5400000" algn="bl" rotWithShape="0">
               <a:srgbClr val="000000">
                 <a:alpha val="6000"/>
               </a:srgbClr>
@@ -31457,7 +31140,7 @@
           <a:bodyPr wrap="square" rtlCol="0" anchor="ctr"/>
           <a:lstStyle/>
           <a:p>
-            <a:pPr algn="ctr" indent="0" marL="0">
+            <a:pPr marL="0" indent="0" algn="ctr">
               <a:buNone/>
             </a:pPr>
             <a:r>
@@ -31493,7 +31176,7 @@
           <a:bodyPr wrap="square" rtlCol="0" anchor="ctr"/>
           <a:lstStyle/>
           <a:p>
-            <a:pPr indent="0" marL="0">
+            <a:pPr marL="0" indent="0">
               <a:buNone/>
             </a:pPr>
             <a:r>
@@ -31532,7 +31215,7 @@
           <a:bodyPr wrap="square" rtlCol="0" anchor="t"/>
           <a:lstStyle/>
           <a:p>
-            <a:pPr indent="0" marL="0">
+            <a:pPr marL="0" indent="0">
               <a:lnSpc>
                 <a:spcPct val="140000"/>
               </a:lnSpc>
@@ -31579,7 +31262,7 @@
             <a:prstDash val="solid"/>
           </a:ln>
           <a:effectLst>
-            <a:outerShdw sx="100000" sy="100000" kx="0" ky="0" algn="bl" rotWithShape="0" blurRad="152400" dist="38100" dir="5400000">
+            <a:outerShdw blurRad="152400" dist="38100" dir="5400000" algn="bl" rotWithShape="0">
               <a:srgbClr val="000000">
                 <a:alpha val="6000"/>
               </a:srgbClr>
@@ -31628,7 +31311,7 @@
           <a:bodyPr wrap="square" rtlCol="0" anchor="ctr"/>
           <a:lstStyle/>
           <a:p>
-            <a:pPr algn="ctr" indent="0" marL="0">
+            <a:pPr marL="0" indent="0" algn="ctr">
               <a:buNone/>
             </a:pPr>
             <a:r>
@@ -31664,7 +31347,7 @@
           <a:bodyPr wrap="square" rtlCol="0" anchor="ctr"/>
           <a:lstStyle/>
           <a:p>
-            <a:pPr indent="0" marL="0">
+            <a:pPr marL="0" indent="0">
               <a:buNone/>
             </a:pPr>
             <a:r>
@@ -31703,7 +31386,7 @@
           <a:bodyPr wrap="square" rtlCol="0" anchor="t"/>
           <a:lstStyle/>
           <a:p>
-            <a:pPr indent="0" marL="0">
+            <a:pPr marL="0" indent="0">
               <a:lnSpc>
                 <a:spcPct val="140000"/>
               </a:lnSpc>
@@ -31750,7 +31433,7 @@
             <a:prstDash val="solid"/>
           </a:ln>
           <a:effectLst>
-            <a:outerShdw sx="100000" sy="100000" kx="0" ky="0" algn="bl" rotWithShape="0" blurRad="152400" dist="38100" dir="5400000">
+            <a:outerShdw blurRad="152400" dist="38100" dir="5400000" algn="bl" rotWithShape="0">
               <a:srgbClr val="000000">
                 <a:alpha val="6000"/>
               </a:srgbClr>
@@ -31799,7 +31482,7 @@
           <a:bodyPr wrap="square" rtlCol="0" anchor="ctr"/>
           <a:lstStyle/>
           <a:p>
-            <a:pPr algn="ctr" indent="0" marL="0">
+            <a:pPr marL="0" indent="0" algn="ctr">
               <a:buNone/>
             </a:pPr>
             <a:r>
@@ -31835,7 +31518,7 @@
           <a:bodyPr wrap="square" rtlCol="0" anchor="ctr"/>
           <a:lstStyle/>
           <a:p>
-            <a:pPr indent="0" marL="0">
+            <a:pPr marL="0" indent="0">
               <a:buNone/>
             </a:pPr>
             <a:r>
@@ -31874,7 +31557,7 @@
           <a:bodyPr wrap="square" rtlCol="0" anchor="t"/>
           <a:lstStyle/>
           <a:p>
-            <a:pPr indent="0" marL="0">
+            <a:pPr marL="0" indent="0">
               <a:lnSpc>
                 <a:spcPct val="140000"/>
               </a:lnSpc>
@@ -31911,6 +31594,7 @@
         <a:solidFill>
           <a:srgbClr val="0C0A09"/>
         </a:solidFill>
+        <a:effectLst/>
       </p:bgPr>
     </p:bg>
     <p:spTree>
@@ -32014,7 +31698,7 @@
           <a:bodyPr wrap="square" rtlCol="0" anchor="ctr"/>
           <a:lstStyle/>
           <a:p>
-            <a:pPr algn="l" indent="0" marL="0">
+            <a:pPr marL="0" indent="0" algn="l">
               <a:buNone/>
             </a:pPr>
             <a:r>
@@ -32053,11 +31737,11 @@
           <a:bodyPr wrap="square" rtlCol="0" anchor="ctr"/>
           <a:lstStyle/>
           <a:p>
-            <a:pPr algn="l" indent="0" marL="0">
-              <a:buNone/>
-            </a:pPr>
-            <a:r>
-              <a:rPr lang="en-US" sz="1200" b="1" spc="500" kern="0" dirty="0">
+            <a:pPr marL="0" indent="0" algn="l">
+              <a:buNone/>
+            </a:pPr>
+            <a:r>
+              <a:rPr lang="en-US" sz="1200" b="1" kern="0" spc="500" dirty="0">
                 <a:solidFill>
                   <a:srgbClr val="A7E5D3"/>
                 </a:solidFill>
@@ -32092,11 +31776,11 @@
           <a:bodyPr wrap="square" rtlCol="0" anchor="t"/>
           <a:lstStyle/>
           <a:p>
-            <a:pPr algn="l" indent="0" marL="0">
-              <a:buNone/>
-            </a:pPr>
-            <a:r>
-              <a:rPr lang="en-US" sz="5200" spc="-100" kern="0" dirty="0">
+            <a:pPr marL="0" indent="0" algn="l">
+              <a:buNone/>
+            </a:pPr>
+            <a:r>
+              <a:rPr lang="en-US" sz="5200" kern="0" spc="-100" dirty="0">
                 <a:solidFill>
                   <a:srgbClr val="FFFFFF"/>
                 </a:solidFill>
@@ -32131,7 +31815,7 @@
           <a:bodyPr wrap="square" rtlCol="0" anchor="t"/>
           <a:lstStyle/>
           <a:p>
-            <a:pPr algn="l" indent="0" marL="0">
+            <a:pPr marL="0" indent="0" algn="l">
               <a:lnSpc>
                 <a:spcPct val="150000"/>
               </a:lnSpc>
@@ -32151,7 +31835,7 @@
             <a:endParaRPr lang="en-US" sz="1600" dirty="0"/>
           </a:p>
           <a:p>
-            <a:pPr algn="l" indent="0" marL="0">
+            <a:pPr marL="0" indent="0" algn="l">
               <a:lnSpc>
                 <a:spcPct val="150000"/>
               </a:lnSpc>
@@ -32215,7 +31899,7 @@
           <a:bodyPr wrap="square" rtlCol="0" anchor="ctr"/>
           <a:lstStyle/>
           <a:p>
-            <a:pPr algn="ctr" indent="0" marL="0">
+            <a:pPr marL="0" indent="0" algn="ctr">
               <a:buNone/>
             </a:pPr>
             <a:r>
@@ -32276,7 +31960,7 @@
           <a:bodyPr wrap="square" rtlCol="0" anchor="ctr"/>
           <a:lstStyle/>
           <a:p>
-            <a:pPr algn="ctr" indent="0" marL="0">
+            <a:pPr marL="0" indent="0" algn="ctr">
               <a:buNone/>
             </a:pPr>
             <a:r>
@@ -32337,7 +32021,7 @@
           <a:bodyPr wrap="square" rtlCol="0" anchor="ctr"/>
           <a:lstStyle/>
           <a:p>
-            <a:pPr algn="ctr" indent="0" marL="0">
+            <a:pPr marL="0" indent="0" algn="ctr">
               <a:buNone/>
             </a:pPr>
             <a:r>
@@ -32399,7 +32083,7 @@
           <a:bodyPr wrap="square" rtlCol="0" anchor="ctr"/>
           <a:lstStyle/>
           <a:p>
-            <a:pPr algn="l" indent="0" marL="0">
+            <a:pPr marL="0" indent="0" algn="l">
               <a:buNone/>
             </a:pPr>
             <a:r>
@@ -32438,7 +32122,7 @@
           <a:bodyPr wrap="square" rtlCol="0" anchor="ctr"/>
           <a:lstStyle/>
           <a:p>
-            <a:pPr algn="r" indent="0" marL="0">
+            <a:pPr marL="0" indent="0" algn="r">
               <a:buNone/>
             </a:pPr>
             <a:r>
@@ -32472,6 +32156,7 @@
         <a:solidFill>
           <a:srgbClr val="F5F5F5"/>
         </a:solidFill>
+        <a:effectLst/>
       </p:bgPr>
     </p:bg>
     <p:spTree>
@@ -32553,7 +32238,7 @@
           <a:bodyPr wrap="square" rtlCol="0" anchor="ctr"/>
           <a:lstStyle/>
           <a:p>
-            <a:pPr algn="l" indent="0" marL="0">
+            <a:pPr marL="0" indent="0" algn="l">
               <a:buNone/>
             </a:pPr>
             <a:r>
@@ -32592,11 +32277,11 @@
           <a:bodyPr wrap="square" rtlCol="0" anchor="ctr"/>
           <a:lstStyle/>
           <a:p>
-            <a:pPr algn="r" indent="0" marL="0">
-              <a:buNone/>
-            </a:pPr>
-            <a:r>
-              <a:rPr lang="en-US" sz="900" b="1" spc="200" kern="0" dirty="0">
+            <a:pPr marL="0" indent="0" algn="r">
+              <a:buNone/>
+            </a:pPr>
+            <a:r>
+              <a:rPr lang="en-US" sz="900" b="1" kern="0" spc="200" dirty="0">
                 <a:solidFill>
                   <a:srgbClr val="777169"/>
                 </a:solidFill>
@@ -32631,11 +32316,11 @@
           <a:bodyPr wrap="square" rtlCol="0" anchor="ctr"/>
           <a:lstStyle/>
           <a:p>
-            <a:pPr algn="l" indent="0" marL="0">
-              <a:buNone/>
-            </a:pPr>
-            <a:r>
-              <a:rPr lang="en-US" sz="1200" b="1" spc="500" kern="0" dirty="0">
+            <a:pPr marL="0" indent="0" algn="l">
+              <a:buNone/>
+            </a:pPr>
+            <a:r>
+              <a:rPr lang="en-US" sz="1200" b="1" kern="0" spc="500" dirty="0">
                 <a:solidFill>
                   <a:srgbClr val="777169"/>
                 </a:solidFill>
@@ -32670,11 +32355,11 @@
           <a:bodyPr wrap="square" rtlCol="0" anchor="t"/>
           <a:lstStyle/>
           <a:p>
-            <a:pPr algn="l" indent="0" marL="0">
-              <a:buNone/>
-            </a:pPr>
-            <a:r>
-              <a:rPr lang="en-US" sz="4800" spc="-100" kern="0" dirty="0">
+            <a:pPr marL="0" indent="0" algn="l">
+              <a:buNone/>
+            </a:pPr>
+            <a:r>
+              <a:rPr lang="en-US" sz="4800" kern="0" spc="-100" dirty="0">
                 <a:solidFill>
                   <a:srgbClr val="0C0A09"/>
                 </a:solidFill>
@@ -32709,11 +32394,11 @@
           <a:bodyPr wrap="square" rtlCol="0" anchor="ctr"/>
           <a:lstStyle/>
           <a:p>
-            <a:pPr algn="l" indent="0" marL="0">
-              <a:buNone/>
-            </a:pPr>
-            <a:r>
-              <a:rPr lang="en-US" sz="1400" b="1" spc="200" kern="0" dirty="0">
+            <a:pPr marL="0" indent="0" algn="l">
+              <a:buNone/>
+            </a:pPr>
+            <a:r>
+              <a:rPr lang="en-US" sz="1400" b="1" kern="0" spc="200" dirty="0">
                 <a:solidFill>
                   <a:srgbClr val="A8A29E"/>
                 </a:solidFill>
@@ -32748,7 +32433,7 @@
           <a:bodyPr wrap="square" rtlCol="0" anchor="t"/>
           <a:lstStyle/>
           <a:p>
-            <a:pPr algn="l" indent="0" marL="0">
+            <a:pPr marL="0" indent="0" algn="l">
               <a:lnSpc>
                 <a:spcPct val="145000"/>
               </a:lnSpc>
@@ -32813,7 +32498,7 @@
           <a:bodyPr wrap="square" rtlCol="0" anchor="ctr"/>
           <a:lstStyle/>
           <a:p>
-            <a:pPr algn="l" indent="0" marL="0">
+            <a:pPr marL="0" indent="0" algn="l">
               <a:buNone/>
             </a:pPr>
             <a:r>
@@ -32852,7 +32537,7 @@
           <a:bodyPr wrap="square" rtlCol="0" anchor="ctr"/>
           <a:lstStyle/>
           <a:p>
-            <a:pPr algn="r" indent="0" marL="0">
+            <a:pPr marL="0" indent="0" algn="r">
               <a:buNone/>
             </a:pPr>
             <a:r>
@@ -32886,6 +32571,7 @@
         <a:solidFill>
           <a:srgbClr val="F5F5F5"/>
         </a:solidFill>
+        <a:effectLst/>
       </p:bgPr>
     </p:bg>
     <p:spTree>
@@ -32945,7 +32631,7 @@
           <a:bodyPr wrap="square" rtlCol="0" anchor="ctr"/>
           <a:lstStyle/>
           <a:p>
-            <a:pPr algn="l" indent="0" marL="0">
+            <a:pPr marL="0" indent="0" algn="l">
               <a:buNone/>
             </a:pPr>
             <a:r>
@@ -32984,11 +32670,11 @@
           <a:bodyPr wrap="square" rtlCol="0" anchor="ctr"/>
           <a:lstStyle/>
           <a:p>
-            <a:pPr algn="r" indent="0" marL="0">
-              <a:buNone/>
-            </a:pPr>
-            <a:r>
-              <a:rPr lang="en-US" sz="900" b="1" spc="200" kern="0" dirty="0">
+            <a:pPr marL="0" indent="0" algn="r">
+              <a:buNone/>
+            </a:pPr>
+            <a:r>
+              <a:rPr lang="en-US" sz="900" b="1" kern="0" spc="200" dirty="0">
                 <a:solidFill>
                   <a:srgbClr val="777169"/>
                 </a:solidFill>
@@ -33023,11 +32709,11 @@
           <a:bodyPr wrap="square" rtlCol="0" anchor="ctr"/>
           <a:lstStyle/>
           <a:p>
-            <a:pPr algn="l" indent="0" marL="0">
-              <a:buNone/>
-            </a:pPr>
-            <a:r>
-              <a:rPr lang="en-US" sz="900" b="1" spc="300" kern="0" dirty="0">
+            <a:pPr marL="0" indent="0" algn="l">
+              <a:buNone/>
+            </a:pPr>
+            <a:r>
+              <a:rPr lang="en-US" sz="900" b="1" kern="0" spc="300" dirty="0">
                 <a:solidFill>
                   <a:srgbClr val="777169"/>
                 </a:solidFill>
@@ -33062,11 +32748,11 @@
           <a:bodyPr wrap="square" rtlCol="0" anchor="t"/>
           <a:lstStyle/>
           <a:p>
-            <a:pPr algn="l" indent="0" marL="0">
-              <a:buNone/>
-            </a:pPr>
-            <a:r>
-              <a:rPr lang="en-US" sz="2700" spc="-40" kern="0" dirty="0">
+            <a:pPr marL="0" indent="0" algn="l">
+              <a:buNone/>
+            </a:pPr>
+            <a:r>
+              <a:rPr lang="en-US" sz="2700" kern="0" spc="-40" dirty="0">
                 <a:solidFill>
                   <a:srgbClr val="0C0A09"/>
                 </a:solidFill>
@@ -33101,7 +32787,7 @@
           <a:bodyPr wrap="square" rtlCol="0" anchor="ctr"/>
           <a:lstStyle/>
           <a:p>
-            <a:pPr algn="l" indent="0" marL="0">
+            <a:pPr marL="0" indent="0" algn="l">
               <a:buNone/>
             </a:pPr>
             <a:r>
@@ -33163,7 +32849,7 @@
           <a:bodyPr wrap="square" rtlCol="0" anchor="ctr"/>
           <a:lstStyle/>
           <a:p>
-            <a:pPr algn="l" indent="0" marL="0">
+            <a:pPr marL="0" indent="0" algn="l">
               <a:buNone/>
             </a:pPr>
             <a:r>
@@ -33202,7 +32888,7 @@
           <a:bodyPr wrap="square" rtlCol="0" anchor="ctr"/>
           <a:lstStyle/>
           <a:p>
-            <a:pPr algn="r" indent="0" marL="0">
+            <a:pPr marL="0" indent="0" algn="r">
               <a:buNone/>
             </a:pPr>
             <a:r>
@@ -33246,7 +32932,7 @@
             <a:prstDash val="solid"/>
           </a:ln>
           <a:effectLst>
-            <a:outerShdw sx="100000" sy="100000" kx="0" ky="0" algn="bl" rotWithShape="0" blurRad="152400" dist="38100" dir="5400000">
+            <a:outerShdw blurRad="152400" dist="38100" dir="5400000" algn="bl" rotWithShape="0">
               <a:srgbClr val="000000">
                 <a:alpha val="6000"/>
               </a:srgbClr>
@@ -33275,7 +32961,7 @@
           <a:bodyPr wrap="square" rtlCol="0" anchor="ctr"/>
           <a:lstStyle/>
           <a:p>
-            <a:pPr indent="0" marL="0">
+            <a:pPr marL="0" indent="0">
               <a:buNone/>
             </a:pPr>
             <a:r>
@@ -33337,7 +33023,7 @@
           <a:bodyPr wrap="square" rtlCol="0" anchor="ctr"/>
           <a:lstStyle/>
           <a:p>
-            <a:pPr indent="0" marL="0">
+            <a:pPr marL="0" indent="0">
               <a:buNone/>
             </a:pPr>
             <a:r>
@@ -33376,7 +33062,7 @@
           <a:bodyPr wrap="square" rtlCol="0" anchor="ctr"/>
           <a:lstStyle/>
           <a:p>
-            <a:pPr indent="0" marL="0">
+            <a:pPr marL="0" indent="0">
               <a:lnSpc>
                 <a:spcPct val="130000"/>
               </a:lnSpc>
@@ -33441,7 +33127,7 @@
           <a:bodyPr wrap="square" rtlCol="0" anchor="ctr"/>
           <a:lstStyle/>
           <a:p>
-            <a:pPr indent="0" marL="0">
+            <a:pPr marL="0" indent="0">
               <a:buNone/>
             </a:pPr>
             <a:r>
@@ -33480,7 +33166,7 @@
           <a:bodyPr wrap="square" rtlCol="0" anchor="ctr"/>
           <a:lstStyle/>
           <a:p>
-            <a:pPr indent="0" marL="0">
+            <a:pPr marL="0" indent="0">
               <a:lnSpc>
                 <a:spcPct val="130000"/>
               </a:lnSpc>
@@ -33545,7 +33231,7 @@
           <a:bodyPr wrap="square" rtlCol="0" anchor="ctr"/>
           <a:lstStyle/>
           <a:p>
-            <a:pPr indent="0" marL="0">
+            <a:pPr marL="0" indent="0">
               <a:buNone/>
             </a:pPr>
             <a:r>
@@ -33584,7 +33270,7 @@
           <a:bodyPr wrap="square" rtlCol="0" anchor="ctr"/>
           <a:lstStyle/>
           <a:p>
-            <a:pPr indent="0" marL="0">
+            <a:pPr marL="0" indent="0">
               <a:lnSpc>
                 <a:spcPct val="130000"/>
               </a:lnSpc>
@@ -33649,7 +33335,7 @@
           <a:bodyPr wrap="square" rtlCol="0" anchor="ctr"/>
           <a:lstStyle/>
           <a:p>
-            <a:pPr indent="0" marL="0">
+            <a:pPr marL="0" indent="0">
               <a:buNone/>
             </a:pPr>
             <a:r>
@@ -33688,7 +33374,7 @@
           <a:bodyPr wrap="square" rtlCol="0" anchor="ctr"/>
           <a:lstStyle/>
           <a:p>
-            <a:pPr indent="0" marL="0">
+            <a:pPr marL="0" indent="0">
               <a:lnSpc>
                 <a:spcPct val="130000"/>
               </a:lnSpc>
@@ -33735,7 +33421,7 @@
             <a:prstDash val="solid"/>
           </a:ln>
           <a:effectLst>
-            <a:outerShdw sx="100000" sy="100000" kx="0" ky="0" algn="bl" rotWithShape="0" blurRad="152400" dist="38100" dir="5400000">
+            <a:outerShdw blurRad="152400" dist="38100" dir="5400000" algn="bl" rotWithShape="0">
               <a:srgbClr val="000000">
                 <a:alpha val="6000"/>
               </a:srgbClr>
@@ -33764,11 +33450,11 @@
           <a:bodyPr wrap="square" rtlCol="0" anchor="ctr"/>
           <a:lstStyle/>
           <a:p>
-            <a:pPr indent="0" marL="0">
-              <a:buNone/>
-            </a:pPr>
-            <a:r>
-              <a:rPr lang="en-US" sz="1500" b="1" spc="100" kern="0" dirty="0">
+            <a:pPr marL="0" indent="0">
+              <a:buNone/>
+            </a:pPr>
+            <a:r>
+              <a:rPr lang="en-US" sz="1500" b="1" kern="0" spc="100" dirty="0">
                 <a:solidFill>
                   <a:srgbClr val="777169"/>
                 </a:solidFill>
@@ -33803,7 +33489,7 @@
           <a:bodyPr wrap="square" rtlCol="0" anchor="ctr"/>
           <a:lstStyle/>
           <a:p>
-            <a:pPr algn="ctr" indent="0" marL="0">
+            <a:pPr marL="0" indent="0" algn="ctr">
               <a:buNone/>
             </a:pPr>
             <a:r>
@@ -33869,11 +33555,11 @@
           <a:bodyPr wrap="square" rtlCol="0" anchor="ctr"/>
           <a:lstStyle/>
           <a:p>
-            <a:pPr algn="ctr" indent="0" marL="0">
-              <a:buNone/>
-            </a:pPr>
-            <a:r>
-              <a:rPr lang="en-US" sz="900" spc="100" kern="0" dirty="0">
+            <a:pPr marL="0" indent="0" algn="ctr">
+              <a:buNone/>
+            </a:pPr>
+            <a:r>
+              <a:rPr lang="en-US" sz="900" kern="0" spc="100" dirty="0">
                 <a:solidFill>
                   <a:srgbClr val="A8A29E"/>
                 </a:solidFill>
@@ -33908,7 +33594,7 @@
           <a:bodyPr wrap="square" rtlCol="0" anchor="ctr"/>
           <a:lstStyle/>
           <a:p>
-            <a:pPr algn="ctr" indent="0" marL="0">
+            <a:pPr marL="0" indent="0" algn="ctr">
               <a:buNone/>
             </a:pPr>
             <a:r>
@@ -33974,11 +33660,11 @@
           <a:bodyPr wrap="square" rtlCol="0" anchor="ctr"/>
           <a:lstStyle/>
           <a:p>
-            <a:pPr algn="ctr" indent="0" marL="0">
-              <a:buNone/>
-            </a:pPr>
-            <a:r>
-              <a:rPr lang="en-US" sz="900" spc="100" kern="0" dirty="0">
+            <a:pPr marL="0" indent="0" algn="ctr">
+              <a:buNone/>
+            </a:pPr>
+            <a:r>
+              <a:rPr lang="en-US" sz="900" kern="0" spc="100" dirty="0">
                 <a:solidFill>
                   <a:srgbClr val="A8A29E"/>
                 </a:solidFill>
@@ -34013,7 +33699,7 @@
           <a:bodyPr wrap="square" rtlCol="0" anchor="ctr"/>
           <a:lstStyle/>
           <a:p>
-            <a:pPr algn="ctr" indent="0" marL="0">
+            <a:pPr marL="0" indent="0" algn="ctr">
               <a:buNone/>
             </a:pPr>
             <a:r>
@@ -34052,7 +33738,7 @@
           <a:bodyPr wrap="square" rtlCol="0" anchor="ctr"/>
           <a:lstStyle/>
           <a:p>
-            <a:pPr algn="ctr" indent="0" marL="0">
+            <a:pPr marL="0" indent="0" algn="ctr">
               <a:buNone/>
             </a:pPr>
             <a:r>
@@ -34118,11 +33804,11 @@
           <a:bodyPr wrap="square" rtlCol="0" anchor="ctr"/>
           <a:lstStyle/>
           <a:p>
-            <a:pPr algn="ctr" indent="0" marL="0">
-              <a:buNone/>
-            </a:pPr>
-            <a:r>
-              <a:rPr lang="en-US" sz="900" spc="100" kern="0" dirty="0">
+            <a:pPr marL="0" indent="0" algn="ctr">
+              <a:buNone/>
+            </a:pPr>
+            <a:r>
+              <a:rPr lang="en-US" sz="900" kern="0" spc="100" dirty="0">
                 <a:solidFill>
                   <a:srgbClr val="A8A29E"/>
                 </a:solidFill>
@@ -34157,7 +33843,7 @@
           <a:bodyPr wrap="square" rtlCol="0" anchor="ctr"/>
           <a:lstStyle/>
           <a:p>
-            <a:pPr algn="ctr" indent="0" marL="0">
+            <a:pPr marL="0" indent="0" algn="ctr">
               <a:buNone/>
             </a:pPr>
             <a:r>
@@ -34223,11 +33909,11 @@
           <a:bodyPr wrap="square" rtlCol="0" anchor="ctr"/>
           <a:lstStyle/>
           <a:p>
-            <a:pPr algn="ctr" indent="0" marL="0">
-              <a:buNone/>
-            </a:pPr>
-            <a:r>
-              <a:rPr lang="en-US" sz="900" spc="100" kern="0" dirty="0">
+            <a:pPr marL="0" indent="0" algn="ctr">
+              <a:buNone/>
+            </a:pPr>
+            <a:r>
+              <a:rPr lang="en-US" sz="900" kern="0" spc="100" dirty="0">
                 <a:solidFill>
                   <a:srgbClr val="A8A29E"/>
                 </a:solidFill>
@@ -34262,7 +33948,7 @@
           <a:bodyPr wrap="square" rtlCol="0" anchor="ctr"/>
           <a:lstStyle/>
           <a:p>
-            <a:pPr algn="ctr" indent="0" marL="0">
+            <a:pPr marL="0" indent="0" algn="ctr">
               <a:buNone/>
             </a:pPr>
             <a:r>
@@ -34301,7 +33987,7 @@
           <a:bodyPr wrap="square" rtlCol="0" anchor="ctr"/>
           <a:lstStyle/>
           <a:p>
-            <a:pPr algn="ctr" indent="0" marL="0">
+            <a:pPr marL="0" indent="0" algn="ctr">
               <a:buNone/>
             </a:pPr>
             <a:r>
@@ -34367,11 +34053,11 @@
           <a:bodyPr wrap="square" rtlCol="0" anchor="ctr"/>
           <a:lstStyle/>
           <a:p>
-            <a:pPr algn="ctr" indent="0" marL="0">
-              <a:buNone/>
-            </a:pPr>
-            <a:r>
-              <a:rPr lang="en-US" sz="900" spc="100" kern="0" dirty="0">
+            <a:pPr marL="0" indent="0" algn="ctr">
+              <a:buNone/>
+            </a:pPr>
+            <a:r>
+              <a:rPr lang="en-US" sz="900" kern="0" spc="100" dirty="0">
                 <a:solidFill>
                   <a:srgbClr val="A8A29E"/>
                 </a:solidFill>
@@ -34406,7 +34092,7 @@
           <a:bodyPr wrap="square" rtlCol="0" anchor="ctr"/>
           <a:lstStyle/>
           <a:p>
-            <a:pPr algn="ctr" indent="0" marL="0">
+            <a:pPr marL="0" indent="0" algn="ctr">
               <a:buNone/>
             </a:pPr>
             <a:r>
@@ -34472,11 +34158,11 @@
           <a:bodyPr wrap="square" rtlCol="0" anchor="ctr"/>
           <a:lstStyle/>
           <a:p>
-            <a:pPr algn="ctr" indent="0" marL="0">
-              <a:buNone/>
-            </a:pPr>
-            <a:r>
-              <a:rPr lang="en-US" sz="900" spc="100" kern="0" dirty="0">
+            <a:pPr marL="0" indent="0" algn="ctr">
+              <a:buNone/>
+            </a:pPr>
+            <a:r>
+              <a:rPr lang="en-US" sz="900" kern="0" spc="100" dirty="0">
                 <a:solidFill>
                   <a:srgbClr val="A8A29E"/>
                 </a:solidFill>
@@ -34511,7 +34197,7 @@
           <a:bodyPr wrap="square" rtlCol="0" anchor="ctr"/>
           <a:lstStyle/>
           <a:p>
-            <a:pPr algn="ctr" indent="0" marL="0">
+            <a:pPr marL="0" indent="0" algn="ctr">
               <a:buNone/>
             </a:pPr>
             <a:r>
@@ -34550,7 +34236,7 @@
           <a:bodyPr wrap="square" rtlCol="0" anchor="ctr"/>
           <a:lstStyle/>
           <a:p>
-            <a:pPr algn="ctr" indent="0" marL="0">
+            <a:pPr marL="0" indent="0" algn="ctr">
               <a:buNone/>
             </a:pPr>
             <a:r>
@@ -34616,11 +34302,11 @@
           <a:bodyPr wrap="square" rtlCol="0" anchor="ctr"/>
           <a:lstStyle/>
           <a:p>
-            <a:pPr algn="ctr" indent="0" marL="0">
-              <a:buNone/>
-            </a:pPr>
-            <a:r>
-              <a:rPr lang="en-US" sz="900" spc="100" kern="0" dirty="0">
+            <a:pPr marL="0" indent="0" algn="ctr">
+              <a:buNone/>
+            </a:pPr>
+            <a:r>
+              <a:rPr lang="en-US" sz="900" kern="0" spc="100" dirty="0">
                 <a:solidFill>
                   <a:srgbClr val="A8A29E"/>
                 </a:solidFill>
@@ -34655,7 +34341,7 @@
           <a:bodyPr wrap="square" rtlCol="0" anchor="ctr"/>
           <a:lstStyle/>
           <a:p>
-            <a:pPr algn="ctr" indent="0" marL="0">
+            <a:pPr marL="0" indent="0" algn="ctr">
               <a:buNone/>
             </a:pPr>
             <a:r>
@@ -34721,11 +34407,11 @@
           <a:bodyPr wrap="square" rtlCol="0" anchor="ctr"/>
           <a:lstStyle/>
           <a:p>
-            <a:pPr algn="ctr" indent="0" marL="0">
-              <a:buNone/>
-            </a:pPr>
-            <a:r>
-              <a:rPr lang="en-US" sz="900" spc="100" kern="0" dirty="0">
+            <a:pPr marL="0" indent="0" algn="ctr">
+              <a:buNone/>
+            </a:pPr>
+            <a:r>
+              <a:rPr lang="en-US" sz="900" kern="0" spc="100" dirty="0">
                 <a:solidFill>
                   <a:srgbClr val="A8A29E"/>
                 </a:solidFill>
@@ -34760,7 +34446,7 @@
           <a:bodyPr wrap="square" rtlCol="0" anchor="ctr"/>
           <a:lstStyle/>
           <a:p>
-            <a:pPr algn="ctr" indent="0" marL="0">
+            <a:pPr marL="0" indent="0" algn="ctr">
               <a:buNone/>
             </a:pPr>
             <a:r>
@@ -34799,7 +34485,7 @@
           <a:bodyPr wrap="square" rtlCol="0" anchor="ctr"/>
           <a:lstStyle/>
           <a:p>
-            <a:pPr algn="l" indent="0" marL="0">
+            <a:pPr marL="0" indent="0" algn="l">
               <a:buNone/>
             </a:pPr>
             <a:r>
@@ -34833,6 +34519,7 @@
         <a:solidFill>
           <a:srgbClr val="F5F5F5"/>
         </a:solidFill>
+        <a:effectLst/>
       </p:bgPr>
     </p:bg>
     <p:spTree>
@@ -34892,7 +34579,7 @@
           <a:bodyPr wrap="square" rtlCol="0" anchor="ctr"/>
           <a:lstStyle/>
           <a:p>
-            <a:pPr algn="l" indent="0" marL="0">
+            <a:pPr marL="0" indent="0" algn="l">
               <a:buNone/>
             </a:pPr>
             <a:r>
@@ -34931,11 +34618,11 @@
           <a:bodyPr wrap="square" rtlCol="0" anchor="ctr"/>
           <a:lstStyle/>
           <a:p>
-            <a:pPr algn="r" indent="0" marL="0">
-              <a:buNone/>
-            </a:pPr>
-            <a:r>
-              <a:rPr lang="en-US" sz="900" b="1" spc="200" kern="0" dirty="0">
+            <a:pPr marL="0" indent="0" algn="r">
+              <a:buNone/>
+            </a:pPr>
+            <a:r>
+              <a:rPr lang="en-US" sz="900" b="1" kern="0" spc="200" dirty="0">
                 <a:solidFill>
                   <a:srgbClr val="777169"/>
                 </a:solidFill>
@@ -34970,11 +34657,11 @@
           <a:bodyPr wrap="square" rtlCol="0" anchor="ctr"/>
           <a:lstStyle/>
           <a:p>
-            <a:pPr algn="l" indent="0" marL="0">
-              <a:buNone/>
-            </a:pPr>
-            <a:r>
-              <a:rPr lang="en-US" sz="900" b="1" spc="300" kern="0" dirty="0">
+            <a:pPr marL="0" indent="0" algn="l">
+              <a:buNone/>
+            </a:pPr>
+            <a:r>
+              <a:rPr lang="en-US" sz="900" b="1" kern="0" spc="300" dirty="0">
                 <a:solidFill>
                   <a:srgbClr val="777169"/>
                 </a:solidFill>
@@ -35009,11 +34696,11 @@
           <a:bodyPr wrap="square" rtlCol="0" anchor="t"/>
           <a:lstStyle/>
           <a:p>
-            <a:pPr algn="l" indent="0" marL="0">
-              <a:buNone/>
-            </a:pPr>
-            <a:r>
-              <a:rPr lang="en-US" sz="2700" spc="-40" kern="0" dirty="0">
+            <a:pPr marL="0" indent="0" algn="l">
+              <a:buNone/>
+            </a:pPr>
+            <a:r>
+              <a:rPr lang="en-US" sz="2700" kern="0" spc="-40" dirty="0">
                 <a:solidFill>
                   <a:srgbClr val="0C0A09"/>
                 </a:solidFill>
@@ -35048,7 +34735,7 @@
           <a:bodyPr wrap="square" rtlCol="0" anchor="ctr"/>
           <a:lstStyle/>
           <a:p>
-            <a:pPr algn="l" indent="0" marL="0">
+            <a:pPr marL="0" indent="0" algn="l">
               <a:buNone/>
             </a:pPr>
             <a:r>
@@ -35110,7 +34797,7 @@
           <a:bodyPr wrap="square" rtlCol="0" anchor="ctr"/>
           <a:lstStyle/>
           <a:p>
-            <a:pPr algn="l" indent="0" marL="0">
+            <a:pPr marL="0" indent="0" algn="l">
               <a:buNone/>
             </a:pPr>
             <a:r>
@@ -35149,7 +34836,7 @@
           <a:bodyPr wrap="square" rtlCol="0" anchor="ctr"/>
           <a:lstStyle/>
           <a:p>
-            <a:pPr algn="r" indent="0" marL="0">
+            <a:pPr marL="0" indent="0" algn="r">
               <a:buNone/>
             </a:pPr>
             <a:r>
@@ -35193,7 +34880,7 @@
             <a:prstDash val="solid"/>
           </a:ln>
           <a:effectLst>
-            <a:outerShdw sx="100000" sy="100000" kx="0" ky="0" algn="bl" rotWithShape="0" blurRad="152400" dist="38100" dir="5400000">
+            <a:outerShdw blurRad="152400" dist="38100" dir="5400000" algn="bl" rotWithShape="0">
               <a:srgbClr val="000000">
                 <a:alpha val="6000"/>
               </a:srgbClr>
@@ -35222,11 +34909,11 @@
           <a:bodyPr wrap="square" rtlCol="0" anchor="ctr"/>
           <a:lstStyle/>
           <a:p>
-            <a:pPr algn="ctr" indent="0" marL="0">
-              <a:buNone/>
-            </a:pPr>
-            <a:r>
-              <a:rPr lang="en-US" sz="1300" b="1" spc="200" kern="0" dirty="0">
+            <a:pPr marL="0" indent="0" algn="ctr">
+              <a:buNone/>
+            </a:pPr>
+            <a:r>
+              <a:rPr lang="en-US" sz="1300" b="1" kern="0" spc="200" dirty="0">
                 <a:solidFill>
                   <a:srgbClr val="A8A29E"/>
                 </a:solidFill>
@@ -35261,7 +34948,7 @@
           <a:bodyPr wrap="square" rtlCol="0" anchor="ctr"/>
           <a:lstStyle/>
           <a:p>
-            <a:pPr algn="ctr" indent="0" marL="0">
+            <a:pPr marL="0" indent="0" algn="ctr">
               <a:buNone/>
             </a:pPr>
             <a:r>
@@ -35323,7 +35010,7 @@
           <a:bodyPr wrap="square" rtlCol="0" anchor="ctr"/>
           <a:lstStyle/>
           <a:p>
-            <a:pPr algn="ctr" indent="0" marL="0">
+            <a:pPr marL="0" indent="0" algn="ctr">
               <a:buNone/>
             </a:pPr>
             <a:r>
@@ -35362,7 +35049,7 @@
           <a:bodyPr wrap="square" rtlCol="0" anchor="t"/>
           <a:lstStyle/>
           <a:p>
-            <a:pPr algn="ctr" indent="0" marL="0">
+            <a:pPr marL="0" indent="0" algn="ctr">
               <a:lnSpc>
                 <a:spcPct val="140000"/>
               </a:lnSpc>
@@ -35409,7 +35096,7 @@
             <a:prstDash val="solid"/>
           </a:ln>
           <a:effectLst>
-            <a:outerShdw sx="100000" sy="100000" kx="0" ky="0" algn="bl" rotWithShape="0" blurRad="152400" dist="38100" dir="5400000">
+            <a:outerShdw blurRad="152400" dist="38100" dir="5400000" algn="bl" rotWithShape="0">
               <a:srgbClr val="000000">
                 <a:alpha val="6000"/>
               </a:srgbClr>
@@ -35438,11 +35125,11 @@
           <a:bodyPr wrap="square" rtlCol="0" anchor="ctr"/>
           <a:lstStyle/>
           <a:p>
-            <a:pPr algn="ctr" indent="0" marL="0">
-              <a:buNone/>
-            </a:pPr>
-            <a:r>
-              <a:rPr lang="en-US" sz="1300" b="1" spc="200" kern="0" dirty="0">
+            <a:pPr marL="0" indent="0" algn="ctr">
+              <a:buNone/>
+            </a:pPr>
+            <a:r>
+              <a:rPr lang="en-US" sz="1300" b="1" kern="0" spc="200" dirty="0">
                 <a:solidFill>
                   <a:srgbClr val="A8A29E"/>
                 </a:solidFill>
@@ -35477,7 +35164,7 @@
           <a:bodyPr wrap="square" rtlCol="0" anchor="ctr"/>
           <a:lstStyle/>
           <a:p>
-            <a:pPr algn="ctr" indent="0" marL="0">
+            <a:pPr marL="0" indent="0" algn="ctr">
               <a:buNone/>
             </a:pPr>
             <a:r>
@@ -35539,7 +35226,7 @@
           <a:bodyPr wrap="square" rtlCol="0" anchor="ctr"/>
           <a:lstStyle/>
           <a:p>
-            <a:pPr algn="ctr" indent="0" marL="0">
+            <a:pPr marL="0" indent="0" algn="ctr">
               <a:buNone/>
             </a:pPr>
             <a:r>
@@ -35578,7 +35265,7 @@
           <a:bodyPr wrap="square" rtlCol="0" anchor="t"/>
           <a:lstStyle/>
           <a:p>
-            <a:pPr algn="ctr" indent="0" marL="0">
+            <a:pPr marL="0" indent="0" algn="ctr">
               <a:lnSpc>
                 <a:spcPct val="140000"/>
               </a:lnSpc>
@@ -35625,7 +35312,7 @@
             <a:prstDash val="solid"/>
           </a:ln>
           <a:effectLst>
-            <a:outerShdw sx="100000" sy="100000" kx="0" ky="0" algn="bl" rotWithShape="0" blurRad="152400" dist="38100" dir="5400000">
+            <a:outerShdw blurRad="152400" dist="38100" dir="5400000" algn="bl" rotWithShape="0">
               <a:srgbClr val="000000">
                 <a:alpha val="6000"/>
               </a:srgbClr>
@@ -35654,11 +35341,11 @@
           <a:bodyPr wrap="square" rtlCol="0" anchor="ctr"/>
           <a:lstStyle/>
           <a:p>
-            <a:pPr algn="ctr" indent="0" marL="0">
-              <a:buNone/>
-            </a:pPr>
-            <a:r>
-              <a:rPr lang="en-US" sz="1300" b="1" spc="200" kern="0" dirty="0">
+            <a:pPr marL="0" indent="0" algn="ctr">
+              <a:buNone/>
+            </a:pPr>
+            <a:r>
+              <a:rPr lang="en-US" sz="1300" b="1" kern="0" spc="200" dirty="0">
                 <a:solidFill>
                   <a:srgbClr val="A7E5D3"/>
                 </a:solidFill>
@@ -35693,7 +35380,7 @@
           <a:bodyPr wrap="square" rtlCol="0" anchor="ctr"/>
           <a:lstStyle/>
           <a:p>
-            <a:pPr algn="ctr" indent="0" marL="0">
+            <a:pPr marL="0" indent="0" algn="ctr">
               <a:buNone/>
             </a:pPr>
             <a:r>
@@ -35755,7 +35442,7 @@
           <a:bodyPr wrap="square" rtlCol="0" anchor="ctr"/>
           <a:lstStyle/>
           <a:p>
-            <a:pPr algn="ctr" indent="0" marL="0">
+            <a:pPr marL="0" indent="0" algn="ctr">
               <a:buNone/>
             </a:pPr>
             <a:r>
@@ -35794,7 +35481,7 @@
           <a:bodyPr wrap="square" rtlCol="0" anchor="t"/>
           <a:lstStyle/>
           <a:p>
-            <a:pPr algn="ctr" indent="0" marL="0">
+            <a:pPr marL="0" indent="0" algn="ctr">
               <a:lnSpc>
                 <a:spcPct val="140000"/>
               </a:lnSpc>
@@ -35841,7 +35528,7 @@
             <a:prstDash val="solid"/>
           </a:ln>
           <a:effectLst>
-            <a:outerShdw sx="100000" sy="100000" kx="0" ky="0" algn="bl" rotWithShape="0" blurRad="152400" dist="38100" dir="5400000">
+            <a:outerShdw blurRad="152400" dist="38100" dir="5400000" algn="bl" rotWithShape="0">
               <a:srgbClr val="000000">
                 <a:alpha val="6000"/>
               </a:srgbClr>
@@ -35870,11 +35557,11 @@
           <a:bodyPr wrap="square" rtlCol="0" anchor="ctr"/>
           <a:lstStyle/>
           <a:p>
-            <a:pPr algn="ctr" indent="0" marL="0">
-              <a:buNone/>
-            </a:pPr>
-            <a:r>
-              <a:rPr lang="en-US" sz="1300" b="1" spc="200" kern="0" dirty="0">
+            <a:pPr marL="0" indent="0" algn="ctr">
+              <a:buNone/>
+            </a:pPr>
+            <a:r>
+              <a:rPr lang="en-US" sz="1300" b="1" kern="0" spc="200" dirty="0">
                 <a:solidFill>
                   <a:srgbClr val="A8A29E"/>
                 </a:solidFill>
@@ -35909,7 +35596,7 @@
           <a:bodyPr wrap="square" rtlCol="0" anchor="ctr"/>
           <a:lstStyle/>
           <a:p>
-            <a:pPr algn="ctr" indent="0" marL="0">
+            <a:pPr marL="0" indent="0" algn="ctr">
               <a:buNone/>
             </a:pPr>
             <a:r>
@@ -35971,7 +35658,7 @@
           <a:bodyPr wrap="square" rtlCol="0" anchor="ctr"/>
           <a:lstStyle/>
           <a:p>
-            <a:pPr algn="ctr" indent="0" marL="0">
+            <a:pPr marL="0" indent="0" algn="ctr">
               <a:buNone/>
             </a:pPr>
             <a:r>
@@ -36010,7 +35697,7 @@
           <a:bodyPr wrap="square" rtlCol="0" anchor="t"/>
           <a:lstStyle/>
           <a:p>
-            <a:pPr algn="ctr" indent="0" marL="0">
+            <a:pPr marL="0" indent="0" algn="ctr">
               <a:lnSpc>
                 <a:spcPct val="140000"/>
               </a:lnSpc>
@@ -36047,6 +35734,7 @@
         <a:solidFill>
           <a:srgbClr val="F5F5F5"/>
         </a:solidFill>
+        <a:effectLst/>
       </p:bgPr>
     </p:bg>
     <p:spTree>
@@ -36106,7 +35794,7 @@
           <a:bodyPr wrap="square" rtlCol="0" anchor="ctr"/>
           <a:lstStyle/>
           <a:p>
-            <a:pPr algn="l" indent="0" marL="0">
+            <a:pPr marL="0" indent="0" algn="l">
               <a:buNone/>
             </a:pPr>
             <a:r>
@@ -36145,11 +35833,11 @@
           <a:bodyPr wrap="square" rtlCol="0" anchor="ctr"/>
           <a:lstStyle/>
           <a:p>
-            <a:pPr algn="r" indent="0" marL="0">
-              <a:buNone/>
-            </a:pPr>
-            <a:r>
-              <a:rPr lang="en-US" sz="900" b="1" spc="200" kern="0" dirty="0">
+            <a:pPr marL="0" indent="0" algn="r">
+              <a:buNone/>
+            </a:pPr>
+            <a:r>
+              <a:rPr lang="en-US" sz="900" b="1" kern="0" spc="200" dirty="0">
                 <a:solidFill>
                   <a:srgbClr val="777169"/>
                 </a:solidFill>
@@ -36184,11 +35872,11 @@
           <a:bodyPr wrap="square" rtlCol="0" anchor="ctr"/>
           <a:lstStyle/>
           <a:p>
-            <a:pPr algn="l" indent="0" marL="0">
-              <a:buNone/>
-            </a:pPr>
-            <a:r>
-              <a:rPr lang="en-US" sz="900" b="1" spc="300" kern="0" dirty="0">
+            <a:pPr marL="0" indent="0" algn="l">
+              <a:buNone/>
+            </a:pPr>
+            <a:r>
+              <a:rPr lang="en-US" sz="900" b="1" kern="0" spc="300" dirty="0">
                 <a:solidFill>
                   <a:srgbClr val="777169"/>
                 </a:solidFill>
@@ -36223,11 +35911,11 @@
           <a:bodyPr wrap="square" rtlCol="0" anchor="t"/>
           <a:lstStyle/>
           <a:p>
-            <a:pPr algn="l" indent="0" marL="0">
-              <a:buNone/>
-            </a:pPr>
-            <a:r>
-              <a:rPr lang="en-US" sz="2700" spc="-40" kern="0" dirty="0">
+            <a:pPr marL="0" indent="0" algn="l">
+              <a:buNone/>
+            </a:pPr>
+            <a:r>
+              <a:rPr lang="en-US" sz="2700" kern="0" spc="-40" dirty="0">
                 <a:solidFill>
                   <a:srgbClr val="0C0A09"/>
                 </a:solidFill>
@@ -36262,7 +35950,7 @@
           <a:bodyPr wrap="square" rtlCol="0" anchor="ctr"/>
           <a:lstStyle/>
           <a:p>
-            <a:pPr algn="l" indent="0" marL="0">
+            <a:pPr marL="0" indent="0" algn="l">
               <a:buNone/>
             </a:pPr>
             <a:r>
@@ -36324,7 +36012,7 @@
           <a:bodyPr wrap="square" rtlCol="0" anchor="ctr"/>
           <a:lstStyle/>
           <a:p>
-            <a:pPr algn="l" indent="0" marL="0">
+            <a:pPr marL="0" indent="0" algn="l">
               <a:buNone/>
             </a:pPr>
             <a:r>
@@ -36363,7 +36051,7 @@
           <a:bodyPr wrap="square" rtlCol="0" anchor="ctr"/>
           <a:lstStyle/>
           <a:p>
-            <a:pPr algn="r" indent="0" marL="0">
+            <a:pPr marL="0" indent="0" algn="r">
               <a:buNone/>
             </a:pPr>
             <a:r>
@@ -36407,7 +36095,7 @@
             <a:prstDash val="solid"/>
           </a:ln>
           <a:effectLst>
-            <a:outerShdw sx="100000" sy="100000" kx="0" ky="0" algn="bl" rotWithShape="0" blurRad="152400" dist="38100" dir="5400000">
+            <a:outerShdw blurRad="152400" dist="38100" dir="5400000" algn="bl" rotWithShape="0">
               <a:srgbClr val="000000">
                 <a:alpha val="6000"/>
               </a:srgbClr>
@@ -36458,7 +36146,7 @@
           <a:bodyPr wrap="square" rtlCol="0" anchor="ctr"/>
           <a:lstStyle/>
           <a:p>
-            <a:pPr algn="ctr" indent="0" marL="0">
+            <a:pPr marL="0" indent="0" algn="ctr">
               <a:buNone/>
             </a:pPr>
             <a:r>
@@ -36497,7 +36185,7 @@
           <a:bodyPr wrap="square" rtlCol="0" anchor="ctr"/>
           <a:lstStyle/>
           <a:p>
-            <a:pPr indent="0" marL="0">
+            <a:pPr marL="0" indent="0">
               <a:buNone/>
             </a:pPr>
             <a:r>
@@ -36536,7 +36224,7 @@
           <a:bodyPr wrap="square" rtlCol="0" anchor="t"/>
           <a:lstStyle/>
           <a:p>
-            <a:pPr indent="0" marL="0">
+            <a:pPr marL="0" indent="0">
               <a:lnSpc>
                 <a:spcPct val="135000"/>
               </a:lnSpc>
@@ -36600,7 +36288,7 @@
           <a:bodyPr wrap="square" rtlCol="0" anchor="ctr"/>
           <a:lstStyle/>
           <a:p>
-            <a:pPr algn="ctr" indent="0" marL="0">
+            <a:pPr marL="0" indent="0" algn="ctr">
               <a:buNone/>
             </a:pPr>
             <a:r>
@@ -36644,7 +36332,7 @@
             <a:prstDash val="solid"/>
           </a:ln>
           <a:effectLst>
-            <a:outerShdw sx="100000" sy="100000" kx="0" ky="0" algn="bl" rotWithShape="0" blurRad="152400" dist="38100" dir="5400000">
+            <a:outerShdw blurRad="152400" dist="38100" dir="5400000" algn="bl" rotWithShape="0">
               <a:srgbClr val="000000">
                 <a:alpha val="6000"/>
               </a:srgbClr>
@@ -36695,7 +36383,7 @@
           <a:bodyPr wrap="square" rtlCol="0" anchor="ctr"/>
           <a:lstStyle/>
           <a:p>
-            <a:pPr algn="ctr" indent="0" marL="0">
+            <a:pPr marL="0" indent="0" algn="ctr">
               <a:buNone/>
             </a:pPr>
             <a:r>
@@ -36734,7 +36422,7 @@
           <a:bodyPr wrap="square" rtlCol="0" anchor="ctr"/>
           <a:lstStyle/>
           <a:p>
-            <a:pPr indent="0" marL="0">
+            <a:pPr marL="0" indent="0">
               <a:buNone/>
             </a:pPr>
             <a:r>
@@ -36773,7 +36461,7 @@
           <a:bodyPr wrap="square" rtlCol="0" anchor="t"/>
           <a:lstStyle/>
           <a:p>
-            <a:pPr indent="0" marL="0">
+            <a:pPr marL="0" indent="0">
               <a:lnSpc>
                 <a:spcPct val="135000"/>
               </a:lnSpc>
@@ -36837,7 +36525,7 @@
           <a:bodyPr wrap="square" rtlCol="0" anchor="ctr"/>
           <a:lstStyle/>
           <a:p>
-            <a:pPr algn="ctr" indent="0" marL="0">
+            <a:pPr marL="0" indent="0" algn="ctr">
               <a:buNone/>
             </a:pPr>
             <a:r>
@@ -36876,7 +36564,7 @@
           <a:bodyPr wrap="square" rtlCol="0" anchor="ctr"/>
           <a:lstStyle/>
           <a:p>
-            <a:pPr algn="ctr" indent="0" marL="0">
+            <a:pPr marL="0" indent="0" algn="ctr">
               <a:buNone/>
             </a:pPr>
             <a:r>
@@ -36910,6 +36598,7 @@
         <a:solidFill>
           <a:srgbClr val="F5F5F5"/>
         </a:solidFill>
+        <a:effectLst/>
       </p:bgPr>
     </p:bg>
     <p:spTree>
@@ -36969,7 +36658,7 @@
           <a:bodyPr wrap="square" rtlCol="0" anchor="ctr"/>
           <a:lstStyle/>
           <a:p>
-            <a:pPr algn="l" indent="0" marL="0">
+            <a:pPr marL="0" indent="0" algn="l">
               <a:buNone/>
             </a:pPr>
             <a:r>
@@ -37008,11 +36697,11 @@
           <a:bodyPr wrap="square" rtlCol="0" anchor="ctr"/>
           <a:lstStyle/>
           <a:p>
-            <a:pPr algn="r" indent="0" marL="0">
-              <a:buNone/>
-            </a:pPr>
-            <a:r>
-              <a:rPr lang="en-US" sz="900" b="1" spc="200" kern="0" dirty="0">
+            <a:pPr marL="0" indent="0" algn="r">
+              <a:buNone/>
+            </a:pPr>
+            <a:r>
+              <a:rPr lang="en-US" sz="900" b="1" kern="0" spc="200" dirty="0">
                 <a:solidFill>
                   <a:srgbClr val="777169"/>
                 </a:solidFill>
@@ -37047,11 +36736,11 @@
           <a:bodyPr wrap="square" rtlCol="0" anchor="ctr"/>
           <a:lstStyle/>
           <a:p>
-            <a:pPr algn="l" indent="0" marL="0">
-              <a:buNone/>
-            </a:pPr>
-            <a:r>
-              <a:rPr lang="en-US" sz="900" b="1" spc="300" kern="0" dirty="0">
+            <a:pPr marL="0" indent="0" algn="l">
+              <a:buNone/>
+            </a:pPr>
+            <a:r>
+              <a:rPr lang="en-US" sz="900" b="1" kern="0" spc="300" dirty="0">
                 <a:solidFill>
                   <a:srgbClr val="777169"/>
                 </a:solidFill>
@@ -37086,11 +36775,11 @@
           <a:bodyPr wrap="square" rtlCol="0" anchor="t"/>
           <a:lstStyle/>
           <a:p>
-            <a:pPr algn="l" indent="0" marL="0">
-              <a:buNone/>
-            </a:pPr>
-            <a:r>
-              <a:rPr lang="en-US" sz="2700" spc="-40" kern="0" dirty="0">
+            <a:pPr marL="0" indent="0" algn="l">
+              <a:buNone/>
+            </a:pPr>
+            <a:r>
+              <a:rPr lang="en-US" sz="2700" kern="0" spc="-40" dirty="0">
                 <a:solidFill>
                   <a:srgbClr val="0C0A09"/>
                 </a:solidFill>
@@ -37125,7 +36814,7 @@
           <a:bodyPr wrap="square" rtlCol="0" anchor="ctr"/>
           <a:lstStyle/>
           <a:p>
-            <a:pPr algn="l" indent="0" marL="0">
+            <a:pPr marL="0" indent="0" algn="l">
               <a:buNone/>
             </a:pPr>
             <a:r>
@@ -37187,7 +36876,7 @@
           <a:bodyPr wrap="square" rtlCol="0" anchor="ctr"/>
           <a:lstStyle/>
           <a:p>
-            <a:pPr algn="l" indent="0" marL="0">
+            <a:pPr marL="0" indent="0" algn="l">
               <a:buNone/>
             </a:pPr>
             <a:r>
@@ -37226,7 +36915,7 @@
           <a:bodyPr wrap="square" rtlCol="0" anchor="ctr"/>
           <a:lstStyle/>
           <a:p>
-            <a:pPr algn="r" indent="0" marL="0">
+            <a:pPr marL="0" indent="0" algn="r">
               <a:buNone/>
             </a:pPr>
             <a:r>
@@ -37270,7 +36959,7 @@
             <a:prstDash val="solid"/>
           </a:ln>
           <a:effectLst>
-            <a:outerShdw sx="100000" sy="100000" kx="0" ky="0" algn="bl" rotWithShape="0" blurRad="152400" dist="38100" dir="5400000">
+            <a:outerShdw blurRad="152400" dist="38100" dir="5400000" algn="bl" rotWithShape="0">
               <a:srgbClr val="000000">
                 <a:alpha val="6000"/>
               </a:srgbClr>
@@ -37299,7 +36988,7 @@
           <a:bodyPr wrap="square" rtlCol="0" anchor="ctr"/>
           <a:lstStyle/>
           <a:p>
-            <a:pPr indent="0" marL="0">
+            <a:pPr marL="0" indent="0">
               <a:buNone/>
             </a:pPr>
             <a:r>
@@ -37338,7 +37027,7 @@
           <a:bodyPr wrap="square" rtlCol="0" anchor="ctr"/>
           <a:lstStyle/>
           <a:p>
-            <a:pPr indent="0" marL="0">
+            <a:pPr marL="0" indent="0">
               <a:buNone/>
             </a:pPr>
             <a:r>
@@ -37377,7 +37066,7 @@
           <a:bodyPr wrap="square" rtlCol="0" anchor="ctr"/>
           <a:lstStyle/>
           <a:p>
-            <a:pPr indent="0" marL="0">
+            <a:pPr marL="0" indent="0">
               <a:buNone/>
             </a:pPr>
             <a:r>
@@ -37421,7 +37110,7 @@
             <a:prstDash val="solid"/>
           </a:ln>
           <a:effectLst>
-            <a:outerShdw sx="100000" sy="100000" kx="0" ky="0" algn="bl" rotWithShape="0" blurRad="152400" dist="38100" dir="5400000">
+            <a:outerShdw blurRad="152400" dist="38100" dir="5400000" algn="bl" rotWithShape="0">
               <a:srgbClr val="000000">
                 <a:alpha val="6000"/>
               </a:srgbClr>
@@ -37450,7 +37139,7 @@
           <a:bodyPr wrap="square" rtlCol="0" anchor="ctr"/>
           <a:lstStyle/>
           <a:p>
-            <a:pPr indent="0" marL="0">
+            <a:pPr marL="0" indent="0">
               <a:buNone/>
             </a:pPr>
             <a:r>
@@ -37489,7 +37178,7 @@
           <a:bodyPr wrap="square" rtlCol="0" anchor="ctr"/>
           <a:lstStyle/>
           <a:p>
-            <a:pPr indent="0" marL="0">
+            <a:pPr marL="0" indent="0">
               <a:buNone/>
             </a:pPr>
             <a:r>
@@ -37528,7 +37217,7 @@
           <a:bodyPr wrap="square" rtlCol="0" anchor="ctr"/>
           <a:lstStyle/>
           <a:p>
-            <a:pPr indent="0" marL="0">
+            <a:pPr marL="0" indent="0">
               <a:buNone/>
             </a:pPr>
             <a:r>
@@ -37572,7 +37261,7 @@
             <a:prstDash val="solid"/>
           </a:ln>
           <a:effectLst>
-            <a:outerShdw sx="100000" sy="100000" kx="0" ky="0" algn="bl" rotWithShape="0" blurRad="152400" dist="38100" dir="5400000">
+            <a:outerShdw blurRad="152400" dist="38100" dir="5400000" algn="bl" rotWithShape="0">
               <a:srgbClr val="000000">
                 <a:alpha val="6000"/>
               </a:srgbClr>
@@ -37601,11 +37290,11 @@
           <a:bodyPr wrap="square" rtlCol="0" anchor="ctr"/>
           <a:lstStyle/>
           <a:p>
-            <a:pPr indent="0" marL="0">
-              <a:buNone/>
-            </a:pPr>
-            <a:r>
-              <a:rPr lang="en-US" sz="5200" dirty="0">
+            <a:pPr marL="0" indent="0">
+              <a:buNone/>
+            </a:pPr>
+            <a:r>
+              <a:rPr lang="en-US" sz="4600" dirty="0">
                 <a:solidFill>
                   <a:srgbClr val="A7E5D3"/>
                 </a:solidFill>
@@ -37615,7 +37304,7 @@
               </a:rPr>
               <a:t>60</a:t>
             </a:r>
-            <a:endParaRPr lang="en-US" sz="5200" dirty="0"/>
+            <a:endParaRPr lang="en-US" sz="4600" dirty="0"/>
           </a:p>
         </p:txBody>
       </p:sp>
@@ -37640,7 +37329,7 @@
           <a:bodyPr wrap="square" rtlCol="0" anchor="ctr"/>
           <a:lstStyle/>
           <a:p>
-            <a:pPr indent="0" marL="0">
+            <a:pPr marL="0" indent="0">
               <a:buNone/>
             </a:pPr>
             <a:r>
@@ -37679,7 +37368,7 @@
           <a:bodyPr wrap="square" rtlCol="0" anchor="t"/>
           <a:lstStyle/>
           <a:p>
-            <a:pPr indent="0" marL="0">
+            <a:pPr marL="0" indent="0">
               <a:lnSpc>
                 <a:spcPct val="125000"/>
               </a:lnSpc>
@@ -37726,7 +37415,7 @@
             <a:prstDash val="solid"/>
           </a:ln>
           <a:effectLst>
-            <a:outerShdw sx="100000" sy="100000" kx="0" ky="0" algn="bl" rotWithShape="0" blurRad="152400" dist="38100" dir="5400000">
+            <a:outerShdw blurRad="152400" dist="38100" dir="5400000" algn="bl" rotWithShape="0">
               <a:srgbClr val="000000">
                 <a:alpha val="6000"/>
               </a:srgbClr>
@@ -37755,7 +37444,7 @@
           <a:bodyPr wrap="square" rtlCol="0" anchor="ctr"/>
           <a:lstStyle/>
           <a:p>
-            <a:pPr indent="0" marL="0">
+            <a:pPr marL="0" indent="0">
               <a:buNone/>
             </a:pPr>
             <a:r>
@@ -37794,7 +37483,7 @@
           <a:bodyPr wrap="square" rtlCol="0" anchor="t"/>
           <a:lstStyle/>
           <a:p>
-            <a:pPr indent="0" marL="0">
+            <a:pPr marL="0" indent="0">
               <a:lnSpc>
                 <a:spcPct val="150000"/>
               </a:lnSpc>
@@ -37811,12 +37500,6 @@
               </a:rPr>
               <a:t>천간 10개와 지지 12개를 순서대로 하나씩 짝지어 나갑니다. </a:t>
             </a:r>
-            <a:pPr indent="0" marL="0">
-              <a:lnSpc>
-                <a:spcPct val="150000"/>
-              </a:lnSpc>
-              <a:buNone/>
-            </a:pPr>
             <a:r>
               <a:rPr lang="en-US" sz="1400" b="1" dirty="0">
                 <a:solidFill>
@@ -37828,12 +37511,6 @@
               </a:rPr>
               <a:t>갑자 → 을축 → 병인 …</a:t>
             </a:r>
-            <a:pPr indent="0" marL="0">
-              <a:lnSpc>
-                <a:spcPct val="150000"/>
-              </a:lnSpc>
-              <a:buNone/>
-            </a:pPr>
             <a:r>
               <a:rPr lang="en-US" sz="1400" dirty="0">
                 <a:solidFill>
@@ -37897,7 +37574,7 @@
           <a:bodyPr wrap="square" rtlCol="0" anchor="ctr"/>
           <a:lstStyle/>
           <a:p>
-            <a:pPr algn="ctr" indent="0" marL="0">
+            <a:pPr marL="0" indent="0" algn="ctr">
               <a:buNone/>
             </a:pPr>
             <a:r>
@@ -37963,7 +37640,7 @@
           <a:bodyPr wrap="square" rtlCol="0" anchor="ctr"/>
           <a:lstStyle/>
           <a:p>
-            <a:pPr algn="ctr" indent="0" marL="0">
+            <a:pPr marL="0" indent="0" algn="ctr">
               <a:buNone/>
             </a:pPr>
             <a:r>
@@ -38029,7 +37706,7 @@
           <a:bodyPr wrap="square" rtlCol="0" anchor="ctr"/>
           <a:lstStyle/>
           <a:p>
-            <a:pPr algn="ctr" indent="0" marL="0">
+            <a:pPr marL="0" indent="0" algn="ctr">
               <a:buNone/>
             </a:pPr>
             <a:r>
@@ -38095,7 +37772,7 @@
           <a:bodyPr wrap="square" rtlCol="0" anchor="ctr"/>
           <a:lstStyle/>
           <a:p>
-            <a:pPr algn="ctr" indent="0" marL="0">
+            <a:pPr marL="0" indent="0" algn="ctr">
               <a:buNone/>
             </a:pPr>
             <a:r>
@@ -38161,7 +37838,7 @@
           <a:bodyPr wrap="square" rtlCol="0" anchor="ctr"/>
           <a:lstStyle/>
           <a:p>
-            <a:pPr algn="ctr" indent="0" marL="0">
+            <a:pPr marL="0" indent="0" algn="ctr">
               <a:buNone/>
             </a:pPr>
             <a:r>
@@ -38227,7 +37904,7 @@
           <a:bodyPr wrap="square" rtlCol="0" anchor="ctr"/>
           <a:lstStyle/>
           <a:p>
-            <a:pPr algn="ctr" indent="0" marL="0">
+            <a:pPr marL="0" indent="0" algn="ctr">
               <a:buNone/>
             </a:pPr>
             <a:r>
@@ -38293,7 +37970,7 @@
           <a:bodyPr wrap="square" rtlCol="0" anchor="ctr"/>
           <a:lstStyle/>
           <a:p>
-            <a:pPr algn="ctr" indent="0" marL="0">
+            <a:pPr marL="0" indent="0" algn="ctr">
               <a:buNone/>
             </a:pPr>
             <a:r>
@@ -38359,7 +38036,7 @@
           <a:bodyPr wrap="square" rtlCol="0" anchor="ctr"/>
           <a:lstStyle/>
           <a:p>
-            <a:pPr algn="ctr" indent="0" marL="0">
+            <a:pPr marL="0" indent="0" algn="ctr">
               <a:buNone/>
             </a:pPr>
             <a:r>
@@ -38425,7 +38102,7 @@
           <a:bodyPr wrap="square" rtlCol="0" anchor="ctr"/>
           <a:lstStyle/>
           <a:p>
-            <a:pPr algn="ctr" indent="0" marL="0">
+            <a:pPr marL="0" indent="0" algn="ctr">
               <a:buNone/>
             </a:pPr>
             <a:r>
@@ -38491,7 +38168,7 @@
           <a:bodyPr wrap="square" rtlCol="0" anchor="ctr"/>
           <a:lstStyle/>
           <a:p>
-            <a:pPr algn="ctr" indent="0" marL="0">
+            <a:pPr marL="0" indent="0" algn="ctr">
               <a:buNone/>
             </a:pPr>
             <a:r>
@@ -38530,7 +38207,7 @@
           <a:bodyPr wrap="square" rtlCol="0" anchor="ctr"/>
           <a:lstStyle/>
           <a:p>
-            <a:pPr indent="0" marL="0">
+            <a:pPr marL="0" indent="0">
               <a:buNone/>
             </a:pPr>
             <a:r>
@@ -38564,6 +38241,7 @@
         <a:solidFill>
           <a:srgbClr val="F5F5F5"/>
         </a:solidFill>
+        <a:effectLst/>
       </p:bgPr>
     </p:bg>
     <p:spTree>
@@ -38645,7 +38323,7 @@
           <a:bodyPr wrap="square" rtlCol="0" anchor="ctr"/>
           <a:lstStyle/>
           <a:p>
-            <a:pPr algn="l" indent="0" marL="0">
+            <a:pPr marL="0" indent="0" algn="l">
               <a:buNone/>
             </a:pPr>
             <a:r>
@@ -38684,11 +38362,11 @@
           <a:bodyPr wrap="square" rtlCol="0" anchor="ctr"/>
           <a:lstStyle/>
           <a:p>
-            <a:pPr algn="r" indent="0" marL="0">
-              <a:buNone/>
-            </a:pPr>
-            <a:r>
-              <a:rPr lang="en-US" sz="900" b="1" spc="200" kern="0" dirty="0">
+            <a:pPr marL="0" indent="0" algn="r">
+              <a:buNone/>
+            </a:pPr>
+            <a:r>
+              <a:rPr lang="en-US" sz="900" b="1" kern="0" spc="200" dirty="0">
                 <a:solidFill>
                   <a:srgbClr val="777169"/>
                 </a:solidFill>
@@ -38723,11 +38401,11 @@
           <a:bodyPr wrap="square" rtlCol="0" anchor="ctr"/>
           <a:lstStyle/>
           <a:p>
-            <a:pPr algn="l" indent="0" marL="0">
-              <a:buNone/>
-            </a:pPr>
-            <a:r>
-              <a:rPr lang="en-US" sz="1200" b="1" spc="500" kern="0" dirty="0">
+            <a:pPr marL="0" indent="0" algn="l">
+              <a:buNone/>
+            </a:pPr>
+            <a:r>
+              <a:rPr lang="en-US" sz="1200" b="1" kern="0" spc="500" dirty="0">
                 <a:solidFill>
                   <a:srgbClr val="777169"/>
                 </a:solidFill>
@@ -38762,11 +38440,11 @@
           <a:bodyPr wrap="square" rtlCol="0" anchor="t"/>
           <a:lstStyle/>
           <a:p>
-            <a:pPr algn="l" indent="0" marL="0">
-              <a:buNone/>
-            </a:pPr>
-            <a:r>
-              <a:rPr lang="en-US" sz="4800" spc="-100" kern="0" dirty="0">
+            <a:pPr marL="0" indent="0" algn="l">
+              <a:buNone/>
+            </a:pPr>
+            <a:r>
+              <a:rPr lang="en-US" sz="4800" kern="0" spc="-100" dirty="0">
                 <a:solidFill>
                   <a:srgbClr val="0C0A09"/>
                 </a:solidFill>
@@ -38801,11 +38479,11 @@
           <a:bodyPr wrap="square" rtlCol="0" anchor="ctr"/>
           <a:lstStyle/>
           <a:p>
-            <a:pPr algn="l" indent="0" marL="0">
-              <a:buNone/>
-            </a:pPr>
-            <a:r>
-              <a:rPr lang="en-US" sz="1400" b="1" spc="200" kern="0" dirty="0">
+            <a:pPr marL="0" indent="0" algn="l">
+              <a:buNone/>
+            </a:pPr>
+            <a:r>
+              <a:rPr lang="en-US" sz="1400" b="1" kern="0" spc="200" dirty="0">
                 <a:solidFill>
                   <a:srgbClr val="A8A29E"/>
                 </a:solidFill>
@@ -38840,7 +38518,7 @@
           <a:bodyPr wrap="square" rtlCol="0" anchor="t"/>
           <a:lstStyle/>
           <a:p>
-            <a:pPr algn="l" indent="0" marL="0">
+            <a:pPr marL="0" indent="0" algn="l">
               <a:lnSpc>
                 <a:spcPct val="145000"/>
               </a:lnSpc>
@@ -38905,7 +38583,7 @@
           <a:bodyPr wrap="square" rtlCol="0" anchor="ctr"/>
           <a:lstStyle/>
           <a:p>
-            <a:pPr algn="l" indent="0" marL="0">
+            <a:pPr marL="0" indent="0" algn="l">
               <a:buNone/>
             </a:pPr>
             <a:r>
@@ -38944,7 +38622,7 @@
           <a:bodyPr wrap="square" rtlCol="0" anchor="ctr"/>
           <a:lstStyle/>
           <a:p>
-            <a:pPr algn="r" indent="0" marL="0">
+            <a:pPr marL="0" indent="0" algn="r">
               <a:buNone/>
             </a:pPr>
             <a:r>
@@ -39263,4 +38941,299 @@
     </a:ext>
   </a:extLst>
 </a:theme>
+</file>
+
+<file path=ppt/theme/theme2.xml><?xml version="1.0" encoding="utf-8"?>
+<a:theme xmlns:a="http://schemas.openxmlformats.org/drawingml/2006/main" name="Office 테마">
+  <a:themeElements>
+    <a:clrScheme name="Office">
+      <a:dk1>
+        <a:sysClr val="windowText" lastClr="000000"/>
+      </a:dk1>
+      <a:lt1>
+        <a:sysClr val="window" lastClr="FFFFFF"/>
+      </a:lt1>
+      <a:dk2>
+        <a:srgbClr val="44546A"/>
+      </a:dk2>
+      <a:lt2>
+        <a:srgbClr val="E7E6E6"/>
+      </a:lt2>
+      <a:accent1>
+        <a:srgbClr val="4472C4"/>
+      </a:accent1>
+      <a:accent2>
+        <a:srgbClr val="ED7D31"/>
+      </a:accent2>
+      <a:accent3>
+        <a:srgbClr val="A5A5A5"/>
+      </a:accent3>
+      <a:accent4>
+        <a:srgbClr val="FFC000"/>
+      </a:accent4>
+      <a:accent5>
+        <a:srgbClr val="5B9BD5"/>
+      </a:accent5>
+      <a:accent6>
+        <a:srgbClr val="70AD47"/>
+      </a:accent6>
+      <a:hlink>
+        <a:srgbClr val="0563C1"/>
+      </a:hlink>
+      <a:folHlink>
+        <a:srgbClr val="954F72"/>
+      </a:folHlink>
+    </a:clrScheme>
+    <a:fontScheme name="Office">
+      <a:majorFont>
+        <a:latin typeface="맑은 고딕" panose="020F0302020204030204"/>
+        <a:ea typeface=""/>
+        <a:cs typeface=""/>
+        <a:font script="Jpan" typeface="游ゴシック Light"/>
+        <a:font script="Hang" typeface="맑은 고딕"/>
+        <a:font script="Hans" typeface="等线 Light"/>
+        <a:font script="Hant" typeface="新細明體"/>
+        <a:font script="Arab" typeface="Times New Roman"/>
+        <a:font script="Hebr" typeface="Times New Roman"/>
+        <a:font script="Thai" typeface="Angsana New"/>
+        <a:font script="Ethi" typeface="Nyala"/>
+        <a:font script="Beng" typeface="Vrinda"/>
+        <a:font script="Gujr" typeface="Shruti"/>
+        <a:font script="Khmr" typeface="MoolBoran"/>
+        <a:font script="Knda" typeface="Tunga"/>
+        <a:font script="Guru" typeface="Raavi"/>
+        <a:font script="Cans" typeface="Euphemia"/>
+        <a:font script="Cher" typeface="Plantagenet Cherokee"/>
+        <a:font script="Yiii" typeface="Microsoft Yi Baiti"/>
+        <a:font script="Tibt" typeface="Microsoft Himalaya"/>
+        <a:font script="Thaa" typeface="MV Boli"/>
+        <a:font script="Deva" typeface="Mangal"/>
+        <a:font script="Telu" typeface="Gautami"/>
+        <a:font script="Taml" typeface="Latha"/>
+        <a:font script="Syrc" typeface="Estrangelo Edessa"/>
+        <a:font script="Orya" typeface="Kalinga"/>
+        <a:font script="Mlym" typeface="Kartika"/>
+        <a:font script="Laoo" typeface="DokChampa"/>
+        <a:font script="Sinh" typeface="Iskoola Pota"/>
+        <a:font script="Mong" typeface="Mongolian Baiti"/>
+        <a:font script="Viet" typeface="Times New Roman"/>
+        <a:font script="Uigh" typeface="Microsoft Uighur"/>
+        <a:font script="Geor" typeface="Sylfaen"/>
+        <a:font script="Armn" typeface="Arial"/>
+        <a:font script="Bugi" typeface="Leelawadee UI"/>
+        <a:font script="Bopo" typeface="Microsoft JhengHei"/>
+        <a:font script="Java" typeface="Javanese Text"/>
+        <a:font script="Lisu" typeface="Segoe UI"/>
+        <a:font script="Mymr" typeface="Myanmar Text"/>
+        <a:font script="Nkoo" typeface="Ebrima"/>
+        <a:font script="Olck" typeface="Nirmala UI"/>
+        <a:font script="Osma" typeface="Ebrima"/>
+        <a:font script="Phag" typeface="Phagspa"/>
+        <a:font script="Syrn" typeface="Estrangelo Edessa"/>
+        <a:font script="Syrj" typeface="Estrangelo Edessa"/>
+        <a:font script="Syre" typeface="Estrangelo Edessa"/>
+        <a:font script="Sora" typeface="Nirmala UI"/>
+        <a:font script="Tale" typeface="Microsoft Tai Le"/>
+        <a:font script="Talu" typeface="Microsoft New Tai Lue"/>
+        <a:font script="Tfng" typeface="Ebrima"/>
+      </a:majorFont>
+      <a:minorFont>
+        <a:latin typeface="맑은 고딕" panose="020F0502020204030204"/>
+        <a:ea typeface=""/>
+        <a:cs typeface=""/>
+        <a:font script="Jpan" typeface="游ゴシック"/>
+        <a:font script="Hang" typeface="맑은 고딕"/>
+        <a:font script="Hans" typeface="等线"/>
+        <a:font script="Hant" typeface="新細明體"/>
+        <a:font script="Arab" typeface="Arial"/>
+        <a:font script="Hebr" typeface="Arial"/>
+        <a:font script="Thai" typeface="Cordia New"/>
+        <a:font script="Ethi" typeface="Nyala"/>
+        <a:font script="Beng" typeface="Vrinda"/>
+        <a:font script="Gujr" typeface="Shruti"/>
+        <a:font script="Khmr" typeface="DaunPenh"/>
+        <a:font script="Knda" typeface="Tunga"/>
+        <a:font script="Guru" typeface="Raavi"/>
+        <a:font script="Cans" typeface="Euphemia"/>
+        <a:font script="Cher" typeface="Plantagenet Cherokee"/>
+        <a:font script="Yiii" typeface="Microsoft Yi Baiti"/>
+        <a:font script="Tibt" typeface="Microsoft Himalaya"/>
+        <a:font script="Thaa" typeface="MV Boli"/>
+        <a:font script="Deva" typeface="Mangal"/>
+        <a:font script="Telu" typeface="Gautami"/>
+        <a:font script="Taml" typeface="Latha"/>
+        <a:font script="Syrc" typeface="Estrangelo Edessa"/>
+        <a:font script="Orya" typeface="Kalinga"/>
+        <a:font script="Mlym" typeface="Kartika"/>
+        <a:font script="Laoo" typeface="DokChampa"/>
+        <a:font script="Sinh" typeface="Iskoola Pota"/>
+        <a:font script="Mong" typeface="Mongolian Baiti"/>
+        <a:font script="Viet" typeface="Arial"/>
+        <a:font script="Uigh" typeface="Microsoft Uighur"/>
+        <a:font script="Geor" typeface="Sylfaen"/>
+        <a:font script="Armn" typeface="Arial"/>
+        <a:font script="Bugi" typeface="Leelawadee UI"/>
+        <a:font script="Bopo" typeface="Microsoft JhengHei"/>
+        <a:font script="Java" typeface="Javanese Text"/>
+        <a:font script="Lisu" typeface="Segoe UI"/>
+        <a:font script="Mymr" typeface="Myanmar Text"/>
+        <a:font script="Nkoo" typeface="Ebrima"/>
+        <a:font script="Olck" typeface="Nirmala UI"/>
+        <a:font script="Osma" typeface="Ebrima"/>
+        <a:font script="Phag" typeface="Phagspa"/>
+        <a:font script="Syrn" typeface="Estrangelo Edessa"/>
+        <a:font script="Syrj" typeface="Estrangelo Edessa"/>
+        <a:font script="Syre" typeface="Estrangelo Edessa"/>
+        <a:font script="Sora" typeface="Nirmala UI"/>
+        <a:font script="Tale" typeface="Microsoft Tai Le"/>
+        <a:font script="Talu" typeface="Microsoft New Tai Lue"/>
+        <a:font script="Tfng" typeface="Ebrima"/>
+      </a:minorFont>
+    </a:fontScheme>
+    <a:fmtScheme name="Office">
+      <a:fillStyleLst>
+        <a:solidFill>
+          <a:schemeClr val="phClr"/>
+        </a:solidFill>
+        <a:gradFill rotWithShape="1">
+          <a:gsLst>
+            <a:gs pos="0">
+              <a:schemeClr val="phClr">
+                <a:lumMod val="110000"/>
+                <a:satMod val="105000"/>
+                <a:tint val="67000"/>
+              </a:schemeClr>
+            </a:gs>
+            <a:gs pos="50000">
+              <a:schemeClr val="phClr">
+                <a:lumMod val="105000"/>
+                <a:satMod val="103000"/>
+                <a:tint val="73000"/>
+              </a:schemeClr>
+            </a:gs>
+            <a:gs pos="100000">
+              <a:schemeClr val="phClr">
+                <a:lumMod val="105000"/>
+                <a:satMod val="109000"/>
+                <a:tint val="81000"/>
+              </a:schemeClr>
+            </a:gs>
+          </a:gsLst>
+          <a:lin ang="5400000" scaled="0"/>
+        </a:gradFill>
+        <a:gradFill rotWithShape="1">
+          <a:gsLst>
+            <a:gs pos="0">
+              <a:schemeClr val="phClr">
+                <a:satMod val="103000"/>
+                <a:lumMod val="102000"/>
+                <a:tint val="94000"/>
+              </a:schemeClr>
+            </a:gs>
+            <a:gs pos="50000">
+              <a:schemeClr val="phClr">
+                <a:satMod val="110000"/>
+                <a:lumMod val="100000"/>
+                <a:shade val="100000"/>
+              </a:schemeClr>
+            </a:gs>
+            <a:gs pos="100000">
+              <a:schemeClr val="phClr">
+                <a:lumMod val="99000"/>
+                <a:satMod val="120000"/>
+                <a:shade val="78000"/>
+              </a:schemeClr>
+            </a:gs>
+          </a:gsLst>
+          <a:lin ang="5400000" scaled="0"/>
+        </a:gradFill>
+      </a:fillStyleLst>
+      <a:lnStyleLst>
+        <a:ln w="6350" cap="flat" cmpd="sng" algn="ctr">
+          <a:solidFill>
+            <a:schemeClr val="phClr"/>
+          </a:solidFill>
+          <a:prstDash val="solid"/>
+          <a:miter lim="800000"/>
+        </a:ln>
+        <a:ln w="12700" cap="flat" cmpd="sng" algn="ctr">
+          <a:solidFill>
+            <a:schemeClr val="phClr"/>
+          </a:solidFill>
+          <a:prstDash val="solid"/>
+          <a:miter lim="800000"/>
+        </a:ln>
+        <a:ln w="19050" cap="flat" cmpd="sng" algn="ctr">
+          <a:solidFill>
+            <a:schemeClr val="phClr"/>
+          </a:solidFill>
+          <a:prstDash val="solid"/>
+          <a:miter lim="800000"/>
+        </a:ln>
+      </a:lnStyleLst>
+      <a:effectStyleLst>
+        <a:effectStyle>
+          <a:effectLst/>
+        </a:effectStyle>
+        <a:effectStyle>
+          <a:effectLst/>
+        </a:effectStyle>
+        <a:effectStyle>
+          <a:effectLst>
+            <a:outerShdw blurRad="57150" dist="19050" dir="5400000" algn="ctr" rotWithShape="0">
+              <a:srgbClr val="000000">
+                <a:alpha val="63000"/>
+              </a:srgbClr>
+            </a:outerShdw>
+          </a:effectLst>
+        </a:effectStyle>
+      </a:effectStyleLst>
+      <a:bgFillStyleLst>
+        <a:solidFill>
+          <a:schemeClr val="phClr"/>
+        </a:solidFill>
+        <a:solidFill>
+          <a:schemeClr val="phClr">
+            <a:tint val="95000"/>
+            <a:satMod val="170000"/>
+          </a:schemeClr>
+        </a:solidFill>
+        <a:gradFill rotWithShape="1">
+          <a:gsLst>
+            <a:gs pos="0">
+              <a:schemeClr val="phClr">
+                <a:tint val="93000"/>
+                <a:satMod val="150000"/>
+                <a:shade val="98000"/>
+                <a:lumMod val="102000"/>
+              </a:schemeClr>
+            </a:gs>
+            <a:gs pos="50000">
+              <a:schemeClr val="phClr">
+                <a:tint val="98000"/>
+                <a:satMod val="130000"/>
+                <a:shade val="90000"/>
+                <a:lumMod val="103000"/>
+              </a:schemeClr>
+            </a:gs>
+            <a:gs pos="100000">
+              <a:schemeClr val="phClr">
+                <a:shade val="63000"/>
+                <a:satMod val="120000"/>
+              </a:schemeClr>
+            </a:gs>
+          </a:gsLst>
+          <a:lin ang="5400000" scaled="0"/>
+        </a:gradFill>
+      </a:bgFillStyleLst>
+    </a:fmtScheme>
+  </a:themeElements>
+  <a:objectDefaults/>
+  <a:extraClrSchemeLst/>
+  <a:extLst>
+    <a:ext uri="{05A4C25C-085E-4340-85A3-A5531E510DB2}">
+      <thm15:themeFamily xmlns:thm15="http://schemas.microsoft.com/office/thememl/2012/main" name="Office Theme" id="{62F939B6-93AF-4DB8-9C6B-D6C7DFDC589F}" vid="{4A3C46E8-61CC-4603-A589-7422A47A8E4A}"/>
+    </a:ext>
+  </a:extLst>
+</a:theme>
 </file>